--- a/static/ppts/G6_Sci_T4_Biodiversity.pptx
+++ b/static/ppts/G6_Sci_T4_Biodiversity.pptx
@@ -9,11 +9,9 @@
     <p:sldId id="257" r:id="rId3"/>
     <p:sldId id="258" r:id="rId4"/>
     <p:sldId id="259" r:id="rId5"/>
-    <p:sldId id="260" r:id="rId6"/>
-    <p:sldId id="261" r:id="rId7"/>
   </p:sldIdLst>
   <p:notesMasterIdLst>
-    <p:notesMasterId r:id="rId8"/>
+    <p:notesMasterId r:id="rId6"/>
   </p:notesMasterIdLst>
   <p:sldSz cx="9144000" cy="5143500"/>
   <p:notesSz cx="5143500" cy="9144000"/>
@@ -795,182 +793,6 @@
             <a:fld id="{F7021451-1387-4CA6-816F-3879F97B5CBC}" type="slidenum">
               <a:rPr lang="en-US"/>
               <a:t>4</a:t>
-            </a:fld>
-            <a:endParaRPr lang="en-US"/>
-          </a:p>
-        </p:txBody>
-      </p:sp>
-    </p:spTree>
-    <p:extLst>
-      <p:ext uri="{BB962C8B-B14F-4D97-AF65-F5344CB8AC3E}">
-        <p14:creationId xmlns:p14="http://schemas.microsoft.com/office/powerpoint/2010/main" val="1024086991"/>
-      </p:ext>
-    </p:extLst>
-  </p:cSld>
-  <p:clrMapOvr>
-    <a:masterClrMapping/>
-  </p:clrMapOvr>
-</p:notes>
-</file>
-
-<file path=ppt/notesSlides/notesSlide5.xml><?xml version="1.0" encoding="utf-8"?>
-<p:notes xmlns:a="http://schemas.openxmlformats.org/drawingml/2006/main" xmlns:r="http://schemas.openxmlformats.org/officeDocument/2006/relationships" xmlns:p="http://schemas.openxmlformats.org/presentationml/2006/main">
-  <p:cSld>
-    <p:spTree>
-      <p:nvGrpSpPr>
-        <p:cNvPr id="1" name=""/>
-        <p:cNvGrpSpPr/>
-        <p:nvPr/>
-      </p:nvGrpSpPr>
-      <p:grpSpPr>
-        <a:xfrm>
-          <a:off x="0" y="0"/>
-          <a:ext cx="0" cy="0"/>
-          <a:chOff x="0" y="0"/>
-          <a:chExt cx="0" cy="0"/>
-        </a:xfrm>
-      </p:grpSpPr>
-      <p:sp>
-        <p:nvSpPr>
-          <p:cNvPr id="2" name="Slide Image Placeholder 1"/>
-          <p:cNvSpPr>
-            <a:spLocks noGrp="1" noRot="1" noChangeAspect="1"/>
-          </p:cNvSpPr>
-          <p:nvPr>
-            <p:ph type="sldImg"/>
-          </p:nvPr>
-        </p:nvSpPr>
-        <p:spPr/>
-      </p:sp>
-      <p:sp>
-        <p:nvSpPr>
-          <p:cNvPr id="3" name="Notes Placeholder 2"/>
-          <p:cNvSpPr>
-            <a:spLocks noGrp="1"/>
-          </p:cNvSpPr>
-          <p:nvPr>
-            <p:ph type="body" idx="1"/>
-          </p:nvPr>
-        </p:nvSpPr>
-        <p:spPr/>
-        <p:txBody>
-          <a:bodyPr/>
-          <a:lstStyle/>
-          <a:p>
-            <a:r>
-              <a:rPr lang="en-US" dirty="0"/>
-              <a:t/>
-            </a:r>
-            <a:endParaRPr lang="en-US" dirty="0"/>
-          </a:p>
-        </p:txBody>
-      </p:sp>
-      <p:sp>
-        <p:nvSpPr>
-          <p:cNvPr id="4" name="Slide Number Placeholder 3"/>
-          <p:cNvSpPr>
-            <a:spLocks noGrp="1"/>
-          </p:cNvSpPr>
-          <p:nvPr>
-            <p:ph type="sldNum" sz="quarter" idx="10"/>
-          </p:nvPr>
-        </p:nvSpPr>
-        <p:spPr/>
-        <p:txBody>
-          <a:bodyPr/>
-          <a:lstStyle/>
-          <a:p>
-            <a:fld id="{F7021451-1387-4CA6-816F-3879F97B5CBC}" type="slidenum">
-              <a:rPr lang="en-US"/>
-              <a:t>5</a:t>
-            </a:fld>
-            <a:endParaRPr lang="en-US"/>
-          </a:p>
-        </p:txBody>
-      </p:sp>
-    </p:spTree>
-    <p:extLst>
-      <p:ext uri="{BB962C8B-B14F-4D97-AF65-F5344CB8AC3E}">
-        <p14:creationId xmlns:p14="http://schemas.microsoft.com/office/powerpoint/2010/main" val="1024086991"/>
-      </p:ext>
-    </p:extLst>
-  </p:cSld>
-  <p:clrMapOvr>
-    <a:masterClrMapping/>
-  </p:clrMapOvr>
-</p:notes>
-</file>
-
-<file path=ppt/notesSlides/notesSlide6.xml><?xml version="1.0" encoding="utf-8"?>
-<p:notes xmlns:a="http://schemas.openxmlformats.org/drawingml/2006/main" xmlns:r="http://schemas.openxmlformats.org/officeDocument/2006/relationships" xmlns:p="http://schemas.openxmlformats.org/presentationml/2006/main">
-  <p:cSld>
-    <p:spTree>
-      <p:nvGrpSpPr>
-        <p:cNvPr id="1" name=""/>
-        <p:cNvGrpSpPr/>
-        <p:nvPr/>
-      </p:nvGrpSpPr>
-      <p:grpSpPr>
-        <a:xfrm>
-          <a:off x="0" y="0"/>
-          <a:ext cx="0" cy="0"/>
-          <a:chOff x="0" y="0"/>
-          <a:chExt cx="0" cy="0"/>
-        </a:xfrm>
-      </p:grpSpPr>
-      <p:sp>
-        <p:nvSpPr>
-          <p:cNvPr id="2" name="Slide Image Placeholder 1"/>
-          <p:cNvSpPr>
-            <a:spLocks noGrp="1" noRot="1" noChangeAspect="1"/>
-          </p:cNvSpPr>
-          <p:nvPr>
-            <p:ph type="sldImg"/>
-          </p:nvPr>
-        </p:nvSpPr>
-        <p:spPr/>
-      </p:sp>
-      <p:sp>
-        <p:nvSpPr>
-          <p:cNvPr id="3" name="Notes Placeholder 2"/>
-          <p:cNvSpPr>
-            <a:spLocks noGrp="1"/>
-          </p:cNvSpPr>
-          <p:nvPr>
-            <p:ph type="body" idx="1"/>
-          </p:nvPr>
-        </p:nvSpPr>
-        <p:spPr/>
-        <p:txBody>
-          <a:bodyPr/>
-          <a:lstStyle/>
-          <a:p>
-            <a:r>
-              <a:rPr lang="en-US" dirty="0"/>
-              <a:t/>
-            </a:r>
-            <a:endParaRPr lang="en-US" dirty="0"/>
-          </a:p>
-        </p:txBody>
-      </p:sp>
-      <p:sp>
-        <p:nvSpPr>
-          <p:cNvPr id="4" name="Slide Number Placeholder 3"/>
-          <p:cNvSpPr>
-            <a:spLocks noGrp="1"/>
-          </p:cNvSpPr>
-          <p:nvPr>
-            <p:ph type="sldNum" sz="quarter" idx="10"/>
-          </p:nvPr>
-        </p:nvSpPr>
-        <p:spPr/>
-        <p:txBody>
-          <a:bodyPr/>
-          <a:lstStyle/>
-          <a:p>
-            <a:fld id="{F7021451-1387-4CA6-816F-3879F97B5CBC}" type="slidenum">
-              <a:rPr lang="en-US"/>
-              <a:t>6</a:t>
             </a:fld>
             <a:endParaRPr lang="en-US"/>
           </a:p>
@@ -1302,7 +1124,7 @@
     <p:bg>
       <p:bgPr>
         <a:solidFill>
-          <a:srgbClr val="2D8F3F"/>
+          <a:srgbClr val="1B2A4A"/>
         </a:solidFill>
       </p:bgPr>
     </p:bg>
@@ -1322,14 +1144,34 @@
       </p:grpSpPr>
       <p:sp>
         <p:nvSpPr>
-          <p:cNvPr id="2" name="Text 0"/>
+          <p:cNvPr id="2" name="Shape 0"/>
           <p:cNvSpPr/>
           <p:nvPr/>
         </p:nvSpPr>
         <p:spPr>
           <a:xfrm>
-            <a:off x="731520" y="1371600"/>
-            <a:ext cx="7680960" cy="1371600"/>
+            <a:off x="0" y="0"/>
+            <a:ext cx="109728" cy="5143500"/>
+          </a:xfrm>
+          <a:prstGeom prst="rect">
+            <a:avLst/>
+          </a:prstGeom>
+          <a:solidFill>
+            <a:srgbClr val="2A9D8F"/>
+          </a:solidFill>
+          <a:ln/>
+        </p:spPr>
+      </p:sp>
+      <p:sp>
+        <p:nvSpPr>
+          <p:cNvPr id="3" name="Text 1"/>
+          <p:cNvSpPr/>
+          <p:nvPr/>
+        </p:nvSpPr>
+        <p:spPr>
+          <a:xfrm>
+            <a:off x="731520" y="1280160"/>
+            <a:ext cx="7772400" cy="1371600"/>
           </a:xfrm>
           <a:prstGeom prst="rect">
             <a:avLst/>
@@ -1345,30 +1187,30 @@
               <a:buNone/>
             </a:pPr>
             <a:r>
-              <a:rPr lang="en-US" sz="4000" b="1" dirty="0">
+              <a:rPr lang="en-US" sz="3600" b="1" dirty="0">
                 <a:solidFill>
                   <a:srgbClr val="FFFFFF"/>
                 </a:solidFill>
-                <a:latin typeface="Calibri" pitchFamily="34" charset="0"/>
-                <a:ea typeface="Calibri" pitchFamily="34" charset="-122"/>
-                <a:cs typeface="Calibri" pitchFamily="34" charset="-120"/>
+                <a:latin typeface="Georgia" pitchFamily="34" charset="0"/>
+                <a:ea typeface="Georgia" pitchFamily="34" charset="-122"/>
+                <a:cs typeface="Georgia" pitchFamily="34" charset="-120"/>
               </a:rPr>
               <a:t>Biodiversity</a:t>
             </a:r>
-            <a:endParaRPr lang="en-US" sz="4000" dirty="0"/>
-          </a:p>
-        </p:txBody>
-      </p:sp>
-      <p:sp>
-        <p:nvSpPr>
-          <p:cNvPr id="3" name="Text 1"/>
+            <a:endParaRPr lang="en-US" sz="3600" dirty="0"/>
+          </a:p>
+        </p:txBody>
+      </p:sp>
+      <p:sp>
+        <p:nvSpPr>
+          <p:cNvPr id="4" name="Text 2"/>
           <p:cNvSpPr/>
           <p:nvPr/>
         </p:nvSpPr>
         <p:spPr>
           <a:xfrm>
-            <a:off x="731520" y="2926080"/>
-            <a:ext cx="7680960" cy="548640"/>
+            <a:off x="731520" y="2743200"/>
+            <a:ext cx="7772400" cy="548640"/>
           </a:xfrm>
           <a:prstGeom prst="rect">
             <a:avLst/>
@@ -1384,17 +1226,56 @@
               <a:buNone/>
             </a:pPr>
             <a:r>
-              <a:rPr lang="en-US" sz="1600" i="1" dirty="0">
+              <a:rPr lang="en-US" sz="1600" dirty="0">
                 <a:solidFill>
-                  <a:srgbClr val="FFFFFF"/>
+                  <a:srgbClr val="9B9690"/>
                 </a:solidFill>
                 <a:latin typeface="Calibri" pitchFamily="34" charset="0"/>
                 <a:ea typeface="Calibri" pitchFamily="34" charset="-122"/>
                 <a:cs typeface="Calibri" pitchFamily="34" charset="-120"/>
               </a:rPr>
-              <a:t>Grade 6 Science · Mr Zocchi</a:t>
+              <a:t>G6 Science · Ecology</a:t>
             </a:r>
             <a:endParaRPr lang="en-US" sz="1600" dirty="0"/>
+          </a:p>
+        </p:txBody>
+      </p:sp>
+      <p:sp>
+        <p:nvSpPr>
+          <p:cNvPr id="5" name="Text 3"/>
+          <p:cNvSpPr/>
+          <p:nvPr/>
+        </p:nvSpPr>
+        <p:spPr>
+          <a:xfrm>
+            <a:off x="731520" y="4389120"/>
+            <a:ext cx="7772400" cy="457200"/>
+          </a:xfrm>
+          <a:prstGeom prst="rect">
+            <a:avLst/>
+          </a:prstGeom>
+          <a:noFill/>
+          <a:ln/>
+        </p:spPr>
+        <p:txBody>
+          <a:bodyPr wrap="square" rtlCol="0" anchor="ctr"/>
+          <a:lstStyle/>
+          <a:p>
+            <a:pPr indent="0" marL="0">
+              <a:buNone/>
+            </a:pPr>
+            <a:r>
+              <a:rPr lang="en-US" sz="1000" dirty="0">
+                <a:solidFill>
+                  <a:srgbClr val="6B6660"/>
+                </a:solidFill>
+                <a:latin typeface="Calibri" pitchFamily="34" charset="0"/>
+                <a:ea typeface="Calibri" pitchFamily="34" charset="-122"/>
+                <a:cs typeface="Calibri" pitchFamily="34" charset="-120"/>
+              </a:rPr>
+              <a:t>Mr Zocchi · mrzocchi.com</a:t>
+            </a:r>
+            <a:endParaRPr lang="en-US" sz="1000" dirty="0"/>
           </a:p>
         </p:txBody>
       </p:sp>
@@ -1409,6 +1290,13 @@
 <file path=ppt/slides/slide2.xml><?xml version="1.0" encoding="utf-8"?>
 <p:sld xmlns:a="http://schemas.openxmlformats.org/drawingml/2006/main" xmlns:r="http://schemas.openxmlformats.org/officeDocument/2006/relationships" xmlns:p="http://schemas.openxmlformats.org/presentationml/2006/main">
   <p:cSld name="Slide 2">
+    <p:bg>
+      <p:bgPr>
+        <a:solidFill>
+          <a:srgbClr val="FFFFFF"/>
+        </a:solidFill>
+      </p:bgPr>
+    </p:bg>
     <p:spTree>
       <p:nvGrpSpPr>
         <p:cNvPr id="1" name=""/>
@@ -1432,13 +1320,13 @@
         <p:spPr>
           <a:xfrm>
             <a:off x="0" y="0"/>
-            <a:ext cx="9144000" cy="548640"/>
+            <a:ext cx="9144000" cy="54864"/>
           </a:xfrm>
           <a:prstGeom prst="rect">
             <a:avLst/>
           </a:prstGeom>
           <a:solidFill>
-            <a:srgbClr val="2D8F3F"/>
+            <a:srgbClr val="2A9D8F"/>
           </a:solidFill>
           <a:ln/>
         </p:spPr>
@@ -1451,8 +1339,8 @@
         </p:nvSpPr>
         <p:spPr>
           <a:xfrm>
-            <a:off x="457200" y="45720"/>
-            <a:ext cx="8229600" cy="457200"/>
+            <a:off x="548640" y="274320"/>
+            <a:ext cx="8046720" cy="640080"/>
           </a:xfrm>
           <a:prstGeom prst="rect">
             <a:avLst/>
@@ -1461,24 +1349,24 @@
           <a:ln/>
         </p:spPr>
         <p:txBody>
-          <a:bodyPr wrap="square" rtlCol="0" anchor="ctr"/>
+          <a:bodyPr wrap="square" lIns="0" tIns="0" rIns="0" bIns="0" rtlCol="0" anchor="ctr"/>
           <a:lstStyle/>
           <a:p>
             <a:pPr indent="0" marL="0">
               <a:buNone/>
             </a:pPr>
             <a:r>
-              <a:rPr lang="en-US" sz="1800" b="1" dirty="0">
+              <a:rPr lang="en-US" sz="2600" b="1" dirty="0">
                 <a:solidFill>
-                  <a:srgbClr val="FFFFFF"/>
+                  <a:srgbClr val="1B2A4A"/>
                 </a:solidFill>
-                <a:latin typeface="Calibri" pitchFamily="34" charset="0"/>
-                <a:ea typeface="Calibri" pitchFamily="34" charset="-122"/>
-                <a:cs typeface="Calibri" pitchFamily="34" charset="-120"/>
+                <a:latin typeface="Georgia" pitchFamily="34" charset="0"/>
+                <a:ea typeface="Georgia" pitchFamily="34" charset="-122"/>
+                <a:cs typeface="Georgia" pitchFamily="34" charset="-120"/>
               </a:rPr>
-              <a:t>What is biodiversity?</a:t>
-            </a:r>
-            <a:endParaRPr lang="en-US" sz="1800" dirty="0"/>
+              <a:t>What is Biodiversity?</a:t>
+            </a:r>
+            <a:endParaRPr lang="en-US" sz="2600" dirty="0"/>
           </a:p>
         </p:txBody>
       </p:sp>
@@ -1490,8 +1378,8 @@
         </p:nvSpPr>
         <p:spPr>
           <a:xfrm>
-            <a:off x="731520" y="1097280"/>
-            <a:ext cx="7680960" cy="3200400"/>
+            <a:off x="548640" y="1097280"/>
+            <a:ext cx="8046720" cy="3474720"/>
           </a:xfrm>
           <a:prstGeom prst="rect">
             <a:avLst/>
@@ -1500,47 +1388,112 @@
           <a:ln/>
         </p:spPr>
         <p:txBody>
-          <a:bodyPr wrap="square" rtlCol="0" anchor="ctr"/>
+          <a:bodyPr wrap="square" rtlCol="0" anchor="t"/>
           <a:lstStyle/>
           <a:p>
-            <a:pPr indent="0" marL="0">
-              <a:buNone/>
+            <a:pPr marL="342900" indent="-342900">
+              <a:spcAft>
+                <a:spcPts val="800"/>
+              </a:spcAft>
+              <a:buSzPct val="100000"/>
+              <a:buChar char="•"/>
             </a:pPr>
             <a:r>
-              <a:rPr lang="en-US" sz="1600" dirty="0">
+              <a:rPr lang="en-US" sz="1500" dirty="0">
                 <a:solidFill>
-                  <a:srgbClr val="363636"/>
+                  <a:srgbClr val="3D3A36"/>
                 </a:solidFill>
                 <a:latin typeface="Calibri" pitchFamily="34" charset="0"/>
                 <a:ea typeface="Calibri" pitchFamily="34" charset="-122"/>
                 <a:cs typeface="Calibri" pitchFamily="34" charset="-120"/>
               </a:rPr>
-              <a:t>Content for: What is biodiversity?</a:t>
-            </a:r>
-            <a:endParaRPr lang="en-US" sz="1600" dirty="0"/>
-          </a:p>
-          <a:p>
-            <a:pPr indent="0" marL="0">
-              <a:buNone/>
+              <a:t>The variety of different species in an ecosystem</a:t>
+            </a:r>
+            <a:endParaRPr lang="en-US" sz="1500" dirty="0"/>
+          </a:p>
+          <a:p>
+            <a:pPr marL="342900" indent="-342900">
+              <a:spcAft>
+                <a:spcPts val="800"/>
+              </a:spcAft>
+              <a:buSzPct val="100000"/>
+              <a:buChar char="•"/>
             </a:pPr>
-            <a:endParaRPr lang="en-US" sz="1600" dirty="0"/>
-          </a:p>
-          <a:p>
-            <a:pPr indent="0" marL="0">
-              <a:buNone/>
-            </a:pPr>
-            <a:r>
-              <a:rPr lang="en-US" sz="1600" dirty="0">
+            <a:r>
+              <a:rPr lang="en-US" sz="1500" dirty="0">
                 <a:solidFill>
-                  <a:srgbClr val="363636"/>
+                  <a:srgbClr val="3D3A36"/>
                 </a:solidFill>
                 <a:latin typeface="Calibri" pitchFamily="34" charset="0"/>
                 <a:ea typeface="Calibri" pitchFamily="34" charset="-122"/>
                 <a:cs typeface="Calibri" pitchFamily="34" charset="-120"/>
               </a:rPr>
-              <a:t>Key points will be covered in class.</a:t>
-            </a:r>
-            <a:endParaRPr lang="en-US" sz="1600" dirty="0"/>
+              <a:t>High biodiversity = healthy, stable ecosystem</a:t>
+            </a:r>
+            <a:endParaRPr lang="en-US" sz="1500" dirty="0"/>
+          </a:p>
+          <a:p>
+            <a:pPr marL="342900" indent="-342900">
+              <a:spcAft>
+                <a:spcPts val="800"/>
+              </a:spcAft>
+              <a:buSzPct val="100000"/>
+              <a:buChar char="•"/>
+            </a:pPr>
+            <a:r>
+              <a:rPr lang="en-US" sz="1500" dirty="0">
+                <a:solidFill>
+                  <a:srgbClr val="3D3A36"/>
+                </a:solidFill>
+                <a:latin typeface="Calibri" pitchFamily="34" charset="0"/>
+                <a:ea typeface="Calibri" pitchFamily="34" charset="-122"/>
+                <a:cs typeface="Calibri" pitchFamily="34" charset="-120"/>
+              </a:rPr>
+              <a:t>Low biodiversity = fragile, vulnerable ecosystem</a:t>
+            </a:r>
+            <a:endParaRPr lang="en-US" sz="1500" dirty="0"/>
+          </a:p>
+          <a:p>
+            <a:pPr marL="342900" indent="-342900">
+              <a:spcAft>
+                <a:spcPts val="800"/>
+              </a:spcAft>
+              <a:buSzPct val="100000"/>
+              <a:buChar char="•"/>
+            </a:pPr>
+            <a:r>
+              <a:rPr lang="en-US" sz="1500" dirty="0">
+                <a:solidFill>
+                  <a:srgbClr val="3D3A36"/>
+                </a:solidFill>
+                <a:latin typeface="Calibri" pitchFamily="34" charset="0"/>
+                <a:ea typeface="Calibri" pitchFamily="34" charset="-122"/>
+                <a:cs typeface="Calibri" pitchFamily="34" charset="-120"/>
+              </a:rPr>
+              <a:t>Rainforests and coral reefs have the highest biodiversity</a:t>
+            </a:r>
+            <a:endParaRPr lang="en-US" sz="1500" dirty="0"/>
+          </a:p>
+          <a:p>
+            <a:pPr marL="342900" indent="-342900">
+              <a:spcAft>
+                <a:spcPts val="800"/>
+              </a:spcAft>
+              <a:buSzPct val="100000"/>
+              <a:buChar char="•"/>
+            </a:pPr>
+            <a:r>
+              <a:rPr lang="en-US" sz="1500" dirty="0">
+                <a:solidFill>
+                  <a:srgbClr val="3D3A36"/>
+                </a:solidFill>
+                <a:latin typeface="Calibri" pitchFamily="34" charset="0"/>
+                <a:ea typeface="Calibri" pitchFamily="34" charset="-122"/>
+                <a:cs typeface="Calibri" pitchFamily="34" charset="-120"/>
+              </a:rPr>
+              <a:t>We need biodiversity for food, medicine, clean air, and water</a:t>
+            </a:r>
+            <a:endParaRPr lang="en-US" sz="1500" dirty="0"/>
           </a:p>
         </p:txBody>
       </p:sp>
@@ -1552,8 +1505,8 @@
         </p:nvSpPr>
         <p:spPr>
           <a:xfrm>
-            <a:off x="7772400" y="4663440"/>
-            <a:ext cx="1097280" cy="365760"/>
+            <a:off x="548640" y="4800600"/>
+            <a:ext cx="3657600" cy="274320"/>
           </a:xfrm>
           <a:prstGeom prst="rect">
             <a:avLst/>
@@ -1565,21 +1518,18 @@
           <a:bodyPr wrap="square" rtlCol="0" anchor="ctr"/>
           <a:lstStyle/>
           <a:p>
-            <a:pPr algn="r" indent="0" marL="0">
+            <a:pPr indent="0" marL="0">
               <a:buNone/>
             </a:pPr>
             <a:r>
-              <a:rPr lang="en-US" sz="1000" dirty="0">
+              <a:rPr lang="en-US" sz="800" dirty="0">
                 <a:solidFill>
-                  <a:srgbClr val="999999"/>
+                  <a:srgbClr val="9B9690"/>
                 </a:solidFill>
-                <a:latin typeface="Calibri" pitchFamily="34" charset="0"/>
-                <a:ea typeface="Calibri" pitchFamily="34" charset="-122"/>
-                <a:cs typeface="Calibri" pitchFamily="34" charset="-120"/>
               </a:rPr>
-              <a:t>2 / 6</a:t>
-            </a:r>
-            <a:endParaRPr lang="en-US" sz="1000" dirty="0"/>
+              <a:t>mrzocchi.com</a:t>
+            </a:r>
+            <a:endParaRPr lang="en-US" sz="800" dirty="0"/>
           </a:p>
         </p:txBody>
       </p:sp>
@@ -1594,6 +1544,13 @@
 <file path=ppt/slides/slide3.xml><?xml version="1.0" encoding="utf-8"?>
 <p:sld xmlns:a="http://schemas.openxmlformats.org/drawingml/2006/main" xmlns:r="http://schemas.openxmlformats.org/officeDocument/2006/relationships" xmlns:p="http://schemas.openxmlformats.org/presentationml/2006/main">
   <p:cSld name="Slide 3">
+    <p:bg>
+      <p:bgPr>
+        <a:solidFill>
+          <a:srgbClr val="FFFFFF"/>
+        </a:solidFill>
+      </p:bgPr>
+    </p:bg>
     <p:spTree>
       <p:nvGrpSpPr>
         <p:cNvPr id="1" name=""/>
@@ -1617,13 +1574,13 @@
         <p:spPr>
           <a:xfrm>
             <a:off x="0" y="0"/>
-            <a:ext cx="9144000" cy="548640"/>
+            <a:ext cx="9144000" cy="54864"/>
           </a:xfrm>
           <a:prstGeom prst="rect">
             <a:avLst/>
           </a:prstGeom>
           <a:solidFill>
-            <a:srgbClr val="2D8F3F"/>
+            <a:srgbClr val="2A9D8F"/>
           </a:solidFill>
           <a:ln/>
         </p:spPr>
@@ -1636,8 +1593,8 @@
         </p:nvSpPr>
         <p:spPr>
           <a:xfrm>
-            <a:off x="457200" y="45720"/>
-            <a:ext cx="8229600" cy="457200"/>
+            <a:off x="548640" y="274320"/>
+            <a:ext cx="8046720" cy="640080"/>
           </a:xfrm>
           <a:prstGeom prst="rect">
             <a:avLst/>
@@ -1646,24 +1603,24 @@
           <a:ln/>
         </p:spPr>
         <p:txBody>
-          <a:bodyPr wrap="square" rtlCol="0" anchor="ctr"/>
+          <a:bodyPr wrap="square" lIns="0" tIns="0" rIns="0" bIns="0" rtlCol="0" anchor="ctr"/>
           <a:lstStyle/>
           <a:p>
             <a:pPr indent="0" marL="0">
               <a:buNone/>
             </a:pPr>
             <a:r>
-              <a:rPr lang="en-US" sz="1800" b="1" dirty="0">
+              <a:rPr lang="en-US" sz="2600" b="1" dirty="0">
                 <a:solidFill>
-                  <a:srgbClr val="FFFFFF"/>
+                  <a:srgbClr val="1B2A4A"/>
                 </a:solidFill>
-                <a:latin typeface="Calibri" pitchFamily="34" charset="0"/>
-                <a:ea typeface="Calibri" pitchFamily="34" charset="-122"/>
-                <a:cs typeface="Calibri" pitchFamily="34" charset="-120"/>
+                <a:latin typeface="Georgia" pitchFamily="34" charset="0"/>
+                <a:ea typeface="Georgia" pitchFamily="34" charset="-122"/>
+                <a:cs typeface="Georgia" pitchFamily="34" charset="-120"/>
               </a:rPr>
-              <a:t>Why biodiversity matters</a:t>
-            </a:r>
-            <a:endParaRPr lang="en-US" sz="1800" dirty="0"/>
+              <a:t>Threats &amp; Protection</a:t>
+            </a:r>
+            <a:endParaRPr lang="en-US" sz="2600" dirty="0"/>
           </a:p>
         </p:txBody>
       </p:sp>
@@ -1675,8 +1632,8 @@
         </p:nvSpPr>
         <p:spPr>
           <a:xfrm>
-            <a:off x="731520" y="1097280"/>
-            <a:ext cx="7680960" cy="3200400"/>
+            <a:off x="548640" y="1097280"/>
+            <a:ext cx="8046720" cy="3474720"/>
           </a:xfrm>
           <a:prstGeom prst="rect">
             <a:avLst/>
@@ -1685,47 +1642,112 @@
           <a:ln/>
         </p:spPr>
         <p:txBody>
-          <a:bodyPr wrap="square" rtlCol="0" anchor="ctr"/>
+          <a:bodyPr wrap="square" rtlCol="0" anchor="t"/>
           <a:lstStyle/>
           <a:p>
-            <a:pPr indent="0" marL="0">
-              <a:buNone/>
+            <a:pPr marL="342900" indent="-342900">
+              <a:spcAft>
+                <a:spcPts val="800"/>
+              </a:spcAft>
+              <a:buSzPct val="100000"/>
+              <a:buChar char="•"/>
             </a:pPr>
             <a:r>
-              <a:rPr lang="en-US" sz="1600" dirty="0">
+              <a:rPr lang="en-US" sz="1500" dirty="0">
                 <a:solidFill>
-                  <a:srgbClr val="363636"/>
+                  <a:srgbClr val="3D3A36"/>
                 </a:solidFill>
                 <a:latin typeface="Calibri" pitchFamily="34" charset="0"/>
                 <a:ea typeface="Calibri" pitchFamily="34" charset="-122"/>
                 <a:cs typeface="Calibri" pitchFamily="34" charset="-120"/>
               </a:rPr>
-              <a:t>Content for: Why biodiversity matters</a:t>
-            </a:r>
-            <a:endParaRPr lang="en-US" sz="1600" dirty="0"/>
-          </a:p>
-          <a:p>
-            <a:pPr indent="0" marL="0">
-              <a:buNone/>
+              <a:t>Main threats: habitat destruction, climate change, pollution, invasive species</a:t>
+            </a:r>
+            <a:endParaRPr lang="en-US" sz="1500" dirty="0"/>
+          </a:p>
+          <a:p>
+            <a:pPr marL="342900" indent="-342900">
+              <a:spcAft>
+                <a:spcPts val="800"/>
+              </a:spcAft>
+              <a:buSzPct val="100000"/>
+              <a:buChar char="•"/>
             </a:pPr>
-            <a:endParaRPr lang="en-US" sz="1600" dirty="0"/>
-          </a:p>
-          <a:p>
-            <a:pPr indent="0" marL="0">
-              <a:buNone/>
-            </a:pPr>
-            <a:r>
-              <a:rPr lang="en-US" sz="1600" dirty="0">
+            <a:r>
+              <a:rPr lang="en-US" sz="1500" dirty="0">
                 <a:solidFill>
-                  <a:srgbClr val="363636"/>
+                  <a:srgbClr val="3D3A36"/>
                 </a:solidFill>
                 <a:latin typeface="Calibri" pitchFamily="34" charset="0"/>
                 <a:ea typeface="Calibri" pitchFamily="34" charset="-122"/>
                 <a:cs typeface="Calibri" pitchFamily="34" charset="-120"/>
               </a:rPr>
-              <a:t>Key points will be covered in class.</a:t>
-            </a:r>
-            <a:endParaRPr lang="en-US" sz="1600" dirty="0"/>
+              <a:t>Extinction is permanent — once a species is gone, it's gone forever</a:t>
+            </a:r>
+            <a:endParaRPr lang="en-US" sz="1500" dirty="0"/>
+          </a:p>
+          <a:p>
+            <a:pPr marL="342900" indent="-342900">
+              <a:spcAft>
+                <a:spcPts val="800"/>
+              </a:spcAft>
+              <a:buSzPct val="100000"/>
+              <a:buChar char="•"/>
+            </a:pPr>
+            <a:r>
+              <a:rPr lang="en-US" sz="1500" dirty="0">
+                <a:solidFill>
+                  <a:srgbClr val="3D3A36"/>
+                </a:solidFill>
+                <a:latin typeface="Calibri" pitchFamily="34" charset="0"/>
+                <a:ea typeface="Calibri" pitchFamily="34" charset="-122"/>
+                <a:cs typeface="Calibri" pitchFamily="34" charset="-120"/>
+              </a:rPr>
+              <a:t>Protected areas: national parks, marine reserves, wildlife corridors</a:t>
+            </a:r>
+            <a:endParaRPr lang="en-US" sz="1500" dirty="0"/>
+          </a:p>
+          <a:p>
+            <a:pPr marL="342900" indent="-342900">
+              <a:spcAft>
+                <a:spcPts val="800"/>
+              </a:spcAft>
+              <a:buSzPct val="100000"/>
+              <a:buChar char="•"/>
+            </a:pPr>
+            <a:r>
+              <a:rPr lang="en-US" sz="1500" dirty="0">
+                <a:solidFill>
+                  <a:srgbClr val="3D3A36"/>
+                </a:solidFill>
+                <a:latin typeface="Calibri" pitchFamily="34" charset="0"/>
+                <a:ea typeface="Calibri" pitchFamily="34" charset="-122"/>
+                <a:cs typeface="Calibri" pitchFamily="34" charset="-120"/>
+              </a:rPr>
+              <a:t>Captive breeding programmes help endangered species</a:t>
+            </a:r>
+            <a:endParaRPr lang="en-US" sz="1500" dirty="0"/>
+          </a:p>
+          <a:p>
+            <a:pPr marL="342900" indent="-342900">
+              <a:spcAft>
+                <a:spcPts val="800"/>
+              </a:spcAft>
+              <a:buSzPct val="100000"/>
+              <a:buChar char="•"/>
+            </a:pPr>
+            <a:r>
+              <a:rPr lang="en-US" sz="1500" dirty="0">
+                <a:solidFill>
+                  <a:srgbClr val="3D3A36"/>
+                </a:solidFill>
+                <a:latin typeface="Calibri" pitchFamily="34" charset="0"/>
+                <a:ea typeface="Calibri" pitchFamily="34" charset="-122"/>
+                <a:cs typeface="Calibri" pitchFamily="34" charset="-120"/>
+              </a:rPr>
+              <a:t>Seed banks preserve plant genetic diversity for the future</a:t>
+            </a:r>
+            <a:endParaRPr lang="en-US" sz="1500" dirty="0"/>
           </a:p>
         </p:txBody>
       </p:sp>
@@ -1737,8 +1759,8 @@
         </p:nvSpPr>
         <p:spPr>
           <a:xfrm>
-            <a:off x="7772400" y="4663440"/>
-            <a:ext cx="1097280" cy="365760"/>
+            <a:off x="548640" y="4800600"/>
+            <a:ext cx="3657600" cy="274320"/>
           </a:xfrm>
           <a:prstGeom prst="rect">
             <a:avLst/>
@@ -1750,21 +1772,18 @@
           <a:bodyPr wrap="square" rtlCol="0" anchor="ctr"/>
           <a:lstStyle/>
           <a:p>
-            <a:pPr algn="r" indent="0" marL="0">
+            <a:pPr indent="0" marL="0">
               <a:buNone/>
             </a:pPr>
             <a:r>
-              <a:rPr lang="en-US" sz="1000" dirty="0">
+              <a:rPr lang="en-US" sz="800" dirty="0">
                 <a:solidFill>
-                  <a:srgbClr val="999999"/>
+                  <a:srgbClr val="9B9690"/>
                 </a:solidFill>
-                <a:latin typeface="Calibri" pitchFamily="34" charset="0"/>
-                <a:ea typeface="Calibri" pitchFamily="34" charset="-122"/>
-                <a:cs typeface="Calibri" pitchFamily="34" charset="-120"/>
               </a:rPr>
-              <a:t>3 / 6</a:t>
-            </a:r>
-            <a:endParaRPr lang="en-US" sz="1000" dirty="0"/>
+              <a:t>mrzocchi.com</a:t>
+            </a:r>
+            <a:endParaRPr lang="en-US" sz="800" dirty="0"/>
           </a:p>
         </p:txBody>
       </p:sp>
@@ -1779,6 +1798,13 @@
 <file path=ppt/slides/slide4.xml><?xml version="1.0" encoding="utf-8"?>
 <p:sld xmlns:a="http://schemas.openxmlformats.org/drawingml/2006/main" xmlns:r="http://schemas.openxmlformats.org/officeDocument/2006/relationships" xmlns:p="http://schemas.openxmlformats.org/presentationml/2006/main">
   <p:cSld name="Slide 4">
+    <p:bg>
+      <p:bgPr>
+        <a:solidFill>
+          <a:srgbClr val="1B2A4A"/>
+        </a:solidFill>
+      </p:bgPr>
+    </p:bg>
     <p:spTree>
       <p:nvGrpSpPr>
         <p:cNvPr id="1" name=""/>
@@ -1802,13 +1828,13 @@
         <p:spPr>
           <a:xfrm>
             <a:off x="0" y="0"/>
-            <a:ext cx="9144000" cy="548640"/>
+            <a:ext cx="9144000" cy="54864"/>
           </a:xfrm>
           <a:prstGeom prst="rect">
             <a:avLst/>
           </a:prstGeom>
           <a:solidFill>
-            <a:srgbClr val="2D8F3F"/>
+            <a:srgbClr val="2A9D8F"/>
           </a:solidFill>
           <a:ln/>
         </p:spPr>
@@ -1821,8 +1847,8 @@
         </p:nvSpPr>
         <p:spPr>
           <a:xfrm>
-            <a:off x="457200" y="45720"/>
-            <a:ext cx="8229600" cy="457200"/>
+            <a:off x="548640" y="457200"/>
+            <a:ext cx="8046720" cy="640080"/>
           </a:xfrm>
           <a:prstGeom prst="rect">
             <a:avLst/>
@@ -1838,17 +1864,17 @@
               <a:buNone/>
             </a:pPr>
             <a:r>
-              <a:rPr lang="en-US" sz="1800" b="1" dirty="0">
+              <a:rPr lang="en-US" sz="2800" b="1" dirty="0">
                 <a:solidFill>
                   <a:srgbClr val="FFFFFF"/>
                 </a:solidFill>
-                <a:latin typeface="Calibri" pitchFamily="34" charset="0"/>
-                <a:ea typeface="Calibri" pitchFamily="34" charset="-122"/>
-                <a:cs typeface="Calibri" pitchFamily="34" charset="-120"/>
+                <a:latin typeface="Georgia" pitchFamily="34" charset="0"/>
+                <a:ea typeface="Georgia" pitchFamily="34" charset="-122"/>
+                <a:cs typeface="Georgia" pitchFamily="34" charset="-120"/>
               </a:rPr>
-              <a:t>Threats to biodiversity</a:t>
-            </a:r>
-            <a:endParaRPr lang="en-US" sz="1800" dirty="0"/>
+              <a:t>Key Takeaways</a:t>
+            </a:r>
+            <a:endParaRPr lang="en-US" sz="2800" dirty="0"/>
           </a:p>
         </p:txBody>
       </p:sp>
@@ -1860,7 +1886,7 @@
         </p:nvSpPr>
         <p:spPr>
           <a:xfrm>
-            <a:off x="731520" y="1097280"/>
+            <a:off x="731520" y="1371600"/>
             <a:ext cx="7680960" cy="3200400"/>
           </a:xfrm>
           <a:prstGeom prst="rect">
@@ -1870,45 +1896,89 @@
           <a:ln/>
         </p:spPr>
         <p:txBody>
-          <a:bodyPr wrap="square" rtlCol="0" anchor="ctr"/>
+          <a:bodyPr wrap="square" rtlCol="0" anchor="t"/>
           <a:lstStyle/>
           <a:p>
-            <a:pPr indent="0" marL="0">
-              <a:buNone/>
+            <a:pPr marL="342900" indent="-342900">
+              <a:spcAft>
+                <a:spcPts val="1000"/>
+              </a:spcAft>
+              <a:buSzPct val="100000"/>
+              <a:buChar char="•"/>
             </a:pPr>
             <a:r>
               <a:rPr lang="en-US" sz="1600" dirty="0">
                 <a:solidFill>
-                  <a:srgbClr val="363636"/>
+                  <a:srgbClr val="CADCFC"/>
                 </a:solidFill>
                 <a:latin typeface="Calibri" pitchFamily="34" charset="0"/>
                 <a:ea typeface="Calibri" pitchFamily="34" charset="-122"/>
                 <a:cs typeface="Calibri" pitchFamily="34" charset="-120"/>
               </a:rPr>
-              <a:t>Content for: Threats to biodiversity</a:t>
+              <a:t>Biodiversity = variety of species in an ecosystem</a:t>
             </a:r>
             <a:endParaRPr lang="en-US" sz="1600" dirty="0"/>
           </a:p>
           <a:p>
-            <a:pPr indent="0" marL="0">
-              <a:buNone/>
-            </a:pPr>
-            <a:endParaRPr lang="en-US" sz="1600" dirty="0"/>
-          </a:p>
-          <a:p>
-            <a:pPr indent="0" marL="0">
-              <a:buNone/>
+            <a:pPr marL="342900" indent="-342900">
+              <a:spcAft>
+                <a:spcPts val="1000"/>
+              </a:spcAft>
+              <a:buSzPct val="100000"/>
+              <a:buChar char="•"/>
             </a:pPr>
             <a:r>
               <a:rPr lang="en-US" sz="1600" dirty="0">
                 <a:solidFill>
-                  <a:srgbClr val="363636"/>
+                  <a:srgbClr val="CADCFC"/>
                 </a:solidFill>
                 <a:latin typeface="Calibri" pitchFamily="34" charset="0"/>
                 <a:ea typeface="Calibri" pitchFamily="34" charset="-122"/>
                 <a:cs typeface="Calibri" pitchFamily="34" charset="-120"/>
               </a:rPr>
-              <a:t>Key points will be covered in class.</a:t>
+              <a:t>High biodiversity = stable ecosystem; low = fragile</a:t>
+            </a:r>
+            <a:endParaRPr lang="en-US" sz="1600" dirty="0"/>
+          </a:p>
+          <a:p>
+            <a:pPr marL="342900" indent="-342900">
+              <a:spcAft>
+                <a:spcPts val="1000"/>
+              </a:spcAft>
+              <a:buSzPct val="100000"/>
+              <a:buChar char="•"/>
+            </a:pPr>
+            <a:r>
+              <a:rPr lang="en-US" sz="1600" dirty="0">
+                <a:solidFill>
+                  <a:srgbClr val="CADCFC"/>
+                </a:solidFill>
+                <a:latin typeface="Calibri" pitchFamily="34" charset="0"/>
+                <a:ea typeface="Calibri" pitchFamily="34" charset="-122"/>
+                <a:cs typeface="Calibri" pitchFamily="34" charset="-120"/>
+              </a:rPr>
+              <a:t>Biggest threats: habitat loss, climate change, pollution</a:t>
+            </a:r>
+            <a:endParaRPr lang="en-US" sz="1600" dirty="0"/>
+          </a:p>
+          <a:p>
+            <a:pPr marL="342900" indent="-342900">
+              <a:spcAft>
+                <a:spcPts val="1000"/>
+              </a:spcAft>
+              <a:buSzPct val="100000"/>
+              <a:buChar char="•"/>
+            </a:pPr>
+            <a:r>
+              <a:rPr lang="en-US" sz="1600" dirty="0">
+                <a:solidFill>
+                  <a:srgbClr val="CADCFC"/>
+                </a:solidFill>
+                <a:latin typeface="Calibri" pitchFamily="34" charset="0"/>
+                <a:ea typeface="Calibri" pitchFamily="34" charset="-122"/>
+                <a:cs typeface="Calibri" pitchFamily="34" charset="-120"/>
+              </a:rPr>
+              <a:t>Protection: nature reserves, breeding programmes, sustainable practices</a:t>
             </a:r>
             <a:endParaRPr lang="en-US" sz="1600" dirty="0"/>
           </a:p>
@@ -1922,8 +1992,8 @@
         </p:nvSpPr>
         <p:spPr>
           <a:xfrm>
-            <a:off x="7772400" y="4663440"/>
-            <a:ext cx="1097280" cy="365760"/>
+            <a:off x="548640" y="4572000"/>
+            <a:ext cx="3657600" cy="274320"/>
           </a:xfrm>
           <a:prstGeom prst="rect">
             <a:avLst/>
@@ -1935,389 +2005,16 @@
           <a:bodyPr wrap="square" rtlCol="0" anchor="ctr"/>
           <a:lstStyle/>
           <a:p>
-            <a:pPr algn="r" indent="0" marL="0">
-              <a:buNone/>
-            </a:pPr>
-            <a:r>
-              <a:rPr lang="en-US" sz="1000" dirty="0">
-                <a:solidFill>
-                  <a:srgbClr val="999999"/>
-                </a:solidFill>
-                <a:latin typeface="Calibri" pitchFamily="34" charset="0"/>
-                <a:ea typeface="Calibri" pitchFamily="34" charset="-122"/>
-                <a:cs typeface="Calibri" pitchFamily="34" charset="-120"/>
-              </a:rPr>
-              <a:t>4 / 6</a:t>
-            </a:r>
-            <a:endParaRPr lang="en-US" sz="1000" dirty="0"/>
-          </a:p>
-        </p:txBody>
-      </p:sp>
-    </p:spTree>
-  </p:cSld>
-  <p:clrMapOvr>
-    <a:masterClrMapping/>
-  </p:clrMapOvr>
-</p:sld>
-</file>
-
-<file path=ppt/slides/slide5.xml><?xml version="1.0" encoding="utf-8"?>
-<p:sld xmlns:a="http://schemas.openxmlformats.org/drawingml/2006/main" xmlns:r="http://schemas.openxmlformats.org/officeDocument/2006/relationships" xmlns:p="http://schemas.openxmlformats.org/presentationml/2006/main">
-  <p:cSld name="Slide 5">
-    <p:spTree>
-      <p:nvGrpSpPr>
-        <p:cNvPr id="1" name=""/>
-        <p:cNvGrpSpPr/>
-        <p:nvPr/>
-      </p:nvGrpSpPr>
-      <p:grpSpPr>
-        <a:xfrm>
-          <a:off x="0" y="0"/>
-          <a:ext cx="0" cy="0"/>
-          <a:chOff x="0" y="0"/>
-          <a:chExt cx="0" cy="0"/>
-        </a:xfrm>
-      </p:grpSpPr>
-      <p:sp>
-        <p:nvSpPr>
-          <p:cNvPr id="2" name="Shape 0"/>
-          <p:cNvSpPr/>
-          <p:nvPr/>
-        </p:nvSpPr>
-        <p:spPr>
-          <a:xfrm>
-            <a:off x="0" y="0"/>
-            <a:ext cx="9144000" cy="548640"/>
-          </a:xfrm>
-          <a:prstGeom prst="rect">
-            <a:avLst/>
-          </a:prstGeom>
-          <a:solidFill>
-            <a:srgbClr val="2D8F3F"/>
-          </a:solidFill>
-          <a:ln/>
-        </p:spPr>
-      </p:sp>
-      <p:sp>
-        <p:nvSpPr>
-          <p:cNvPr id="3" name="Text 1"/>
-          <p:cNvSpPr/>
-          <p:nvPr/>
-        </p:nvSpPr>
-        <p:spPr>
-          <a:xfrm>
-            <a:off x="457200" y="45720"/>
-            <a:ext cx="8229600" cy="457200"/>
-          </a:xfrm>
-          <a:prstGeom prst="rect">
-            <a:avLst/>
-          </a:prstGeom>
-          <a:noFill/>
-          <a:ln/>
-        </p:spPr>
-        <p:txBody>
-          <a:bodyPr wrap="square" rtlCol="0" anchor="ctr"/>
-          <a:lstStyle/>
-          <a:p>
             <a:pPr indent="0" marL="0">
               <a:buNone/>
             </a:pPr>
             <a:r>
-              <a:rPr lang="en-US" sz="1800" b="1" dirty="0">
-                <a:solidFill>
-                  <a:srgbClr val="FFFFFF"/>
-                </a:solidFill>
-                <a:latin typeface="Calibri" pitchFamily="34" charset="0"/>
-                <a:ea typeface="Calibri" pitchFamily="34" charset="-122"/>
-                <a:cs typeface="Calibri" pitchFamily="34" charset="-120"/>
-              </a:rPr>
-              <a:t>Endangered species</a:t>
-            </a:r>
-            <a:endParaRPr lang="en-US" sz="1800" dirty="0"/>
-          </a:p>
-        </p:txBody>
-      </p:sp>
-      <p:sp>
-        <p:nvSpPr>
-          <p:cNvPr id="4" name="Text 2"/>
-          <p:cNvSpPr/>
-          <p:nvPr/>
-        </p:nvSpPr>
-        <p:spPr>
-          <a:xfrm>
-            <a:off x="731520" y="1097280"/>
-            <a:ext cx="7680960" cy="3200400"/>
-          </a:xfrm>
-          <a:prstGeom prst="rect">
-            <a:avLst/>
-          </a:prstGeom>
-          <a:noFill/>
-          <a:ln/>
-        </p:spPr>
-        <p:txBody>
-          <a:bodyPr wrap="square" rtlCol="0" anchor="ctr"/>
-          <a:lstStyle/>
-          <a:p>
-            <a:pPr indent="0" marL="0">
-              <a:buNone/>
-            </a:pPr>
-            <a:r>
-              <a:rPr lang="en-US" sz="1600" dirty="0">
-                <a:solidFill>
-                  <a:srgbClr val="363636"/>
-                </a:solidFill>
-                <a:latin typeface="Calibri" pitchFamily="34" charset="0"/>
-                <a:ea typeface="Calibri" pitchFamily="34" charset="-122"/>
-                <a:cs typeface="Calibri" pitchFamily="34" charset="-120"/>
-              </a:rPr>
-              <a:t>Content for: Endangered species</a:t>
-            </a:r>
-            <a:endParaRPr lang="en-US" sz="1600" dirty="0"/>
-          </a:p>
-          <a:p>
-            <a:pPr indent="0" marL="0">
-              <a:buNone/>
-            </a:pPr>
-            <a:endParaRPr lang="en-US" sz="1600" dirty="0"/>
-          </a:p>
-          <a:p>
-            <a:pPr indent="0" marL="0">
-              <a:buNone/>
-            </a:pPr>
-            <a:r>
-              <a:rPr lang="en-US" sz="1600" dirty="0">
-                <a:solidFill>
-                  <a:srgbClr val="363636"/>
-                </a:solidFill>
-                <a:latin typeface="Calibri" pitchFamily="34" charset="0"/>
-                <a:ea typeface="Calibri" pitchFamily="34" charset="-122"/>
-                <a:cs typeface="Calibri" pitchFamily="34" charset="-120"/>
-              </a:rPr>
-              <a:t>Key points will be covered in class.</a:t>
-            </a:r>
-            <a:endParaRPr lang="en-US" sz="1600" dirty="0"/>
-          </a:p>
-        </p:txBody>
-      </p:sp>
-      <p:sp>
-        <p:nvSpPr>
-          <p:cNvPr id="5" name="Text 3"/>
-          <p:cNvSpPr/>
-          <p:nvPr/>
-        </p:nvSpPr>
-        <p:spPr>
-          <a:xfrm>
-            <a:off x="7772400" y="4663440"/>
-            <a:ext cx="1097280" cy="365760"/>
-          </a:xfrm>
-          <a:prstGeom prst="rect">
-            <a:avLst/>
-          </a:prstGeom>
-          <a:noFill/>
-          <a:ln/>
-        </p:spPr>
-        <p:txBody>
-          <a:bodyPr wrap="square" rtlCol="0" anchor="ctr"/>
-          <a:lstStyle/>
-          <a:p>
-            <a:pPr algn="r" indent="0" marL="0">
-              <a:buNone/>
-            </a:pPr>
-            <a:r>
               <a:rPr lang="en-US" sz="1000" dirty="0">
                 <a:solidFill>
-                  <a:srgbClr val="999999"/>
+                  <a:srgbClr val="6B6660"/>
                 </a:solidFill>
-                <a:latin typeface="Calibri" pitchFamily="34" charset="0"/>
-                <a:ea typeface="Calibri" pitchFamily="34" charset="-122"/>
-                <a:cs typeface="Calibri" pitchFamily="34" charset="-120"/>
               </a:rPr>
-              <a:t>5 / 6</a:t>
-            </a:r>
-            <a:endParaRPr lang="en-US" sz="1000" dirty="0"/>
-          </a:p>
-        </p:txBody>
-      </p:sp>
-    </p:spTree>
-  </p:cSld>
-  <p:clrMapOvr>
-    <a:masterClrMapping/>
-  </p:clrMapOvr>
-</p:sld>
-</file>
-
-<file path=ppt/slides/slide6.xml><?xml version="1.0" encoding="utf-8"?>
-<p:sld xmlns:a="http://schemas.openxmlformats.org/drawingml/2006/main" xmlns:r="http://schemas.openxmlformats.org/officeDocument/2006/relationships" xmlns:p="http://schemas.openxmlformats.org/presentationml/2006/main">
-  <p:cSld name="Slide 6">
-    <p:spTree>
-      <p:nvGrpSpPr>
-        <p:cNvPr id="1" name=""/>
-        <p:cNvGrpSpPr/>
-        <p:nvPr/>
-      </p:nvGrpSpPr>
-      <p:grpSpPr>
-        <a:xfrm>
-          <a:off x="0" y="0"/>
-          <a:ext cx="0" cy="0"/>
-          <a:chOff x="0" y="0"/>
-          <a:chExt cx="0" cy="0"/>
-        </a:xfrm>
-      </p:grpSpPr>
-      <p:sp>
-        <p:nvSpPr>
-          <p:cNvPr id="2" name="Shape 0"/>
-          <p:cNvSpPr/>
-          <p:nvPr/>
-        </p:nvSpPr>
-        <p:spPr>
-          <a:xfrm>
-            <a:off x="0" y="0"/>
-            <a:ext cx="9144000" cy="548640"/>
-          </a:xfrm>
-          <a:prstGeom prst="rect">
-            <a:avLst/>
-          </a:prstGeom>
-          <a:solidFill>
-            <a:srgbClr val="2D8F3F"/>
-          </a:solidFill>
-          <a:ln/>
-        </p:spPr>
-      </p:sp>
-      <p:sp>
-        <p:nvSpPr>
-          <p:cNvPr id="3" name="Text 1"/>
-          <p:cNvSpPr/>
-          <p:nvPr/>
-        </p:nvSpPr>
-        <p:spPr>
-          <a:xfrm>
-            <a:off x="457200" y="45720"/>
-            <a:ext cx="8229600" cy="457200"/>
-          </a:xfrm>
-          <a:prstGeom prst="rect">
-            <a:avLst/>
-          </a:prstGeom>
-          <a:noFill/>
-          <a:ln/>
-        </p:spPr>
-        <p:txBody>
-          <a:bodyPr wrap="square" rtlCol="0" anchor="ctr"/>
-          <a:lstStyle/>
-          <a:p>
-            <a:pPr indent="0" marL="0">
-              <a:buNone/>
-            </a:pPr>
-            <a:r>
-              <a:rPr lang="en-US" sz="1800" b="1" dirty="0">
-                <a:solidFill>
-                  <a:srgbClr val="FFFFFF"/>
-                </a:solidFill>
-                <a:latin typeface="Calibri" pitchFamily="34" charset="0"/>
-                <a:ea typeface="Calibri" pitchFamily="34" charset="-122"/>
-                <a:cs typeface="Calibri" pitchFamily="34" charset="-120"/>
-              </a:rPr>
-              <a:t>How we can help</a:t>
-            </a:r>
-            <a:endParaRPr lang="en-US" sz="1800" dirty="0"/>
-          </a:p>
-        </p:txBody>
-      </p:sp>
-      <p:sp>
-        <p:nvSpPr>
-          <p:cNvPr id="4" name="Text 2"/>
-          <p:cNvSpPr/>
-          <p:nvPr/>
-        </p:nvSpPr>
-        <p:spPr>
-          <a:xfrm>
-            <a:off x="731520" y="1097280"/>
-            <a:ext cx="7680960" cy="3200400"/>
-          </a:xfrm>
-          <a:prstGeom prst="rect">
-            <a:avLst/>
-          </a:prstGeom>
-          <a:noFill/>
-          <a:ln/>
-        </p:spPr>
-        <p:txBody>
-          <a:bodyPr wrap="square" rtlCol="0" anchor="ctr"/>
-          <a:lstStyle/>
-          <a:p>
-            <a:pPr indent="0" marL="0">
-              <a:buNone/>
-            </a:pPr>
-            <a:r>
-              <a:rPr lang="en-US" sz="1600" dirty="0">
-                <a:solidFill>
-                  <a:srgbClr val="363636"/>
-                </a:solidFill>
-                <a:latin typeface="Calibri" pitchFamily="34" charset="0"/>
-                <a:ea typeface="Calibri" pitchFamily="34" charset="-122"/>
-                <a:cs typeface="Calibri" pitchFamily="34" charset="-120"/>
-              </a:rPr>
-              <a:t>Content for: How we can help</a:t>
-            </a:r>
-            <a:endParaRPr lang="en-US" sz="1600" dirty="0"/>
-          </a:p>
-          <a:p>
-            <a:pPr indent="0" marL="0">
-              <a:buNone/>
-            </a:pPr>
-            <a:endParaRPr lang="en-US" sz="1600" dirty="0"/>
-          </a:p>
-          <a:p>
-            <a:pPr indent="0" marL="0">
-              <a:buNone/>
-            </a:pPr>
-            <a:r>
-              <a:rPr lang="en-US" sz="1600" dirty="0">
-                <a:solidFill>
-                  <a:srgbClr val="363636"/>
-                </a:solidFill>
-                <a:latin typeface="Calibri" pitchFamily="34" charset="0"/>
-                <a:ea typeface="Calibri" pitchFamily="34" charset="-122"/>
-                <a:cs typeface="Calibri" pitchFamily="34" charset="-120"/>
-              </a:rPr>
-              <a:t>Key points will be covered in class.</a:t>
-            </a:r>
-            <a:endParaRPr lang="en-US" sz="1600" dirty="0"/>
-          </a:p>
-        </p:txBody>
-      </p:sp>
-      <p:sp>
-        <p:nvSpPr>
-          <p:cNvPr id="5" name="Text 3"/>
-          <p:cNvSpPr/>
-          <p:nvPr/>
-        </p:nvSpPr>
-        <p:spPr>
-          <a:xfrm>
-            <a:off x="7772400" y="4663440"/>
-            <a:ext cx="1097280" cy="365760"/>
-          </a:xfrm>
-          <a:prstGeom prst="rect">
-            <a:avLst/>
-          </a:prstGeom>
-          <a:noFill/>
-          <a:ln/>
-        </p:spPr>
-        <p:txBody>
-          <a:bodyPr wrap="square" rtlCol="0" anchor="ctr"/>
-          <a:lstStyle/>
-          <a:p>
-            <a:pPr algn="r" indent="0" marL="0">
-              <a:buNone/>
-            </a:pPr>
-            <a:r>
-              <a:rPr lang="en-US" sz="1000" dirty="0">
-                <a:solidFill>
-                  <a:srgbClr val="999999"/>
-                </a:solidFill>
-                <a:latin typeface="Calibri" pitchFamily="34" charset="0"/>
-                <a:ea typeface="Calibri" pitchFamily="34" charset="-122"/>
-                <a:cs typeface="Calibri" pitchFamily="34" charset="-120"/>
-              </a:rPr>
-              <a:t>6 / 6</a:t>
+              <a:t>mrzocchi.com</a:t>
             </a:r>
             <a:endParaRPr lang="en-US" sz="1000" dirty="0"/>
           </a:p>

--- a/static/ppts/G6_Sci_T4_Biodiversity.pptx
+++ b/static/ppts/G6_Sci_T4_Biodiversity.pptx
@@ -9,9 +9,10 @@
     <p:sldId id="257" r:id="rId3"/>
     <p:sldId id="258" r:id="rId4"/>
     <p:sldId id="259" r:id="rId5"/>
+    <p:sldId id="260" r:id="rId6"/>
   </p:sldIdLst>
   <p:notesMasterIdLst>
-    <p:notesMasterId r:id="rId6"/>
+    <p:notesMasterId r:id="rId7"/>
   </p:notesMasterIdLst>
   <p:sldSz cx="9144000" cy="5143500"/>
   <p:notesSz cx="5143500" cy="9144000"/>
@@ -811,6 +812,94 @@
 </p:notes>
 </file>
 
+<file path=ppt/notesSlides/notesSlide5.xml><?xml version="1.0" encoding="utf-8"?>
+<p:notes xmlns:a="http://schemas.openxmlformats.org/drawingml/2006/main" xmlns:r="http://schemas.openxmlformats.org/officeDocument/2006/relationships" xmlns:p="http://schemas.openxmlformats.org/presentationml/2006/main">
+  <p:cSld>
+    <p:spTree>
+      <p:nvGrpSpPr>
+        <p:cNvPr id="1" name=""/>
+        <p:cNvGrpSpPr/>
+        <p:nvPr/>
+      </p:nvGrpSpPr>
+      <p:grpSpPr>
+        <a:xfrm>
+          <a:off x="0" y="0"/>
+          <a:ext cx="0" cy="0"/>
+          <a:chOff x="0" y="0"/>
+          <a:chExt cx="0" cy="0"/>
+        </a:xfrm>
+      </p:grpSpPr>
+      <p:sp>
+        <p:nvSpPr>
+          <p:cNvPr id="2" name="Slide Image Placeholder 1"/>
+          <p:cNvSpPr>
+            <a:spLocks noGrp="1" noRot="1" noChangeAspect="1"/>
+          </p:cNvSpPr>
+          <p:nvPr>
+            <p:ph type="sldImg"/>
+          </p:nvPr>
+        </p:nvSpPr>
+        <p:spPr/>
+      </p:sp>
+      <p:sp>
+        <p:nvSpPr>
+          <p:cNvPr id="3" name="Notes Placeholder 2"/>
+          <p:cNvSpPr>
+            <a:spLocks noGrp="1"/>
+          </p:cNvSpPr>
+          <p:nvPr>
+            <p:ph type="body" idx="1"/>
+          </p:nvPr>
+        </p:nvSpPr>
+        <p:spPr/>
+        <p:txBody>
+          <a:bodyPr/>
+          <a:lstStyle/>
+          <a:p>
+            <a:r>
+              <a:rPr lang="en-US" dirty="0"/>
+              <a:t/>
+            </a:r>
+            <a:endParaRPr lang="en-US" dirty="0"/>
+          </a:p>
+        </p:txBody>
+      </p:sp>
+      <p:sp>
+        <p:nvSpPr>
+          <p:cNvPr id="4" name="Slide Number Placeholder 3"/>
+          <p:cNvSpPr>
+            <a:spLocks noGrp="1"/>
+          </p:cNvSpPr>
+          <p:nvPr>
+            <p:ph type="sldNum" sz="quarter" idx="10"/>
+          </p:nvPr>
+        </p:nvSpPr>
+        <p:spPr/>
+        <p:txBody>
+          <a:bodyPr/>
+          <a:lstStyle/>
+          <a:p>
+            <a:fld id="{F7021451-1387-4CA6-816F-3879F97B5CBC}" type="slidenum">
+              <a:rPr lang="en-US"/>
+              <a:t>5</a:t>
+            </a:fld>
+            <a:endParaRPr lang="en-US"/>
+          </a:p>
+        </p:txBody>
+      </p:sp>
+    </p:spTree>
+    <p:extLst>
+      <p:ext uri="{BB962C8B-B14F-4D97-AF65-F5344CB8AC3E}">
+        <p14:creationId xmlns:p14="http://schemas.microsoft.com/office/powerpoint/2010/main" val="1024086991"/>
+      </p:ext>
+    </p:extLst>
+  </p:cSld>
+  <p:clrMapOvr>
+    <a:masterClrMapping/>
+  </p:clrMapOvr>
+</p:notes>
+</file>
+
 <file path=ppt/slideLayouts/slideLayout1.xml><?xml version="1.0" encoding="utf-8"?>
 <p:sldLayout xmlns:a="http://schemas.openxmlformats.org/drawingml/2006/main" xmlns:r="http://schemas.openxmlformats.org/officeDocument/2006/relationships" xmlns:p="http://schemas.openxmlformats.org/presentationml/2006/main" preserve="1">
   <p:cSld name="DEFAULT">
@@ -1170,7 +1259,7 @@
         </p:nvSpPr>
         <p:spPr>
           <a:xfrm>
-            <a:off x="731520" y="1280160"/>
+            <a:off x="731520" y="1097280"/>
             <a:ext cx="7772400" cy="1371600"/>
           </a:xfrm>
           <a:prstGeom prst="rect">
@@ -1187,7 +1276,7 @@
               <a:buNone/>
             </a:pPr>
             <a:r>
-              <a:rPr lang="en-US" sz="3600" b="1" dirty="0">
+              <a:rPr lang="en-US" sz="4000" b="1" dirty="0">
                 <a:solidFill>
                   <a:srgbClr val="FFFFFF"/>
                 </a:solidFill>
@@ -1197,7 +1286,7 @@
               </a:rPr>
               <a:t>Biodiversity</a:t>
             </a:r>
-            <a:endParaRPr lang="en-US" sz="3600" dirty="0"/>
+            <a:endParaRPr lang="en-US" sz="4000" dirty="0"/>
           </a:p>
         </p:txBody>
       </p:sp>
@@ -1209,7 +1298,7 @@
         </p:nvSpPr>
         <p:spPr>
           <a:xfrm>
-            <a:off x="731520" y="2743200"/>
+            <a:off x="731520" y="2560320"/>
             <a:ext cx="7772400" cy="548640"/>
           </a:xfrm>
           <a:prstGeom prst="rect">
@@ -1228,13 +1317,13 @@
             <a:r>
               <a:rPr lang="en-US" sz="1600" dirty="0">
                 <a:solidFill>
-                  <a:srgbClr val="9B9690"/>
+                  <a:srgbClr val="E9C46A"/>
                 </a:solidFill>
                 <a:latin typeface="Calibri" pitchFamily="34" charset="0"/>
                 <a:ea typeface="Calibri" pitchFamily="34" charset="-122"/>
                 <a:cs typeface="Calibri" pitchFamily="34" charset="-120"/>
               </a:rPr>
-              <a:t>G6 Science · Ecology</a:t>
+              <a:t>Grade 6 Science · Mr Zocchi</a:t>
             </a:r>
             <a:endParaRPr lang="en-US" sz="1600" dirty="0"/>
           </a:p>
@@ -1242,14 +1331,36 @@
       </p:sp>
       <p:sp>
         <p:nvSpPr>
-          <p:cNvPr id="5" name="Text 3"/>
+          <p:cNvPr id="5" name="Shape 3"/>
           <p:cNvSpPr/>
           <p:nvPr/>
         </p:nvSpPr>
         <p:spPr>
           <a:xfrm>
-            <a:off x="731520" y="4389120"/>
-            <a:ext cx="7772400" cy="457200"/>
+            <a:off x="731520" y="3474720"/>
+            <a:ext cx="2011680" cy="411480"/>
+          </a:xfrm>
+          <a:prstGeom prst="roundRect">
+            <a:avLst>
+              <a:gd name="adj" fmla="val 17778"/>
+            </a:avLst>
+          </a:prstGeom>
+          <a:solidFill>
+            <a:srgbClr val="2A9D8F"/>
+          </a:solidFill>
+          <a:ln/>
+        </p:spPr>
+      </p:sp>
+      <p:sp>
+        <p:nvSpPr>
+          <p:cNvPr id="6" name="Text 4"/>
+          <p:cNvSpPr/>
+          <p:nvPr/>
+        </p:nvSpPr>
+        <p:spPr>
+          <a:xfrm>
+            <a:off x="731520" y="3474720"/>
+            <a:ext cx="2011680" cy="411480"/>
           </a:xfrm>
           <a:prstGeom prst="rect">
             <a:avLst/>
@@ -1261,21 +1372,21 @@
           <a:bodyPr wrap="square" rtlCol="0" anchor="ctr"/>
           <a:lstStyle/>
           <a:p>
-            <a:pPr indent="0" marL="0">
+            <a:pPr algn="ctr" indent="0" marL="0">
               <a:buNone/>
             </a:pPr>
             <a:r>
-              <a:rPr lang="en-US" sz="1000" dirty="0">
-                <a:solidFill>
-                  <a:srgbClr val="6B6660"/>
+              <a:rPr lang="en-US" sz="1200" b="1" dirty="0">
+                <a:solidFill>
+                  <a:srgbClr val="FFFFFF"/>
                 </a:solidFill>
                 <a:latin typeface="Calibri" pitchFamily="34" charset="0"/>
                 <a:ea typeface="Calibri" pitchFamily="34" charset="-122"/>
                 <a:cs typeface="Calibri" pitchFamily="34" charset="-120"/>
               </a:rPr>
-              <a:t>Mr Zocchi · mrzocchi.com</a:t>
-            </a:r>
-            <a:endParaRPr lang="en-US" sz="1000" dirty="0"/>
+              <a:t>Term 4 · Ecology</a:t>
+            </a:r>
+            <a:endParaRPr lang="en-US" sz="1200" dirty="0"/>
           </a:p>
         </p:txBody>
       </p:sp>
@@ -1293,7 +1404,7 @@
     <p:bg>
       <p:bgPr>
         <a:solidFill>
-          <a:srgbClr val="FFFFFF"/>
+          <a:srgbClr val="FAF8F5"/>
         </a:solidFill>
       </p:bgPr>
     </p:bg>
@@ -1339,8 +1450,8 @@
         </p:nvSpPr>
         <p:spPr>
           <a:xfrm>
-            <a:off x="548640" y="274320"/>
-            <a:ext cx="8046720" cy="640080"/>
+            <a:off x="7772400" y="4709160"/>
+            <a:ext cx="1097280" cy="320040"/>
           </a:xfrm>
           <a:prstGeom prst="rect">
             <a:avLst/>
@@ -1349,14 +1460,105 @@
           <a:ln/>
         </p:spPr>
         <p:txBody>
-          <a:bodyPr wrap="square" lIns="0" tIns="0" rIns="0" bIns="0" rtlCol="0" anchor="ctr"/>
+          <a:bodyPr wrap="square" rtlCol="0" anchor="ctr"/>
+          <a:lstStyle/>
+          <a:p>
+            <a:pPr algn="r" indent="0" marL="0">
+              <a:buNone/>
+            </a:pPr>
+            <a:r>
+              <a:rPr lang="en-US" sz="900" dirty="0">
+                <a:solidFill>
+                  <a:srgbClr val="6B6660"/>
+                </a:solidFill>
+                <a:latin typeface="Calibri" pitchFamily="34" charset="0"/>
+                <a:ea typeface="Calibri" pitchFamily="34" charset="-122"/>
+                <a:cs typeface="Calibri" pitchFamily="34" charset="-120"/>
+              </a:rPr>
+              <a:t>2 / 5</a:t>
+            </a:r>
+            <a:endParaRPr lang="en-US" sz="900" dirty="0"/>
+          </a:p>
+        </p:txBody>
+      </p:sp>
+      <p:sp>
+        <p:nvSpPr>
+          <p:cNvPr id="4" name="Shape 2"/>
+          <p:cNvSpPr/>
+          <p:nvPr/>
+        </p:nvSpPr>
+        <p:spPr>
+          <a:xfrm>
+            <a:off x="1371600" y="914400"/>
+            <a:ext cx="6400800" cy="3200400"/>
+          </a:xfrm>
+          <a:prstGeom prst="rect">
+            <a:avLst/>
+          </a:prstGeom>
+          <a:solidFill>
+            <a:srgbClr val="FFFFFF"/>
+          </a:solidFill>
+          <a:ln w="12700">
+            <a:solidFill>
+              <a:srgbClr val="E5E2DC"/>
+            </a:solidFill>
+            <a:prstDash val="solid"/>
+          </a:ln>
+          <a:effectLst>
+            <a:outerShdw sx="100000" sy="100000" kx="0" ky="0" algn="bl" rotWithShape="0" blurRad="50800" dist="25400" dir="8100000">
+              <a:srgbClr val="000000">
+                <a:alpha val="10000"/>
+              </a:srgbClr>
+            </a:outerShdw>
+          </a:effectLst>
+        </p:spPr>
+      </p:sp>
+      <p:sp>
+        <p:nvSpPr>
+          <p:cNvPr id="5" name="Shape 3"/>
+          <p:cNvSpPr/>
+          <p:nvPr/>
+        </p:nvSpPr>
+        <p:spPr>
+          <a:xfrm>
+            <a:off x="1371600" y="914400"/>
+            <a:ext cx="91440" cy="3200400"/>
+          </a:xfrm>
+          <a:prstGeom prst="rect">
+            <a:avLst/>
+          </a:prstGeom>
+          <a:solidFill>
+            <a:srgbClr val="2A9D8F"/>
+          </a:solidFill>
+          <a:ln/>
+        </p:spPr>
+      </p:sp>
+      <p:sp>
+        <p:nvSpPr>
+          <p:cNvPr id="6" name="Text 4"/>
+          <p:cNvSpPr/>
+          <p:nvPr/>
+        </p:nvSpPr>
+        <p:spPr>
+          <a:xfrm>
+            <a:off x="1828800" y="1097280"/>
+            <a:ext cx="5669280" cy="640080"/>
+          </a:xfrm>
+          <a:prstGeom prst="rect">
+            <a:avLst/>
+          </a:prstGeom>
+          <a:noFill/>
+          <a:ln/>
+        </p:spPr>
+        <p:txBody>
+          <a:bodyPr wrap="square" rtlCol="0" anchor="ctr"/>
           <a:lstStyle/>
           <a:p>
             <a:pPr indent="0" marL="0">
               <a:buNone/>
             </a:pPr>
             <a:r>
-              <a:rPr lang="en-US" sz="2600" b="1" dirty="0">
+              <a:rPr lang="en-US" sz="2400" b="1" dirty="0">
                 <a:solidFill>
                   <a:srgbClr val="1B2A4A"/>
                 </a:solidFill>
@@ -1366,20 +1568,20 @@
               </a:rPr>
               <a:t>What is Biodiversity?</a:t>
             </a:r>
-            <a:endParaRPr lang="en-US" sz="2600" dirty="0"/>
-          </a:p>
-        </p:txBody>
-      </p:sp>
-      <p:sp>
-        <p:nvSpPr>
-          <p:cNvPr id="4" name="Text 2"/>
+            <a:endParaRPr lang="en-US" sz="2400" dirty="0"/>
+          </a:p>
+        </p:txBody>
+      </p:sp>
+      <p:sp>
+        <p:nvSpPr>
+          <p:cNvPr id="7" name="Text 5"/>
           <p:cNvSpPr/>
           <p:nvPr/>
         </p:nvSpPr>
         <p:spPr>
           <a:xfrm>
-            <a:off x="548640" y="1097280"/>
-            <a:ext cx="8046720" cy="3474720"/>
+            <a:off x="1828800" y="1828800"/>
+            <a:ext cx="5669280" cy="2011680"/>
           </a:xfrm>
           <a:prstGeom prst="rect">
             <a:avLst/>
@@ -1391,12 +1593,11 @@
           <a:bodyPr wrap="square" rtlCol="0" anchor="t"/>
           <a:lstStyle/>
           <a:p>
-            <a:pPr marL="342900" indent="-342900">
-              <a:spcAft>
-                <a:spcPts val="800"/>
-              </a:spcAft>
-              <a:buSzPct val="100000"/>
-              <a:buChar char="•"/>
+            <a:pPr indent="0" marL="0">
+              <a:lnSpc>
+                <a:spcPct val="130000"/>
+              </a:lnSpc>
+              <a:buNone/>
             </a:pPr>
             <a:r>
               <a:rPr lang="en-US" sz="1500" dirty="0">
@@ -1407,129 +1608,9 @@
                 <a:ea typeface="Calibri" pitchFamily="34" charset="-122"/>
                 <a:cs typeface="Calibri" pitchFamily="34" charset="-120"/>
               </a:rPr>
-              <a:t>The variety of different species in an ecosystem</a:t>
+              <a:t>Biodiversity means the variety of different species in an ecosystem. High biodiversity = many different species = a healthy, stable ecosystem. Low biodiversity = few species = a fragile ecosystem. Earth has an estimated 8.7 million species, but only ~1.5 million have been identified.</a:t>
             </a:r>
             <a:endParaRPr lang="en-US" sz="1500" dirty="0"/>
-          </a:p>
-          <a:p>
-            <a:pPr marL="342900" indent="-342900">
-              <a:spcAft>
-                <a:spcPts val="800"/>
-              </a:spcAft>
-              <a:buSzPct val="100000"/>
-              <a:buChar char="•"/>
-            </a:pPr>
-            <a:r>
-              <a:rPr lang="en-US" sz="1500" dirty="0">
-                <a:solidFill>
-                  <a:srgbClr val="3D3A36"/>
-                </a:solidFill>
-                <a:latin typeface="Calibri" pitchFamily="34" charset="0"/>
-                <a:ea typeface="Calibri" pitchFamily="34" charset="-122"/>
-                <a:cs typeface="Calibri" pitchFamily="34" charset="-120"/>
-              </a:rPr>
-              <a:t>High biodiversity = healthy, stable ecosystem</a:t>
-            </a:r>
-            <a:endParaRPr lang="en-US" sz="1500" dirty="0"/>
-          </a:p>
-          <a:p>
-            <a:pPr marL="342900" indent="-342900">
-              <a:spcAft>
-                <a:spcPts val="800"/>
-              </a:spcAft>
-              <a:buSzPct val="100000"/>
-              <a:buChar char="•"/>
-            </a:pPr>
-            <a:r>
-              <a:rPr lang="en-US" sz="1500" dirty="0">
-                <a:solidFill>
-                  <a:srgbClr val="3D3A36"/>
-                </a:solidFill>
-                <a:latin typeface="Calibri" pitchFamily="34" charset="0"/>
-                <a:ea typeface="Calibri" pitchFamily="34" charset="-122"/>
-                <a:cs typeface="Calibri" pitchFamily="34" charset="-120"/>
-              </a:rPr>
-              <a:t>Low biodiversity = fragile, vulnerable ecosystem</a:t>
-            </a:r>
-            <a:endParaRPr lang="en-US" sz="1500" dirty="0"/>
-          </a:p>
-          <a:p>
-            <a:pPr marL="342900" indent="-342900">
-              <a:spcAft>
-                <a:spcPts val="800"/>
-              </a:spcAft>
-              <a:buSzPct val="100000"/>
-              <a:buChar char="•"/>
-            </a:pPr>
-            <a:r>
-              <a:rPr lang="en-US" sz="1500" dirty="0">
-                <a:solidFill>
-                  <a:srgbClr val="3D3A36"/>
-                </a:solidFill>
-                <a:latin typeface="Calibri" pitchFamily="34" charset="0"/>
-                <a:ea typeface="Calibri" pitchFamily="34" charset="-122"/>
-                <a:cs typeface="Calibri" pitchFamily="34" charset="-120"/>
-              </a:rPr>
-              <a:t>Rainforests and coral reefs have the highest biodiversity</a:t>
-            </a:r>
-            <a:endParaRPr lang="en-US" sz="1500" dirty="0"/>
-          </a:p>
-          <a:p>
-            <a:pPr marL="342900" indent="-342900">
-              <a:spcAft>
-                <a:spcPts val="800"/>
-              </a:spcAft>
-              <a:buSzPct val="100000"/>
-              <a:buChar char="•"/>
-            </a:pPr>
-            <a:r>
-              <a:rPr lang="en-US" sz="1500" dirty="0">
-                <a:solidFill>
-                  <a:srgbClr val="3D3A36"/>
-                </a:solidFill>
-                <a:latin typeface="Calibri" pitchFamily="34" charset="0"/>
-                <a:ea typeface="Calibri" pitchFamily="34" charset="-122"/>
-                <a:cs typeface="Calibri" pitchFamily="34" charset="-120"/>
-              </a:rPr>
-              <a:t>We need biodiversity for food, medicine, clean air, and water</a:t>
-            </a:r>
-            <a:endParaRPr lang="en-US" sz="1500" dirty="0"/>
-          </a:p>
-        </p:txBody>
-      </p:sp>
-      <p:sp>
-        <p:nvSpPr>
-          <p:cNvPr id="5" name="Text 3"/>
-          <p:cNvSpPr/>
-          <p:nvPr/>
-        </p:nvSpPr>
-        <p:spPr>
-          <a:xfrm>
-            <a:off x="548640" y="4800600"/>
-            <a:ext cx="3657600" cy="274320"/>
-          </a:xfrm>
-          <a:prstGeom prst="rect">
-            <a:avLst/>
-          </a:prstGeom>
-          <a:noFill/>
-          <a:ln/>
-        </p:spPr>
-        <p:txBody>
-          <a:bodyPr wrap="square" rtlCol="0" anchor="ctr"/>
-          <a:lstStyle/>
-          <a:p>
-            <a:pPr indent="0" marL="0">
-              <a:buNone/>
-            </a:pPr>
-            <a:r>
-              <a:rPr lang="en-US" sz="800" dirty="0">
-                <a:solidFill>
-                  <a:srgbClr val="9B9690"/>
-                </a:solidFill>
-              </a:rPr>
-              <a:t>mrzocchi.com</a:t>
-            </a:r>
-            <a:endParaRPr lang="en-US" sz="800" dirty="0"/>
           </a:p>
         </p:txBody>
       </p:sp>
@@ -1547,7 +1628,7 @@
     <p:bg>
       <p:bgPr>
         <a:solidFill>
-          <a:srgbClr val="FFFFFF"/>
+          <a:srgbClr val="FAF8F5"/>
         </a:solidFill>
       </p:bgPr>
     </p:bg>
@@ -1593,8 +1674,8 @@
         </p:nvSpPr>
         <p:spPr>
           <a:xfrm>
-            <a:off x="548640" y="274320"/>
-            <a:ext cx="8046720" cy="640080"/>
+            <a:off x="7772400" y="4709160"/>
+            <a:ext cx="1097280" cy="320040"/>
           </a:xfrm>
           <a:prstGeom prst="rect">
             <a:avLst/>
@@ -1603,7 +1684,46 @@
           <a:ln/>
         </p:spPr>
         <p:txBody>
-          <a:bodyPr wrap="square" lIns="0" tIns="0" rIns="0" bIns="0" rtlCol="0" anchor="ctr"/>
+          <a:bodyPr wrap="square" rtlCol="0" anchor="ctr"/>
+          <a:lstStyle/>
+          <a:p>
+            <a:pPr algn="r" indent="0" marL="0">
+              <a:buNone/>
+            </a:pPr>
+            <a:r>
+              <a:rPr lang="en-US" sz="900" dirty="0">
+                <a:solidFill>
+                  <a:srgbClr val="6B6660"/>
+                </a:solidFill>
+                <a:latin typeface="Calibri" pitchFamily="34" charset="0"/>
+                <a:ea typeface="Calibri" pitchFamily="34" charset="-122"/>
+                <a:cs typeface="Calibri" pitchFamily="34" charset="-120"/>
+              </a:rPr>
+              <a:t>3 / 5</a:t>
+            </a:r>
+            <a:endParaRPr lang="en-US" sz="900" dirty="0"/>
+          </a:p>
+        </p:txBody>
+      </p:sp>
+      <p:sp>
+        <p:nvSpPr>
+          <p:cNvPr id="4" name="Text 2"/>
+          <p:cNvSpPr/>
+          <p:nvPr/>
+        </p:nvSpPr>
+        <p:spPr>
+          <a:xfrm>
+            <a:off x="457200" y="274320"/>
+            <a:ext cx="8229600" cy="640080"/>
+          </a:xfrm>
+          <a:prstGeom prst="rect">
+            <a:avLst/>
+          </a:prstGeom>
+          <a:noFill/>
+          <a:ln/>
+        </p:spPr>
+        <p:txBody>
+          <a:bodyPr wrap="square" rtlCol="0" anchor="ctr"/>
           <a:lstStyle/>
           <a:p>
             <a:pPr indent="0" marL="0">
@@ -1618,7 +1738,7 @@
                 <a:ea typeface="Georgia" pitchFamily="34" charset="-122"/>
                 <a:cs typeface="Georgia" pitchFamily="34" charset="-120"/>
               </a:rPr>
-              <a:t>Threats &amp; Protection</a:t>
+              <a:t>Why Biodiversity Matters</a:t>
             </a:r>
             <a:endParaRPr lang="en-US" sz="2600" dirty="0"/>
           </a:p>
@@ -1626,14 +1746,14 @@
       </p:sp>
       <p:sp>
         <p:nvSpPr>
-          <p:cNvPr id="4" name="Text 2"/>
+          <p:cNvPr id="5" name="Text 3"/>
           <p:cNvSpPr/>
           <p:nvPr/>
         </p:nvSpPr>
         <p:spPr>
           <a:xfrm>
-            <a:off x="548640" y="1097280"/>
-            <a:ext cx="8046720" cy="3474720"/>
+            <a:off x="457200" y="1188720"/>
+            <a:ext cx="3840480" cy="3474720"/>
           </a:xfrm>
           <a:prstGeom prst="rect">
             <a:avLst/>
@@ -1647,13 +1767,13 @@
           <a:p>
             <a:pPr marL="342900" indent="-342900">
               <a:spcAft>
-                <a:spcPts val="800"/>
+                <a:spcPts val="600"/>
               </a:spcAft>
               <a:buSzPct val="100000"/>
               <a:buChar char="•"/>
             </a:pPr>
             <a:r>
-              <a:rPr lang="en-US" sz="1500" dirty="0">
+              <a:rPr lang="en-US" sz="1400" dirty="0">
                 <a:solidFill>
                   <a:srgbClr val="3D3A36"/>
                 </a:solidFill>
@@ -1661,20 +1781,20 @@
                 <a:ea typeface="Calibri" pitchFamily="34" charset="-122"/>
                 <a:cs typeface="Calibri" pitchFamily="34" charset="-120"/>
               </a:rPr>
-              <a:t>Main threats: habitat destruction, climate change, pollution, invasive species</a:t>
-            </a:r>
-            <a:endParaRPr lang="en-US" sz="1500" dirty="0"/>
+              <a:t>Each species has a role in the ecosystem (food, pollination, decomposition)</a:t>
+            </a:r>
+            <a:endParaRPr lang="en-US" sz="1400" dirty="0"/>
           </a:p>
           <a:p>
             <a:pPr marL="342900" indent="-342900">
               <a:spcAft>
-                <a:spcPts val="800"/>
+                <a:spcPts val="600"/>
               </a:spcAft>
               <a:buSzPct val="100000"/>
               <a:buChar char="•"/>
             </a:pPr>
             <a:r>
-              <a:rPr lang="en-US" sz="1500" dirty="0">
+              <a:rPr lang="en-US" sz="1400" dirty="0">
                 <a:solidFill>
                   <a:srgbClr val="3D3A36"/>
                 </a:solidFill>
@@ -1682,20 +1802,20 @@
                 <a:ea typeface="Calibri" pitchFamily="34" charset="-122"/>
                 <a:cs typeface="Calibri" pitchFamily="34" charset="-120"/>
               </a:rPr>
-              <a:t>Extinction is permanent — once a species is gone, it's gone forever</a:t>
-            </a:r>
-            <a:endParaRPr lang="en-US" sz="1500" dirty="0"/>
+              <a:t>Diverse ecosystems are more resilient to change</a:t>
+            </a:r>
+            <a:endParaRPr lang="en-US" sz="1400" dirty="0"/>
           </a:p>
           <a:p>
             <a:pPr marL="342900" indent="-342900">
               <a:spcAft>
-                <a:spcPts val="800"/>
+                <a:spcPts val="600"/>
               </a:spcAft>
               <a:buSzPct val="100000"/>
               <a:buChar char="•"/>
             </a:pPr>
             <a:r>
-              <a:rPr lang="en-US" sz="1500" dirty="0">
+              <a:rPr lang="en-US" sz="1400" dirty="0">
                 <a:solidFill>
                   <a:srgbClr val="3D3A36"/>
                 </a:solidFill>
@@ -1703,20 +1823,20 @@
                 <a:ea typeface="Calibri" pitchFamily="34" charset="-122"/>
                 <a:cs typeface="Calibri" pitchFamily="34" charset="-120"/>
               </a:rPr>
-              <a:t>Protected areas: national parks, marine reserves, wildlife corridors</a:t>
-            </a:r>
-            <a:endParaRPr lang="en-US" sz="1500" dirty="0"/>
+              <a:t>Many medicines come from plants and animals</a:t>
+            </a:r>
+            <a:endParaRPr lang="en-US" sz="1400" dirty="0"/>
           </a:p>
           <a:p>
             <a:pPr marL="342900" indent="-342900">
               <a:spcAft>
-                <a:spcPts val="800"/>
+                <a:spcPts val="600"/>
               </a:spcAft>
               <a:buSzPct val="100000"/>
               <a:buChar char="•"/>
             </a:pPr>
             <a:r>
-              <a:rPr lang="en-US" sz="1500" dirty="0">
+              <a:rPr lang="en-US" sz="1400" dirty="0">
                 <a:solidFill>
                   <a:srgbClr val="3D3A36"/>
                 </a:solidFill>
@@ -1724,20 +1844,20 @@
                 <a:ea typeface="Calibri" pitchFamily="34" charset="-122"/>
                 <a:cs typeface="Calibri" pitchFamily="34" charset="-120"/>
               </a:rPr>
-              <a:t>Captive breeding programmes help endangered species</a:t>
-            </a:r>
-            <a:endParaRPr lang="en-US" sz="1500" dirty="0"/>
+              <a:t>Food security depends on crop diversity</a:t>
+            </a:r>
+            <a:endParaRPr lang="en-US" sz="1400" dirty="0"/>
           </a:p>
           <a:p>
             <a:pPr marL="342900" indent="-342900">
               <a:spcAft>
-                <a:spcPts val="800"/>
+                <a:spcPts val="600"/>
               </a:spcAft>
               <a:buSzPct val="100000"/>
               <a:buChar char="•"/>
             </a:pPr>
             <a:r>
-              <a:rPr lang="en-US" sz="1500" dirty="0">
+              <a:rPr lang="en-US" sz="1400" dirty="0">
                 <a:solidFill>
                   <a:srgbClr val="3D3A36"/>
                 </a:solidFill>
@@ -1745,22 +1865,74 @@
                 <a:ea typeface="Calibri" pitchFamily="34" charset="-122"/>
                 <a:cs typeface="Calibri" pitchFamily="34" charset="-120"/>
               </a:rPr>
-              <a:t>Seed banks preserve plant genetic diversity for the future</a:t>
-            </a:r>
-            <a:endParaRPr lang="en-US" sz="1500" dirty="0"/>
-          </a:p>
-        </p:txBody>
-      </p:sp>
-      <p:sp>
-        <p:nvSpPr>
-          <p:cNvPr id="5" name="Text 3"/>
+              <a:t>Aesthetic, cultural, and recreational value</a:t>
+            </a:r>
+            <a:endParaRPr lang="en-US" sz="1400" dirty="0"/>
+          </a:p>
+        </p:txBody>
+      </p:sp>
+      <p:sp>
+        <p:nvSpPr>
+          <p:cNvPr id="6" name="Shape 4"/>
           <p:cNvSpPr/>
           <p:nvPr/>
         </p:nvSpPr>
         <p:spPr>
           <a:xfrm>
-            <a:off x="548640" y="4800600"/>
-            <a:ext cx="3657600" cy="274320"/>
+            <a:off x="4846320" y="1188720"/>
+            <a:ext cx="3840480" cy="3474720"/>
+          </a:xfrm>
+          <a:prstGeom prst="rect">
+            <a:avLst/>
+          </a:prstGeom>
+          <a:solidFill>
+            <a:srgbClr val="FFFFFF"/>
+          </a:solidFill>
+          <a:ln w="12700">
+            <a:solidFill>
+              <a:srgbClr val="E5E2DC"/>
+            </a:solidFill>
+            <a:prstDash val="solid"/>
+          </a:ln>
+          <a:effectLst>
+            <a:outerShdw sx="100000" sy="100000" kx="0" ky="0" algn="bl" rotWithShape="0" blurRad="50800" dist="25400" dir="8100000">
+              <a:srgbClr val="000000">
+                <a:alpha val="10000"/>
+              </a:srgbClr>
+            </a:outerShdw>
+          </a:effectLst>
+        </p:spPr>
+      </p:sp>
+      <p:sp>
+        <p:nvSpPr>
+          <p:cNvPr id="7" name="Shape 5"/>
+          <p:cNvSpPr/>
+          <p:nvPr/>
+        </p:nvSpPr>
+        <p:spPr>
+          <a:xfrm>
+            <a:off x="4846320" y="1188720"/>
+            <a:ext cx="3840480" cy="54864"/>
+          </a:xfrm>
+          <a:prstGeom prst="rect">
+            <a:avLst/>
+          </a:prstGeom>
+          <a:solidFill>
+            <a:srgbClr val="2A9D8F"/>
+          </a:solidFill>
+          <a:ln/>
+        </p:spPr>
+      </p:sp>
+      <p:sp>
+        <p:nvSpPr>
+          <p:cNvPr id="8" name="Text 6"/>
+          <p:cNvSpPr/>
+          <p:nvPr/>
+        </p:nvSpPr>
+        <p:spPr>
+          <a:xfrm>
+            <a:off x="5120640" y="1371600"/>
+            <a:ext cx="3291840" cy="3108960"/>
           </a:xfrm>
           <a:prstGeom prst="rect">
             <a:avLst/>
@@ -1769,21 +1941,136 @@
           <a:ln/>
         </p:spPr>
         <p:txBody>
-          <a:bodyPr wrap="square" rtlCol="0" anchor="ctr"/>
+          <a:bodyPr wrap="square" rtlCol="0" anchor="t"/>
           <a:lstStyle/>
           <a:p>
             <a:pPr indent="0" marL="0">
+              <a:spcAft>
+                <a:spcPts val="400"/>
+              </a:spcAft>
               <a:buNone/>
             </a:pPr>
             <a:r>
-              <a:rPr lang="en-US" sz="800" dirty="0">
-                <a:solidFill>
-                  <a:srgbClr val="9B9690"/>
-                </a:solidFill>
-              </a:rPr>
-              <a:t>mrzocchi.com</a:t>
-            </a:r>
-            <a:endParaRPr lang="en-US" sz="800" dirty="0"/>
+              <a:rPr lang="en-US" sz="1600" b="1" dirty="0">
+                <a:solidFill>
+                  <a:srgbClr val="1B2A4A"/>
+                </a:solidFill>
+                <a:latin typeface="Calibri" pitchFamily="34" charset="0"/>
+                <a:ea typeface="Calibri" pitchFamily="34" charset="-122"/>
+                <a:cs typeface="Calibri" pitchFamily="34" charset="-120"/>
+              </a:rPr>
+              <a:t>Threats to Biodiversity</a:t>
+            </a:r>
+            <a:endParaRPr lang="en-US" sz="1600" dirty="0"/>
+          </a:p>
+          <a:p>
+            <a:pPr indent="0" marL="0">
+              <a:spcAft>
+                <a:spcPts val="400"/>
+              </a:spcAft>
+              <a:buNone/>
+            </a:pPr>
+            <a:endParaRPr lang="en-US" sz="1600" dirty="0"/>
+          </a:p>
+          <a:p>
+            <a:pPr indent="0" marL="0">
+              <a:spcAft>
+                <a:spcPts val="400"/>
+              </a:spcAft>
+              <a:buNone/>
+            </a:pPr>
+            <a:r>
+              <a:rPr lang="en-US" sz="1300" dirty="0">
+                <a:solidFill>
+                  <a:srgbClr val="3D3A36"/>
+                </a:solidFill>
+                <a:latin typeface="Calibri" pitchFamily="34" charset="0"/>
+                <a:ea typeface="Calibri" pitchFamily="34" charset="-122"/>
+                <a:cs typeface="Calibri" pitchFamily="34" charset="-120"/>
+              </a:rPr>
+              <a:t>Habitat destruction (deforestation, urbanisation)</a:t>
+            </a:r>
+            <a:endParaRPr lang="en-US" sz="1600" dirty="0"/>
+          </a:p>
+          <a:p>
+            <a:pPr indent="0" marL="0">
+              <a:spcAft>
+                <a:spcPts val="400"/>
+              </a:spcAft>
+              <a:buNone/>
+            </a:pPr>
+            <a:r>
+              <a:rPr lang="en-US" sz="1300" dirty="0">
+                <a:solidFill>
+                  <a:srgbClr val="3D3A36"/>
+                </a:solidFill>
+                <a:latin typeface="Calibri" pitchFamily="34" charset="0"/>
+                <a:ea typeface="Calibri" pitchFamily="34" charset="-122"/>
+                <a:cs typeface="Calibri" pitchFamily="34" charset="-120"/>
+              </a:rPr>
+              <a:t>Climate change (shifting habitats, coral bleaching)</a:t>
+            </a:r>
+            <a:endParaRPr lang="en-US" sz="1600" dirty="0"/>
+          </a:p>
+          <a:p>
+            <a:pPr indent="0" marL="0">
+              <a:spcAft>
+                <a:spcPts val="400"/>
+              </a:spcAft>
+              <a:buNone/>
+            </a:pPr>
+            <a:r>
+              <a:rPr lang="en-US" sz="1300" dirty="0">
+                <a:solidFill>
+                  <a:srgbClr val="3D3A36"/>
+                </a:solidFill>
+                <a:latin typeface="Calibri" pitchFamily="34" charset="0"/>
+                <a:ea typeface="Calibri" pitchFamily="34" charset="-122"/>
+                <a:cs typeface="Calibri" pitchFamily="34" charset="-120"/>
+              </a:rPr>
+              <a:t>Overexploitation (overfishing, poaching)</a:t>
+            </a:r>
+            <a:endParaRPr lang="en-US" sz="1600" dirty="0"/>
+          </a:p>
+          <a:p>
+            <a:pPr indent="0" marL="0">
+              <a:spcAft>
+                <a:spcPts val="400"/>
+              </a:spcAft>
+              <a:buNone/>
+            </a:pPr>
+            <a:r>
+              <a:rPr lang="en-US" sz="1300" dirty="0">
+                <a:solidFill>
+                  <a:srgbClr val="3D3A36"/>
+                </a:solidFill>
+                <a:latin typeface="Calibri" pitchFamily="34" charset="0"/>
+                <a:ea typeface="Calibri" pitchFamily="34" charset="-122"/>
+                <a:cs typeface="Calibri" pitchFamily="34" charset="-120"/>
+              </a:rPr>
+              <a:t>Pollution (plastics, pesticides, oil spills)</a:t>
+            </a:r>
+            <a:endParaRPr lang="en-US" sz="1600" dirty="0"/>
+          </a:p>
+          <a:p>
+            <a:pPr indent="0" marL="0">
+              <a:spcAft>
+                <a:spcPts val="400"/>
+              </a:spcAft>
+              <a:buNone/>
+            </a:pPr>
+            <a:r>
+              <a:rPr lang="en-US" sz="1300" dirty="0">
+                <a:solidFill>
+                  <a:srgbClr val="3D3A36"/>
+                </a:solidFill>
+                <a:latin typeface="Calibri" pitchFamily="34" charset="0"/>
+                <a:ea typeface="Calibri" pitchFamily="34" charset="-122"/>
+                <a:cs typeface="Calibri" pitchFamily="34" charset="-120"/>
+              </a:rPr>
+              <a:t>Invasive species (outcompete native species)</a:t>
+            </a:r>
+            <a:endParaRPr lang="en-US" sz="1600" dirty="0"/>
           </a:p>
         </p:txBody>
       </p:sp>
@@ -1798,6 +2085,284 @@
 <file path=ppt/slides/slide4.xml><?xml version="1.0" encoding="utf-8"?>
 <p:sld xmlns:a="http://schemas.openxmlformats.org/drawingml/2006/main" xmlns:r="http://schemas.openxmlformats.org/officeDocument/2006/relationships" xmlns:p="http://schemas.openxmlformats.org/presentationml/2006/main">
   <p:cSld name="Slide 4">
+    <p:bg>
+      <p:bgPr>
+        <a:solidFill>
+          <a:srgbClr val="FAF8F5"/>
+        </a:solidFill>
+      </p:bgPr>
+    </p:bg>
+    <p:spTree>
+      <p:nvGrpSpPr>
+        <p:cNvPr id="1" name=""/>
+        <p:cNvGrpSpPr/>
+        <p:nvPr/>
+      </p:nvGrpSpPr>
+      <p:grpSpPr>
+        <a:xfrm>
+          <a:off x="0" y="0"/>
+          <a:ext cx="0" cy="0"/>
+          <a:chOff x="0" y="0"/>
+          <a:chExt cx="0" cy="0"/>
+        </a:xfrm>
+      </p:grpSpPr>
+      <p:sp>
+        <p:nvSpPr>
+          <p:cNvPr id="2" name="Shape 0"/>
+          <p:cNvSpPr/>
+          <p:nvPr/>
+        </p:nvSpPr>
+        <p:spPr>
+          <a:xfrm>
+            <a:off x="0" y="0"/>
+            <a:ext cx="9144000" cy="54864"/>
+          </a:xfrm>
+          <a:prstGeom prst="rect">
+            <a:avLst/>
+          </a:prstGeom>
+          <a:solidFill>
+            <a:srgbClr val="2A9D8F"/>
+          </a:solidFill>
+          <a:ln/>
+        </p:spPr>
+      </p:sp>
+      <p:sp>
+        <p:nvSpPr>
+          <p:cNvPr id="3" name="Text 1"/>
+          <p:cNvSpPr/>
+          <p:nvPr/>
+        </p:nvSpPr>
+        <p:spPr>
+          <a:xfrm>
+            <a:off x="7772400" y="4709160"/>
+            <a:ext cx="1097280" cy="320040"/>
+          </a:xfrm>
+          <a:prstGeom prst="rect">
+            <a:avLst/>
+          </a:prstGeom>
+          <a:noFill/>
+          <a:ln/>
+        </p:spPr>
+        <p:txBody>
+          <a:bodyPr wrap="square" rtlCol="0" anchor="ctr"/>
+          <a:lstStyle/>
+          <a:p>
+            <a:pPr algn="r" indent="0" marL="0">
+              <a:buNone/>
+            </a:pPr>
+            <a:r>
+              <a:rPr lang="en-US" sz="900" dirty="0">
+                <a:solidFill>
+                  <a:srgbClr val="6B6660"/>
+                </a:solidFill>
+                <a:latin typeface="Calibri" pitchFamily="34" charset="0"/>
+                <a:ea typeface="Calibri" pitchFamily="34" charset="-122"/>
+                <a:cs typeface="Calibri" pitchFamily="34" charset="-120"/>
+              </a:rPr>
+              <a:t>4 / 5</a:t>
+            </a:r>
+            <a:endParaRPr lang="en-US" sz="900" dirty="0"/>
+          </a:p>
+        </p:txBody>
+      </p:sp>
+      <p:sp>
+        <p:nvSpPr>
+          <p:cNvPr id="4" name="Text 2"/>
+          <p:cNvSpPr/>
+          <p:nvPr/>
+        </p:nvSpPr>
+        <p:spPr>
+          <a:xfrm>
+            <a:off x="457200" y="274320"/>
+            <a:ext cx="8229600" cy="640080"/>
+          </a:xfrm>
+          <a:prstGeom prst="rect">
+            <a:avLst/>
+          </a:prstGeom>
+          <a:noFill/>
+          <a:ln/>
+        </p:spPr>
+        <p:txBody>
+          <a:bodyPr wrap="square" rtlCol="0" anchor="ctr"/>
+          <a:lstStyle/>
+          <a:p>
+            <a:pPr indent="0" marL="0">
+              <a:buNone/>
+            </a:pPr>
+            <a:r>
+              <a:rPr lang="en-US" sz="2600" b="1" dirty="0">
+                <a:solidFill>
+                  <a:srgbClr val="1B2A4A"/>
+                </a:solidFill>
+                <a:latin typeface="Georgia" pitchFamily="34" charset="0"/>
+                <a:ea typeface="Georgia" pitchFamily="34" charset="-122"/>
+                <a:cs typeface="Georgia" pitchFamily="34" charset="-120"/>
+              </a:rPr>
+              <a:t>Measuring &amp; Protecting Biodiversity</a:t>
+            </a:r>
+            <a:endParaRPr lang="en-US" sz="2600" dirty="0"/>
+          </a:p>
+        </p:txBody>
+      </p:sp>
+      <p:sp>
+        <p:nvSpPr>
+          <p:cNvPr id="5" name="Text 3"/>
+          <p:cNvSpPr/>
+          <p:nvPr/>
+        </p:nvSpPr>
+        <p:spPr>
+          <a:xfrm>
+            <a:off x="457200" y="1097280"/>
+            <a:ext cx="8229600" cy="3657600"/>
+          </a:xfrm>
+          <a:prstGeom prst="rect">
+            <a:avLst/>
+          </a:prstGeom>
+          <a:noFill/>
+          <a:ln/>
+        </p:spPr>
+        <p:txBody>
+          <a:bodyPr wrap="square" rtlCol="0" anchor="t"/>
+          <a:lstStyle/>
+          <a:p>
+            <a:pPr marL="342900" indent="-342900">
+              <a:spcAft>
+                <a:spcPts val="800"/>
+              </a:spcAft>
+              <a:buSzPct val="100000"/>
+              <a:buChar char="•"/>
+            </a:pPr>
+            <a:r>
+              <a:rPr lang="en-US" sz="1400" dirty="0">
+                <a:solidFill>
+                  <a:srgbClr val="3D3A36"/>
+                </a:solidFill>
+                <a:latin typeface="Calibri" pitchFamily="34" charset="0"/>
+                <a:ea typeface="Calibri" pitchFamily="34" charset="-122"/>
+                <a:cs typeface="Calibri" pitchFamily="34" charset="-120"/>
+              </a:rPr>
+              <a:t>Scientists estimate biodiversity using quadrats, transects, and species counts</a:t>
+            </a:r>
+            <a:endParaRPr lang="en-US" sz="1400" dirty="0"/>
+          </a:p>
+          <a:p>
+            <a:pPr marL="342900" indent="-342900">
+              <a:spcAft>
+                <a:spcPts val="800"/>
+              </a:spcAft>
+              <a:buSzPct val="100000"/>
+              <a:buChar char="•"/>
+            </a:pPr>
+            <a:r>
+              <a:rPr lang="en-US" sz="1400" dirty="0">
+                <a:solidFill>
+                  <a:srgbClr val="3D3A36"/>
+                </a:solidFill>
+                <a:latin typeface="Calibri" pitchFamily="34" charset="0"/>
+                <a:ea typeface="Calibri" pitchFamily="34" charset="-122"/>
+                <a:cs typeface="Calibri" pitchFamily="34" charset="-120"/>
+              </a:rPr>
+              <a:t>A high species count AND even distribution = high biodiversity</a:t>
+            </a:r>
+            <a:endParaRPr lang="en-US" sz="1400" dirty="0"/>
+          </a:p>
+          <a:p>
+            <a:pPr marL="342900" indent="-342900">
+              <a:spcAft>
+                <a:spcPts val="800"/>
+              </a:spcAft>
+              <a:buSzPct val="100000"/>
+              <a:buChar char="•"/>
+            </a:pPr>
+            <a:r>
+              <a:rPr lang="en-US" sz="1400" dirty="0">
+                <a:solidFill>
+                  <a:srgbClr val="3D3A36"/>
+                </a:solidFill>
+                <a:latin typeface="Calibri" pitchFamily="34" charset="0"/>
+                <a:ea typeface="Calibri" pitchFamily="34" charset="-122"/>
+                <a:cs typeface="Calibri" pitchFamily="34" charset="-120"/>
+              </a:rPr>
+              <a:t>Protected areas: national parks, marine reserves, wildlife corridors</a:t>
+            </a:r>
+            <a:endParaRPr lang="en-US" sz="1400" dirty="0"/>
+          </a:p>
+          <a:p>
+            <a:pPr marL="342900" indent="-342900">
+              <a:spcAft>
+                <a:spcPts val="800"/>
+              </a:spcAft>
+              <a:buSzPct val="100000"/>
+              <a:buChar char="•"/>
+            </a:pPr>
+            <a:r>
+              <a:rPr lang="en-US" sz="1400" dirty="0">
+                <a:solidFill>
+                  <a:srgbClr val="3D3A36"/>
+                </a:solidFill>
+                <a:latin typeface="Calibri" pitchFamily="34" charset="0"/>
+                <a:ea typeface="Calibri" pitchFamily="34" charset="-122"/>
+                <a:cs typeface="Calibri" pitchFamily="34" charset="-120"/>
+              </a:rPr>
+              <a:t>Seed banks store seeds of endangered plants</a:t>
+            </a:r>
+            <a:endParaRPr lang="en-US" sz="1400" dirty="0"/>
+          </a:p>
+          <a:p>
+            <a:pPr marL="342900" indent="-342900">
+              <a:spcAft>
+                <a:spcPts val="800"/>
+              </a:spcAft>
+              <a:buSzPct val="100000"/>
+              <a:buChar char="•"/>
+            </a:pPr>
+            <a:r>
+              <a:rPr lang="en-US" sz="1400" dirty="0">
+                <a:solidFill>
+                  <a:srgbClr val="3D3A36"/>
+                </a:solidFill>
+                <a:latin typeface="Calibri" pitchFamily="34" charset="0"/>
+                <a:ea typeface="Calibri" pitchFamily="34" charset="-122"/>
+                <a:cs typeface="Calibri" pitchFamily="34" charset="-120"/>
+              </a:rPr>
+              <a:t>Zoos run captive breeding programmes for endangered animals</a:t>
+            </a:r>
+            <a:endParaRPr lang="en-US" sz="1400" dirty="0"/>
+          </a:p>
+          <a:p>
+            <a:pPr marL="342900" indent="-342900">
+              <a:spcAft>
+                <a:spcPts val="800"/>
+              </a:spcAft>
+              <a:buSzPct val="100000"/>
+              <a:buChar char="•"/>
+            </a:pPr>
+            <a:r>
+              <a:rPr lang="en-US" sz="1400" dirty="0">
+                <a:solidFill>
+                  <a:srgbClr val="3D3A36"/>
+                </a:solidFill>
+                <a:latin typeface="Calibri" pitchFamily="34" charset="0"/>
+                <a:ea typeface="Calibri" pitchFamily="34" charset="-122"/>
+                <a:cs typeface="Calibri" pitchFamily="34" charset="-120"/>
+              </a:rPr>
+              <a:t>International agreements: CITES bans trade of endangered species</a:t>
+            </a:r>
+            <a:endParaRPr lang="en-US" sz="1400" dirty="0"/>
+          </a:p>
+        </p:txBody>
+      </p:sp>
+    </p:spTree>
+  </p:cSld>
+  <p:clrMapOvr>
+    <a:masterClrMapping/>
+  </p:clrMapOvr>
+</p:sld>
+</file>
+
+<file path=ppt/slides/slide5.xml><?xml version="1.0" encoding="utf-8"?>
+<p:sld xmlns:a="http://schemas.openxmlformats.org/drawingml/2006/main" xmlns:r="http://schemas.openxmlformats.org/officeDocument/2006/relationships" xmlns:p="http://schemas.openxmlformats.org/presentationml/2006/main">
+  <p:cSld name="Slide 5">
     <p:bg>
       <p:bgPr>
         <a:solidFill>
@@ -1828,13 +2393,13 @@
         <p:spPr>
           <a:xfrm>
             <a:off x="0" y="0"/>
-            <a:ext cx="9144000" cy="54864"/>
-          </a:xfrm>
-          <a:prstGeom prst="rect">
-            <a:avLst/>
-          </a:prstGeom>
-          <a:solidFill>
-            <a:srgbClr val="2A9D8F"/>
+            <a:ext cx="109728" cy="5143500"/>
+          </a:xfrm>
+          <a:prstGeom prst="rect">
+            <a:avLst/>
+          </a:prstGeom>
+          <a:solidFill>
+            <a:srgbClr val="E9C46A"/>
           </a:solidFill>
           <a:ln/>
         </p:spPr>
@@ -1847,8 +2412,8 @@
         </p:nvSpPr>
         <p:spPr>
           <a:xfrm>
-            <a:off x="548640" y="457200"/>
-            <a:ext cx="8046720" cy="640080"/>
+            <a:off x="731520" y="457200"/>
+            <a:ext cx="7772400" cy="731520"/>
           </a:xfrm>
           <a:prstGeom prst="rect">
             <a:avLst/>
@@ -1864,7 +2429,7 @@
               <a:buNone/>
             </a:pPr>
             <a:r>
-              <a:rPr lang="en-US" sz="2800" b="1" dirty="0">
+              <a:rPr lang="en-US" sz="3200" b="1" dirty="0">
                 <a:solidFill>
                   <a:srgbClr val="FFFFFF"/>
                 </a:solidFill>
@@ -1874,7 +2439,7 @@
               </a:rPr>
               <a:t>Key Takeaways</a:t>
             </a:r>
-            <a:endParaRPr lang="en-US" sz="2800" dirty="0"/>
+            <a:endParaRPr lang="en-US" sz="3200" dirty="0"/>
           </a:p>
         </p:txBody>
       </p:sp>
@@ -1886,8 +2451,8 @@
         </p:nvSpPr>
         <p:spPr>
           <a:xfrm>
-            <a:off x="731520" y="1371600"/>
-            <a:ext cx="7680960" cy="3200400"/>
+            <a:off x="731520" y="1463040"/>
+            <a:ext cx="7772400" cy="3200400"/>
           </a:xfrm>
           <a:prstGeom prst="rect">
             <a:avLst/>
@@ -1907,7 +2472,7 @@
               <a:buChar char="•"/>
             </a:pPr>
             <a:r>
-              <a:rPr lang="en-US" sz="1600" dirty="0">
+              <a:rPr lang="en-US" sz="1500" dirty="0">
                 <a:solidFill>
                   <a:srgbClr val="CADCFC"/>
                 </a:solidFill>
@@ -1917,7 +2482,7 @@
               </a:rPr>
               <a:t>Biodiversity = variety of species in an ecosystem</a:t>
             </a:r>
-            <a:endParaRPr lang="en-US" sz="1600" dirty="0"/>
+            <a:endParaRPr lang="en-US" sz="1500" dirty="0"/>
           </a:p>
           <a:p>
             <a:pPr marL="342900" indent="-342900">
@@ -1928,7 +2493,7 @@
               <a:buChar char="•"/>
             </a:pPr>
             <a:r>
-              <a:rPr lang="en-US" sz="1600" dirty="0">
+              <a:rPr lang="en-US" sz="1500" dirty="0">
                 <a:solidFill>
                   <a:srgbClr val="CADCFC"/>
                 </a:solidFill>
@@ -1936,9 +2501,9 @@
                 <a:ea typeface="Calibri" pitchFamily="34" charset="-122"/>
                 <a:cs typeface="Calibri" pitchFamily="34" charset="-120"/>
               </a:rPr>
-              <a:t>High biodiversity = stable ecosystem; low = fragile</a:t>
-            </a:r>
-            <a:endParaRPr lang="en-US" sz="1600" dirty="0"/>
+              <a:t>High biodiversity = healthy, stable; low biodiversity = fragile</a:t>
+            </a:r>
+            <a:endParaRPr lang="en-US" sz="1500" dirty="0"/>
           </a:p>
           <a:p>
             <a:pPr marL="342900" indent="-342900">
@@ -1949,7 +2514,7 @@
               <a:buChar char="•"/>
             </a:pPr>
             <a:r>
-              <a:rPr lang="en-US" sz="1600" dirty="0">
+              <a:rPr lang="en-US" sz="1500" dirty="0">
                 <a:solidFill>
                   <a:srgbClr val="CADCFC"/>
                 </a:solidFill>
@@ -1957,9 +2522,9 @@
                 <a:ea typeface="Calibri" pitchFamily="34" charset="-122"/>
                 <a:cs typeface="Calibri" pitchFamily="34" charset="-120"/>
               </a:rPr>
-              <a:t>Biggest threats: habitat loss, climate change, pollution</a:t>
-            </a:r>
-            <a:endParaRPr lang="en-US" sz="1600" dirty="0"/>
+              <a:t>Threats: habitat loss, climate change, overexploitation, pollution, invasive species</a:t>
+            </a:r>
+            <a:endParaRPr lang="en-US" sz="1500" dirty="0"/>
           </a:p>
           <a:p>
             <a:pPr marL="342900" indent="-342900">
@@ -1970,7 +2535,7 @@
               <a:buChar char="•"/>
             </a:pPr>
             <a:r>
-              <a:rPr lang="en-US" sz="1600" dirty="0">
+              <a:rPr lang="en-US" sz="1500" dirty="0">
                 <a:solidFill>
                   <a:srgbClr val="CADCFC"/>
                 </a:solidFill>
@@ -1978,9 +2543,30 @@
                 <a:ea typeface="Calibri" pitchFamily="34" charset="-122"/>
                 <a:cs typeface="Calibri" pitchFamily="34" charset="-120"/>
               </a:rPr>
-              <a:t>Protection: nature reserves, breeding programmes, sustainable practices</a:t>
-            </a:r>
-            <a:endParaRPr lang="en-US" sz="1600" dirty="0"/>
+              <a:t>Protection: parks, reserves, seed banks, breeding programmes, laws</a:t>
+            </a:r>
+            <a:endParaRPr lang="en-US" sz="1500" dirty="0"/>
+          </a:p>
+          <a:p>
+            <a:pPr marL="342900" indent="-342900">
+              <a:spcAft>
+                <a:spcPts val="1000"/>
+              </a:spcAft>
+              <a:buSzPct val="100000"/>
+              <a:buChar char="•"/>
+            </a:pPr>
+            <a:r>
+              <a:rPr lang="en-US" sz="1500" dirty="0">
+                <a:solidFill>
+                  <a:srgbClr val="CADCFC"/>
+                </a:solidFill>
+                <a:latin typeface="Calibri" pitchFamily="34" charset="0"/>
+                <a:ea typeface="Calibri" pitchFamily="34" charset="-122"/>
+                <a:cs typeface="Calibri" pitchFamily="34" charset="-120"/>
+              </a:rPr>
+              <a:t>~8.7 million species on Earth; only ~1.5 million identified</a:t>
+            </a:r>
+            <a:endParaRPr lang="en-US" sz="1500" dirty="0"/>
           </a:p>
         </p:txBody>
       </p:sp>
@@ -1992,8 +2578,8 @@
         </p:nvSpPr>
         <p:spPr>
           <a:xfrm>
-            <a:off x="548640" y="4572000"/>
-            <a:ext cx="3657600" cy="274320"/>
+            <a:off x="731520" y="4572000"/>
+            <a:ext cx="7772400" cy="365760"/>
           </a:xfrm>
           <a:prstGeom prst="rect">
             <a:avLst/>
@@ -2009,14 +2595,17 @@
               <a:buNone/>
             </a:pPr>
             <a:r>
-              <a:rPr lang="en-US" sz="1000" dirty="0">
-                <a:solidFill>
-                  <a:srgbClr val="6B6660"/>
-                </a:solidFill>
+              <a:rPr lang="en-US" sz="1100" dirty="0">
+                <a:solidFill>
+                  <a:srgbClr val="E9C46A"/>
+                </a:solidFill>
+                <a:latin typeface="Calibri" pitchFamily="34" charset="0"/>
+                <a:ea typeface="Calibri" pitchFamily="34" charset="-122"/>
+                <a:cs typeface="Calibri" pitchFamily="34" charset="-120"/>
               </a:rPr>
               <a:t>mrzocchi.com</a:t>
             </a:r>
-            <a:endParaRPr lang="en-US" sz="1000" dirty="0"/>
+            <a:endParaRPr lang="en-US" sz="1100" dirty="0"/>
           </a:p>
         </p:txBody>
       </p:sp>

--- a/static/ppts/G6_Sci_T4_Biodiversity.pptx
+++ b/static/ppts/G6_Sci_T4_Biodiversity.pptx
@@ -10,9 +10,13 @@
     <p:sldId id="258" r:id="rId4"/>
     <p:sldId id="259" r:id="rId5"/>
     <p:sldId id="260" r:id="rId6"/>
+    <p:sldId id="261" r:id="rId7"/>
+    <p:sldId id="262" r:id="rId8"/>
+    <p:sldId id="263" r:id="rId9"/>
+    <p:sldId id="264" r:id="rId10"/>
   </p:sldIdLst>
   <p:notesMasterIdLst>
-    <p:notesMasterId r:id="rId7"/>
+    <p:notesMasterId r:id="rId11"/>
   </p:notesMasterIdLst>
   <p:sldSz cx="9144000" cy="5143500"/>
   <p:notesSz cx="5143500" cy="9144000"/>
@@ -900,6 +904,358 @@
 </p:notes>
 </file>
 
+<file path=ppt/notesSlides/notesSlide6.xml><?xml version="1.0" encoding="utf-8"?>
+<p:notes xmlns:a="http://schemas.openxmlformats.org/drawingml/2006/main" xmlns:r="http://schemas.openxmlformats.org/officeDocument/2006/relationships" xmlns:p="http://schemas.openxmlformats.org/presentationml/2006/main">
+  <p:cSld>
+    <p:spTree>
+      <p:nvGrpSpPr>
+        <p:cNvPr id="1" name=""/>
+        <p:cNvGrpSpPr/>
+        <p:nvPr/>
+      </p:nvGrpSpPr>
+      <p:grpSpPr>
+        <a:xfrm>
+          <a:off x="0" y="0"/>
+          <a:ext cx="0" cy="0"/>
+          <a:chOff x="0" y="0"/>
+          <a:chExt cx="0" cy="0"/>
+        </a:xfrm>
+      </p:grpSpPr>
+      <p:sp>
+        <p:nvSpPr>
+          <p:cNvPr id="2" name="Slide Image Placeholder 1"/>
+          <p:cNvSpPr>
+            <a:spLocks noGrp="1" noRot="1" noChangeAspect="1"/>
+          </p:cNvSpPr>
+          <p:nvPr>
+            <p:ph type="sldImg"/>
+          </p:nvPr>
+        </p:nvSpPr>
+        <p:spPr/>
+      </p:sp>
+      <p:sp>
+        <p:nvSpPr>
+          <p:cNvPr id="3" name="Notes Placeholder 2"/>
+          <p:cNvSpPr>
+            <a:spLocks noGrp="1"/>
+          </p:cNvSpPr>
+          <p:nvPr>
+            <p:ph type="body" idx="1"/>
+          </p:nvPr>
+        </p:nvSpPr>
+        <p:spPr/>
+        <p:txBody>
+          <a:bodyPr/>
+          <a:lstStyle/>
+          <a:p>
+            <a:r>
+              <a:rPr lang="en-US" dirty="0"/>
+              <a:t/>
+            </a:r>
+            <a:endParaRPr lang="en-US" dirty="0"/>
+          </a:p>
+        </p:txBody>
+      </p:sp>
+      <p:sp>
+        <p:nvSpPr>
+          <p:cNvPr id="4" name="Slide Number Placeholder 3"/>
+          <p:cNvSpPr>
+            <a:spLocks noGrp="1"/>
+          </p:cNvSpPr>
+          <p:nvPr>
+            <p:ph type="sldNum" sz="quarter" idx="10"/>
+          </p:nvPr>
+        </p:nvSpPr>
+        <p:spPr/>
+        <p:txBody>
+          <a:bodyPr/>
+          <a:lstStyle/>
+          <a:p>
+            <a:fld id="{F7021451-1387-4CA6-816F-3879F97B5CBC}" type="slidenum">
+              <a:rPr lang="en-US"/>
+              <a:t>6</a:t>
+            </a:fld>
+            <a:endParaRPr lang="en-US"/>
+          </a:p>
+        </p:txBody>
+      </p:sp>
+    </p:spTree>
+    <p:extLst>
+      <p:ext uri="{BB962C8B-B14F-4D97-AF65-F5344CB8AC3E}">
+        <p14:creationId xmlns:p14="http://schemas.microsoft.com/office/powerpoint/2010/main" val="1024086991"/>
+      </p:ext>
+    </p:extLst>
+  </p:cSld>
+  <p:clrMapOvr>
+    <a:masterClrMapping/>
+  </p:clrMapOvr>
+</p:notes>
+</file>
+
+<file path=ppt/notesSlides/notesSlide7.xml><?xml version="1.0" encoding="utf-8"?>
+<p:notes xmlns:a="http://schemas.openxmlformats.org/drawingml/2006/main" xmlns:r="http://schemas.openxmlformats.org/officeDocument/2006/relationships" xmlns:p="http://schemas.openxmlformats.org/presentationml/2006/main">
+  <p:cSld>
+    <p:spTree>
+      <p:nvGrpSpPr>
+        <p:cNvPr id="1" name=""/>
+        <p:cNvGrpSpPr/>
+        <p:nvPr/>
+      </p:nvGrpSpPr>
+      <p:grpSpPr>
+        <a:xfrm>
+          <a:off x="0" y="0"/>
+          <a:ext cx="0" cy="0"/>
+          <a:chOff x="0" y="0"/>
+          <a:chExt cx="0" cy="0"/>
+        </a:xfrm>
+      </p:grpSpPr>
+      <p:sp>
+        <p:nvSpPr>
+          <p:cNvPr id="2" name="Slide Image Placeholder 1"/>
+          <p:cNvSpPr>
+            <a:spLocks noGrp="1" noRot="1" noChangeAspect="1"/>
+          </p:cNvSpPr>
+          <p:nvPr>
+            <p:ph type="sldImg"/>
+          </p:nvPr>
+        </p:nvSpPr>
+        <p:spPr/>
+      </p:sp>
+      <p:sp>
+        <p:nvSpPr>
+          <p:cNvPr id="3" name="Notes Placeholder 2"/>
+          <p:cNvSpPr>
+            <a:spLocks noGrp="1"/>
+          </p:cNvSpPr>
+          <p:nvPr>
+            <p:ph type="body" idx="1"/>
+          </p:nvPr>
+        </p:nvSpPr>
+        <p:spPr/>
+        <p:txBody>
+          <a:bodyPr/>
+          <a:lstStyle/>
+          <a:p>
+            <a:r>
+              <a:rPr lang="en-US" dirty="0"/>
+              <a:t/>
+            </a:r>
+            <a:endParaRPr lang="en-US" dirty="0"/>
+          </a:p>
+        </p:txBody>
+      </p:sp>
+      <p:sp>
+        <p:nvSpPr>
+          <p:cNvPr id="4" name="Slide Number Placeholder 3"/>
+          <p:cNvSpPr>
+            <a:spLocks noGrp="1"/>
+          </p:cNvSpPr>
+          <p:nvPr>
+            <p:ph type="sldNum" sz="quarter" idx="10"/>
+          </p:nvPr>
+        </p:nvSpPr>
+        <p:spPr/>
+        <p:txBody>
+          <a:bodyPr/>
+          <a:lstStyle/>
+          <a:p>
+            <a:fld id="{F7021451-1387-4CA6-816F-3879F97B5CBC}" type="slidenum">
+              <a:rPr lang="en-US"/>
+              <a:t>7</a:t>
+            </a:fld>
+            <a:endParaRPr lang="en-US"/>
+          </a:p>
+        </p:txBody>
+      </p:sp>
+    </p:spTree>
+    <p:extLst>
+      <p:ext uri="{BB962C8B-B14F-4D97-AF65-F5344CB8AC3E}">
+        <p14:creationId xmlns:p14="http://schemas.microsoft.com/office/powerpoint/2010/main" val="1024086991"/>
+      </p:ext>
+    </p:extLst>
+  </p:cSld>
+  <p:clrMapOvr>
+    <a:masterClrMapping/>
+  </p:clrMapOvr>
+</p:notes>
+</file>
+
+<file path=ppt/notesSlides/notesSlide8.xml><?xml version="1.0" encoding="utf-8"?>
+<p:notes xmlns:a="http://schemas.openxmlformats.org/drawingml/2006/main" xmlns:r="http://schemas.openxmlformats.org/officeDocument/2006/relationships" xmlns:p="http://schemas.openxmlformats.org/presentationml/2006/main">
+  <p:cSld>
+    <p:spTree>
+      <p:nvGrpSpPr>
+        <p:cNvPr id="1" name=""/>
+        <p:cNvGrpSpPr/>
+        <p:nvPr/>
+      </p:nvGrpSpPr>
+      <p:grpSpPr>
+        <a:xfrm>
+          <a:off x="0" y="0"/>
+          <a:ext cx="0" cy="0"/>
+          <a:chOff x="0" y="0"/>
+          <a:chExt cx="0" cy="0"/>
+        </a:xfrm>
+      </p:grpSpPr>
+      <p:sp>
+        <p:nvSpPr>
+          <p:cNvPr id="2" name="Slide Image Placeholder 1"/>
+          <p:cNvSpPr>
+            <a:spLocks noGrp="1" noRot="1" noChangeAspect="1"/>
+          </p:cNvSpPr>
+          <p:nvPr>
+            <p:ph type="sldImg"/>
+          </p:nvPr>
+        </p:nvSpPr>
+        <p:spPr/>
+      </p:sp>
+      <p:sp>
+        <p:nvSpPr>
+          <p:cNvPr id="3" name="Notes Placeholder 2"/>
+          <p:cNvSpPr>
+            <a:spLocks noGrp="1"/>
+          </p:cNvSpPr>
+          <p:nvPr>
+            <p:ph type="body" idx="1"/>
+          </p:nvPr>
+        </p:nvSpPr>
+        <p:spPr/>
+        <p:txBody>
+          <a:bodyPr/>
+          <a:lstStyle/>
+          <a:p>
+            <a:r>
+              <a:rPr lang="en-US" dirty="0"/>
+              <a:t/>
+            </a:r>
+            <a:endParaRPr lang="en-US" dirty="0"/>
+          </a:p>
+        </p:txBody>
+      </p:sp>
+      <p:sp>
+        <p:nvSpPr>
+          <p:cNvPr id="4" name="Slide Number Placeholder 3"/>
+          <p:cNvSpPr>
+            <a:spLocks noGrp="1"/>
+          </p:cNvSpPr>
+          <p:nvPr>
+            <p:ph type="sldNum" sz="quarter" idx="10"/>
+          </p:nvPr>
+        </p:nvSpPr>
+        <p:spPr/>
+        <p:txBody>
+          <a:bodyPr/>
+          <a:lstStyle/>
+          <a:p>
+            <a:fld id="{F7021451-1387-4CA6-816F-3879F97B5CBC}" type="slidenum">
+              <a:rPr lang="en-US"/>
+              <a:t>8</a:t>
+            </a:fld>
+            <a:endParaRPr lang="en-US"/>
+          </a:p>
+        </p:txBody>
+      </p:sp>
+    </p:spTree>
+    <p:extLst>
+      <p:ext uri="{BB962C8B-B14F-4D97-AF65-F5344CB8AC3E}">
+        <p14:creationId xmlns:p14="http://schemas.microsoft.com/office/powerpoint/2010/main" val="1024086991"/>
+      </p:ext>
+    </p:extLst>
+  </p:cSld>
+  <p:clrMapOvr>
+    <a:masterClrMapping/>
+  </p:clrMapOvr>
+</p:notes>
+</file>
+
+<file path=ppt/notesSlides/notesSlide9.xml><?xml version="1.0" encoding="utf-8"?>
+<p:notes xmlns:a="http://schemas.openxmlformats.org/drawingml/2006/main" xmlns:r="http://schemas.openxmlformats.org/officeDocument/2006/relationships" xmlns:p="http://schemas.openxmlformats.org/presentationml/2006/main">
+  <p:cSld>
+    <p:spTree>
+      <p:nvGrpSpPr>
+        <p:cNvPr id="1" name=""/>
+        <p:cNvGrpSpPr/>
+        <p:nvPr/>
+      </p:nvGrpSpPr>
+      <p:grpSpPr>
+        <a:xfrm>
+          <a:off x="0" y="0"/>
+          <a:ext cx="0" cy="0"/>
+          <a:chOff x="0" y="0"/>
+          <a:chExt cx="0" cy="0"/>
+        </a:xfrm>
+      </p:grpSpPr>
+      <p:sp>
+        <p:nvSpPr>
+          <p:cNvPr id="2" name="Slide Image Placeholder 1"/>
+          <p:cNvSpPr>
+            <a:spLocks noGrp="1" noRot="1" noChangeAspect="1"/>
+          </p:cNvSpPr>
+          <p:nvPr>
+            <p:ph type="sldImg"/>
+          </p:nvPr>
+        </p:nvSpPr>
+        <p:spPr/>
+      </p:sp>
+      <p:sp>
+        <p:nvSpPr>
+          <p:cNvPr id="3" name="Notes Placeholder 2"/>
+          <p:cNvSpPr>
+            <a:spLocks noGrp="1"/>
+          </p:cNvSpPr>
+          <p:nvPr>
+            <p:ph type="body" idx="1"/>
+          </p:nvPr>
+        </p:nvSpPr>
+        <p:spPr/>
+        <p:txBody>
+          <a:bodyPr/>
+          <a:lstStyle/>
+          <a:p>
+            <a:r>
+              <a:rPr lang="en-US" dirty="0"/>
+              <a:t/>
+            </a:r>
+            <a:endParaRPr lang="en-US" dirty="0"/>
+          </a:p>
+        </p:txBody>
+      </p:sp>
+      <p:sp>
+        <p:nvSpPr>
+          <p:cNvPr id="4" name="Slide Number Placeholder 3"/>
+          <p:cNvSpPr>
+            <a:spLocks noGrp="1"/>
+          </p:cNvSpPr>
+          <p:nvPr>
+            <p:ph type="sldNum" sz="quarter" idx="10"/>
+          </p:nvPr>
+        </p:nvSpPr>
+        <p:spPr/>
+        <p:txBody>
+          <a:bodyPr/>
+          <a:lstStyle/>
+          <a:p>
+            <a:fld id="{F7021451-1387-4CA6-816F-3879F97B5CBC}" type="slidenum">
+              <a:rPr lang="en-US"/>
+              <a:t>9</a:t>
+            </a:fld>
+            <a:endParaRPr lang="en-US"/>
+          </a:p>
+        </p:txBody>
+      </p:sp>
+    </p:spTree>
+    <p:extLst>
+      <p:ext uri="{BB962C8B-B14F-4D97-AF65-F5344CB8AC3E}">
+        <p14:creationId xmlns:p14="http://schemas.microsoft.com/office/powerpoint/2010/main" val="1024086991"/>
+      </p:ext>
+    </p:extLst>
+  </p:cSld>
+  <p:clrMapOvr>
+    <a:masterClrMapping/>
+  </p:clrMapOvr>
+</p:notes>
+</file>
+
 <file path=ppt/slideLayouts/slideLayout1.xml><?xml version="1.0" encoding="utf-8"?>
 <p:sldLayout xmlns:a="http://schemas.openxmlformats.org/drawingml/2006/main" xmlns:r="http://schemas.openxmlformats.org/officeDocument/2006/relationships" xmlns:p="http://schemas.openxmlformats.org/presentationml/2006/main" preserve="1">
   <p:cSld name="DEFAULT">
@@ -1210,13 +1566,6 @@
 <file path=ppt/slides/slide1.xml><?xml version="1.0" encoding="utf-8"?>
 <p:sld xmlns:a="http://schemas.openxmlformats.org/drawingml/2006/main" xmlns:r="http://schemas.openxmlformats.org/officeDocument/2006/relationships" xmlns:p="http://schemas.openxmlformats.org/presentationml/2006/main">
   <p:cSld name="Slide 1">
-    <p:bg>
-      <p:bgPr>
-        <a:solidFill>
-          <a:srgbClr val="1B2A4A"/>
-        </a:solidFill>
-      </p:bgPr>
-    </p:bg>
     <p:spTree>
       <p:nvGrpSpPr>
         <p:cNvPr id="1" name=""/>
@@ -1240,7 +1589,27 @@
         <p:spPr>
           <a:xfrm>
             <a:off x="0" y="0"/>
-            <a:ext cx="109728" cy="5143500"/>
+            <a:ext cx="9144000" cy="5143500"/>
+          </a:xfrm>
+          <a:prstGeom prst="rect">
+            <a:avLst/>
+          </a:prstGeom>
+          <a:solidFill>
+            <a:srgbClr val="1B2A4A"/>
+          </a:solidFill>
+          <a:ln/>
+        </p:spPr>
+      </p:sp>
+      <p:sp>
+        <p:nvSpPr>
+          <p:cNvPr id="3" name="Shape 1"/>
+          <p:cNvSpPr/>
+          <p:nvPr/>
+        </p:nvSpPr>
+        <p:spPr>
+          <a:xfrm>
+            <a:off x="0" y="4777740"/>
+            <a:ext cx="9144000" cy="365760"/>
           </a:xfrm>
           <a:prstGeom prst="rect">
             <a:avLst/>
@@ -1253,14 +1622,14 @@
       </p:sp>
       <p:sp>
         <p:nvSpPr>
-          <p:cNvPr id="3" name="Text 1"/>
+          <p:cNvPr id="4" name="Text 2"/>
           <p:cNvSpPr/>
           <p:nvPr/>
         </p:nvSpPr>
         <p:spPr>
           <a:xfrm>
             <a:off x="731520" y="1097280"/>
-            <a:ext cx="7772400" cy="1371600"/>
+            <a:ext cx="7680960" cy="457200"/>
           </a:xfrm>
           <a:prstGeom prst="rect">
             <a:avLst/>
@@ -1270,6 +1639,45 @@
         </p:spPr>
         <p:txBody>
           <a:bodyPr wrap="square" rtlCol="0" anchor="ctr"/>
+          <a:lstStyle/>
+          <a:p>
+            <a:pPr indent="0" marL="0">
+              <a:buNone/>
+            </a:pPr>
+            <a:r>
+              <a:rPr lang="en-US" sz="1400" b="1" spc="400" kern="0" dirty="0">
+                <a:solidFill>
+                  <a:srgbClr val="2A9D8F"/>
+                </a:solidFill>
+                <a:latin typeface="Calibri" pitchFamily="34" charset="0"/>
+                <a:ea typeface="Calibri" pitchFamily="34" charset="-122"/>
+                <a:cs typeface="Calibri" pitchFamily="34" charset="-120"/>
+              </a:rPr>
+              <a:t>GRADE 6 SCIENCE</a:t>
+            </a:r>
+            <a:endParaRPr lang="en-US" sz="1400" dirty="0"/>
+          </a:p>
+        </p:txBody>
+      </p:sp>
+      <p:sp>
+        <p:nvSpPr>
+          <p:cNvPr id="5" name="Text 3"/>
+          <p:cNvSpPr/>
+          <p:nvPr/>
+        </p:nvSpPr>
+        <p:spPr>
+          <a:xfrm>
+            <a:off x="731520" y="1645920"/>
+            <a:ext cx="7680960" cy="1463040"/>
+          </a:xfrm>
+          <a:prstGeom prst="rect">
+            <a:avLst/>
+          </a:prstGeom>
+          <a:noFill/>
+          <a:ln/>
+        </p:spPr>
+        <p:txBody>
+          <a:bodyPr wrap="square" rtlCol="0" anchor="t"/>
           <a:lstStyle/>
           <a:p>
             <a:pPr indent="0" marL="0">
@@ -1292,14 +1700,14 @@
       </p:sp>
       <p:sp>
         <p:nvSpPr>
-          <p:cNvPr id="4" name="Text 2"/>
-          <p:cNvSpPr/>
-          <p:nvPr/>
-        </p:nvSpPr>
-        <p:spPr>
-          <a:xfrm>
-            <a:off x="731520" y="2560320"/>
-            <a:ext cx="7772400" cy="548640"/>
+          <p:cNvPr id="6" name="Text 4"/>
+          <p:cNvSpPr/>
+          <p:nvPr/>
+        </p:nvSpPr>
+        <p:spPr>
+          <a:xfrm>
+            <a:off x="731520" y="3200400"/>
+            <a:ext cx="7680960" cy="548640"/>
           </a:xfrm>
           <a:prstGeom prst="rect">
             <a:avLst/>
@@ -1315,15 +1723,15 @@
               <a:buNone/>
             </a:pPr>
             <a:r>
-              <a:rPr lang="en-US" sz="1600" dirty="0">
-                <a:solidFill>
-                  <a:srgbClr val="E9C46A"/>
-                </a:solidFill>
-                <a:latin typeface="Calibri" pitchFamily="34" charset="0"/>
-                <a:ea typeface="Calibri" pitchFamily="34" charset="-122"/>
-                <a:cs typeface="Calibri" pitchFamily="34" charset="-120"/>
-              </a:rPr>
-              <a:t>Grade 6 Science · Mr Zocchi</a:t>
+              <a:rPr lang="en-US" sz="1600" i="1" dirty="0">
+                <a:solidFill>
+                  <a:srgbClr val="9B9690"/>
+                </a:solidFill>
+                <a:latin typeface="Calibri" pitchFamily="34" charset="0"/>
+                <a:ea typeface="Calibri" pitchFamily="34" charset="-122"/>
+                <a:cs typeface="Calibri" pitchFamily="34" charset="-120"/>
+              </a:rPr>
+              <a:t>The variety of life on Earth</a:t>
             </a:r>
             <a:endParaRPr lang="en-US" sz="1600" dirty="0"/>
           </a:p>
@@ -1331,36 +1739,14 @@
       </p:sp>
       <p:sp>
         <p:nvSpPr>
-          <p:cNvPr id="5" name="Shape 3"/>
-          <p:cNvSpPr/>
-          <p:nvPr/>
-        </p:nvSpPr>
-        <p:spPr>
-          <a:xfrm>
-            <a:off x="731520" y="3474720"/>
-            <a:ext cx="2011680" cy="411480"/>
-          </a:xfrm>
-          <a:prstGeom prst="roundRect">
-            <a:avLst>
-              <a:gd name="adj" fmla="val 17778"/>
-            </a:avLst>
-          </a:prstGeom>
-          <a:solidFill>
-            <a:srgbClr val="2A9D8F"/>
-          </a:solidFill>
-          <a:ln/>
-        </p:spPr>
-      </p:sp>
-      <p:sp>
-        <p:nvSpPr>
-          <p:cNvPr id="6" name="Text 4"/>
-          <p:cNvSpPr/>
-          <p:nvPr/>
-        </p:nvSpPr>
-        <p:spPr>
-          <a:xfrm>
-            <a:off x="731520" y="3474720"/>
-            <a:ext cx="2011680" cy="411480"/>
+          <p:cNvPr id="7" name="Text 5"/>
+          <p:cNvSpPr/>
+          <p:nvPr/>
+        </p:nvSpPr>
+        <p:spPr>
+          <a:xfrm>
+            <a:off x="731520" y="4206240"/>
+            <a:ext cx="3657600" cy="365760"/>
           </a:xfrm>
           <a:prstGeom prst="rect">
             <a:avLst/>
@@ -1372,19 +1758,19 @@
           <a:bodyPr wrap="square" rtlCol="0" anchor="ctr"/>
           <a:lstStyle/>
           <a:p>
-            <a:pPr algn="ctr" indent="0" marL="0">
+            <a:pPr indent="0" marL="0">
               <a:buNone/>
             </a:pPr>
             <a:r>
-              <a:rPr lang="en-US" sz="1200" b="1" dirty="0">
-                <a:solidFill>
-                  <a:srgbClr val="FFFFFF"/>
-                </a:solidFill>
-                <a:latin typeface="Calibri" pitchFamily="34" charset="0"/>
-                <a:ea typeface="Calibri" pitchFamily="34" charset="-122"/>
-                <a:cs typeface="Calibri" pitchFamily="34" charset="-120"/>
-              </a:rPr>
-              <a:t>Term 4 · Ecology</a:t>
+              <a:rPr lang="en-US" sz="1200" dirty="0">
+                <a:solidFill>
+                  <a:srgbClr val="6B6660"/>
+                </a:solidFill>
+                <a:latin typeface="Calibri" pitchFamily="34" charset="0"/>
+                <a:ea typeface="Calibri" pitchFamily="34" charset="-122"/>
+                <a:cs typeface="Calibri" pitchFamily="34" charset="-120"/>
+              </a:rPr>
+              <a:t>Mr Zocchi</a:t>
             </a:r>
             <a:endParaRPr lang="en-US" sz="1200" dirty="0"/>
           </a:p>
@@ -1401,13 +1787,6 @@
 <file path=ppt/slides/slide2.xml><?xml version="1.0" encoding="utf-8"?>
 <p:sld xmlns:a="http://schemas.openxmlformats.org/drawingml/2006/main" xmlns:r="http://schemas.openxmlformats.org/officeDocument/2006/relationships" xmlns:p="http://schemas.openxmlformats.org/presentationml/2006/main">
   <p:cSld name="Slide 2">
-    <p:bg>
-      <p:bgPr>
-        <a:solidFill>
-          <a:srgbClr val="FAF8F5"/>
-        </a:solidFill>
-      </p:bgPr>
-    </p:bg>
     <p:spTree>
       <p:nvGrpSpPr>
         <p:cNvPr id="1" name=""/>
@@ -1431,13 +1810,13 @@
         <p:spPr>
           <a:xfrm>
             <a:off x="0" y="0"/>
-            <a:ext cx="9144000" cy="54864"/>
-          </a:xfrm>
-          <a:prstGeom prst="rect">
-            <a:avLst/>
-          </a:prstGeom>
-          <a:solidFill>
-            <a:srgbClr val="2A9D8F"/>
+            <a:ext cx="9144000" cy="5143500"/>
+          </a:xfrm>
+          <a:prstGeom prst="rect">
+            <a:avLst/>
+          </a:prstGeom>
+          <a:solidFill>
+            <a:srgbClr val="111D35"/>
           </a:solidFill>
           <a:ln/>
         </p:spPr>
@@ -1450,8 +1829,8 @@
         </p:nvSpPr>
         <p:spPr>
           <a:xfrm>
-            <a:off x="7772400" y="4709160"/>
-            <a:ext cx="1097280" cy="320040"/>
+            <a:off x="6858000" y="182880"/>
+            <a:ext cx="2286000" cy="2743200"/>
           </a:xfrm>
           <a:prstGeom prst="rect">
             <a:avLst/>
@@ -1463,125 +1842,36 @@
           <a:bodyPr wrap="square" rtlCol="0" anchor="ctr"/>
           <a:lstStyle/>
           <a:p>
-            <a:pPr algn="r" indent="0" marL="0">
+            <a:pPr algn="ctr" indent="0" marL="0">
               <a:buNone/>
             </a:pPr>
             <a:r>
-              <a:rPr lang="en-US" sz="900" dirty="0">
-                <a:solidFill>
-                  <a:srgbClr val="6B6660"/>
-                </a:solidFill>
-                <a:latin typeface="Calibri" pitchFamily="34" charset="0"/>
-                <a:ea typeface="Calibri" pitchFamily="34" charset="-122"/>
-                <a:cs typeface="Calibri" pitchFamily="34" charset="-120"/>
-              </a:rPr>
-              <a:t>2 / 5</a:t>
-            </a:r>
-            <a:endParaRPr lang="en-US" sz="900" dirty="0"/>
-          </a:p>
-        </p:txBody>
-      </p:sp>
-      <p:sp>
-        <p:nvSpPr>
-          <p:cNvPr id="4" name="Shape 2"/>
-          <p:cNvSpPr/>
-          <p:nvPr/>
-        </p:nvSpPr>
-        <p:spPr>
-          <a:xfrm>
-            <a:off x="1371600" y="914400"/>
-            <a:ext cx="6400800" cy="3200400"/>
-          </a:xfrm>
-          <a:prstGeom prst="rect">
-            <a:avLst/>
-          </a:prstGeom>
-          <a:solidFill>
-            <a:srgbClr val="FFFFFF"/>
-          </a:solidFill>
-          <a:ln w="12700">
-            <a:solidFill>
-              <a:srgbClr val="E5E2DC"/>
-            </a:solidFill>
-            <a:prstDash val="solid"/>
-          </a:ln>
-          <a:effectLst>
-            <a:outerShdw sx="100000" sy="100000" kx="0" ky="0" algn="bl" rotWithShape="0" blurRad="50800" dist="25400" dir="8100000">
-              <a:srgbClr val="000000">
-                <a:alpha val="10000"/>
-              </a:srgbClr>
-            </a:outerShdw>
-          </a:effectLst>
-        </p:spPr>
-      </p:sp>
-      <p:sp>
-        <p:nvSpPr>
-          <p:cNvPr id="5" name="Shape 3"/>
-          <p:cNvSpPr/>
-          <p:nvPr/>
-        </p:nvSpPr>
-        <p:spPr>
-          <a:xfrm>
-            <a:off x="1371600" y="914400"/>
-            <a:ext cx="91440" cy="3200400"/>
-          </a:xfrm>
-          <a:prstGeom prst="rect">
-            <a:avLst/>
-          </a:prstGeom>
-          <a:solidFill>
-            <a:srgbClr val="2A9D8F"/>
-          </a:solidFill>
-          <a:ln/>
-        </p:spPr>
-      </p:sp>
-      <p:sp>
-        <p:nvSpPr>
-          <p:cNvPr id="6" name="Text 4"/>
-          <p:cNvSpPr/>
-          <p:nvPr/>
-        </p:nvSpPr>
-        <p:spPr>
-          <a:xfrm>
-            <a:off x="1828800" y="1097280"/>
-            <a:ext cx="5669280" cy="640080"/>
-          </a:xfrm>
-          <a:prstGeom prst="rect">
-            <a:avLst/>
-          </a:prstGeom>
-          <a:noFill/>
-          <a:ln/>
-        </p:spPr>
-        <p:txBody>
-          <a:bodyPr wrap="square" rtlCol="0" anchor="ctr"/>
-          <a:lstStyle/>
-          <a:p>
-            <a:pPr indent="0" marL="0">
-              <a:buNone/>
-            </a:pPr>
-            <a:r>
-              <a:rPr lang="en-US" sz="2400" b="1" dirty="0">
-                <a:solidFill>
-                  <a:srgbClr val="1B2A4A"/>
+              <a:rPr lang="en-US" sz="16000" b="1" dirty="0">
+                <a:solidFill>
+                  <a:srgbClr val="2A9D8F">
+                    <a:alpha val="80000"/>
+                  </a:srgbClr>
                 </a:solidFill>
                 <a:latin typeface="Georgia" pitchFamily="34" charset="0"/>
                 <a:ea typeface="Georgia" pitchFamily="34" charset="-122"/>
                 <a:cs typeface="Georgia" pitchFamily="34" charset="-120"/>
               </a:rPr>
-              <a:t>What is Biodiversity?</a:t>
-            </a:r>
-            <a:endParaRPr lang="en-US" sz="2400" dirty="0"/>
-          </a:p>
-        </p:txBody>
-      </p:sp>
-      <p:sp>
-        <p:nvSpPr>
-          <p:cNvPr id="7" name="Text 5"/>
-          <p:cNvSpPr/>
-          <p:nvPr/>
-        </p:nvSpPr>
-        <p:spPr>
-          <a:xfrm>
-            <a:off x="1828800" y="1828800"/>
-            <a:ext cx="5669280" cy="2011680"/>
+              <a:t>?</a:t>
+            </a:r>
+            <a:endParaRPr lang="en-US" sz="16000" dirty="0"/>
+          </a:p>
+        </p:txBody>
+      </p:sp>
+      <p:sp>
+        <p:nvSpPr>
+          <p:cNvPr id="4" name="Text 2"/>
+          <p:cNvSpPr/>
+          <p:nvPr/>
+        </p:nvSpPr>
+        <p:spPr>
+          <a:xfrm>
+            <a:off x="731520" y="548640"/>
+            <a:ext cx="2743200" cy="365760"/>
           </a:xfrm>
           <a:prstGeom prst="rect">
             <a:avLst/>
@@ -1590,27 +1880,246 @@
           <a:ln/>
         </p:spPr>
         <p:txBody>
+          <a:bodyPr wrap="square" rtlCol="0" anchor="ctr"/>
+          <a:lstStyle/>
+          <a:p>
+            <a:pPr indent="0" marL="0">
+              <a:buNone/>
+            </a:pPr>
+            <a:r>
+              <a:rPr lang="en-US" sz="1200" b="1" spc="400" kern="0" dirty="0">
+                <a:solidFill>
+                  <a:srgbClr val="2A9D8F"/>
+                </a:solidFill>
+                <a:latin typeface="Calibri" pitchFamily="34" charset="0"/>
+                <a:ea typeface="Calibri" pitchFamily="34" charset="-122"/>
+                <a:cs typeface="Calibri" pitchFamily="34" charset="-120"/>
+              </a:rPr>
+              <a:t>INQUIRY</a:t>
+            </a:r>
+            <a:endParaRPr lang="en-US" sz="1200" dirty="0"/>
+          </a:p>
+        </p:txBody>
+      </p:sp>
+      <p:sp>
+        <p:nvSpPr>
+          <p:cNvPr id="5" name="Text 3"/>
+          <p:cNvSpPr/>
+          <p:nvPr/>
+        </p:nvSpPr>
+        <p:spPr>
+          <a:xfrm>
+            <a:off x="731520" y="1005840"/>
+            <a:ext cx="6858000" cy="1463040"/>
+          </a:xfrm>
+          <a:prstGeom prst="rect">
+            <a:avLst/>
+          </a:prstGeom>
+          <a:noFill/>
+          <a:ln/>
+        </p:spPr>
+        <p:txBody>
           <a:bodyPr wrap="square" rtlCol="0" anchor="t"/>
           <a:lstStyle/>
           <a:p>
             <a:pPr indent="0" marL="0">
-              <a:lnSpc>
-                <a:spcPct val="130000"/>
-              </a:lnSpc>
               <a:buNone/>
             </a:pPr>
             <a:r>
-              <a:rPr lang="en-US" sz="1500" dirty="0">
-                <a:solidFill>
-                  <a:srgbClr val="3D3A36"/>
-                </a:solidFill>
-                <a:latin typeface="Calibri" pitchFamily="34" charset="0"/>
-                <a:ea typeface="Calibri" pitchFamily="34" charset="-122"/>
-                <a:cs typeface="Calibri" pitchFamily="34" charset="-120"/>
-              </a:rPr>
-              <a:t>Biodiversity means the variety of different species in an ecosystem. High biodiversity = many different species = a healthy, stable ecosystem. Low biodiversity = few species = a fragile ecosystem. Earth has an estimated 8.7 million species, but only ~1.5 million have been identified.</a:t>
-            </a:r>
-            <a:endParaRPr lang="en-US" sz="1500" dirty="0"/>
+              <a:rPr lang="en-US" sz="2800" b="1" dirty="0">
+                <a:solidFill>
+                  <a:srgbClr val="FFFFFF"/>
+                </a:solidFill>
+                <a:latin typeface="Georgia" pitchFamily="34" charset="0"/>
+                <a:ea typeface="Georgia" pitchFamily="34" charset="-122"/>
+                <a:cs typeface="Georgia" pitchFamily="34" charset="-120"/>
+              </a:rPr>
+              <a:t>The Korean DMZ has been empty of humans for 70 years. It is now one of the most biodiverse places in East Asia. What does this tell us?</a:t>
+            </a:r>
+            <a:endParaRPr lang="en-US" sz="2800" dirty="0"/>
+          </a:p>
+        </p:txBody>
+      </p:sp>
+      <p:sp>
+        <p:nvSpPr>
+          <p:cNvPr id="6" name="Text 4"/>
+          <p:cNvSpPr/>
+          <p:nvPr/>
+        </p:nvSpPr>
+        <p:spPr>
+          <a:xfrm>
+            <a:off x="731520" y="2560320"/>
+            <a:ext cx="6858000" cy="548640"/>
+          </a:xfrm>
+          <a:prstGeom prst="rect">
+            <a:avLst/>
+          </a:prstGeom>
+          <a:noFill/>
+          <a:ln/>
+        </p:spPr>
+        <p:txBody>
+          <a:bodyPr wrap="square" rtlCol="0" anchor="ctr"/>
+          <a:lstStyle/>
+          <a:p>
+            <a:pPr indent="0" marL="0">
+              <a:buNone/>
+            </a:pPr>
+            <a:r>
+              <a:rPr lang="en-US" sz="1400" i="1" dirty="0">
+                <a:solidFill>
+                  <a:srgbClr val="9B9690"/>
+                </a:solidFill>
+                <a:latin typeface="Calibri" pitchFamily="34" charset="0"/>
+                <a:ea typeface="Calibri" pitchFamily="34" charset="-122"/>
+                <a:cs typeface="Calibri" pitchFamily="34" charset="-120"/>
+              </a:rPr>
+              <a:t>Biodiversity = the variety of species. More biodiversity = healthier, more resilient ecosystem.</a:t>
+            </a:r>
+            <a:endParaRPr lang="en-US" sz="1400" dirty="0"/>
+          </a:p>
+        </p:txBody>
+      </p:sp>
+      <p:sp>
+        <p:nvSpPr>
+          <p:cNvPr id="7" name="Shape 5"/>
+          <p:cNvSpPr/>
+          <p:nvPr/>
+        </p:nvSpPr>
+        <p:spPr>
+          <a:xfrm>
+            <a:off x="548640" y="3200400"/>
+            <a:ext cx="7315200" cy="1645920"/>
+          </a:xfrm>
+          <a:prstGeom prst="rect">
+            <a:avLst/>
+          </a:prstGeom>
+          <a:solidFill>
+            <a:srgbClr val="243660"/>
+          </a:solidFill>
+          <a:ln/>
+        </p:spPr>
+      </p:sp>
+      <p:sp>
+        <p:nvSpPr>
+          <p:cNvPr id="8" name="Text 6"/>
+          <p:cNvSpPr/>
+          <p:nvPr/>
+        </p:nvSpPr>
+        <p:spPr>
+          <a:xfrm>
+            <a:off x="731520" y="3246120"/>
+            <a:ext cx="3657600" cy="320040"/>
+          </a:xfrm>
+          <a:prstGeom prst="rect">
+            <a:avLst/>
+          </a:prstGeom>
+          <a:noFill/>
+          <a:ln/>
+        </p:spPr>
+        <p:txBody>
+          <a:bodyPr wrap="square" rtlCol="0" anchor="ctr"/>
+          <a:lstStyle/>
+          <a:p>
+            <a:pPr indent="0" marL="0">
+              <a:buNone/>
+            </a:pPr>
+            <a:r>
+              <a:rPr lang="en-US" sz="1100" b="1" spc="200" kern="0" dirty="0">
+                <a:solidFill>
+                  <a:srgbClr val="2A9D8F"/>
+                </a:solidFill>
+                <a:latin typeface="Calibri" pitchFamily="34" charset="0"/>
+                <a:ea typeface="Calibri" pitchFamily="34" charset="-122"/>
+                <a:cs typeface="Calibri" pitchFamily="34" charset="-120"/>
+              </a:rPr>
+              <a:t>Think — Pair — Share</a:t>
+            </a:r>
+            <a:endParaRPr lang="en-US" sz="1100" dirty="0"/>
+          </a:p>
+        </p:txBody>
+      </p:sp>
+      <p:sp>
+        <p:nvSpPr>
+          <p:cNvPr id="9" name="Text 7"/>
+          <p:cNvSpPr/>
+          <p:nvPr/>
+        </p:nvSpPr>
+        <p:spPr>
+          <a:xfrm>
+            <a:off x="731520" y="3566160"/>
+            <a:ext cx="6949440" cy="1188720"/>
+          </a:xfrm>
+          <a:prstGeom prst="rect">
+            <a:avLst/>
+          </a:prstGeom>
+          <a:noFill/>
+          <a:ln/>
+        </p:spPr>
+        <p:txBody>
+          <a:bodyPr wrap="square" rtlCol="0" anchor="ctr"/>
+          <a:lstStyle/>
+          <a:p>
+            <a:pPr marL="342900" indent="-342900">
+              <a:spcAft>
+                <a:spcPts val="600"/>
+              </a:spcAft>
+              <a:buSzPct val="100000"/>
+              <a:buChar char="•"/>
+            </a:pPr>
+            <a:r>
+              <a:rPr lang="en-US" sz="1400" dirty="0">
+                <a:solidFill>
+                  <a:srgbClr val="E5E2DC"/>
+                </a:solidFill>
+                <a:latin typeface="Calibri" pitchFamily="34" charset="0"/>
+                <a:ea typeface="Calibri" pitchFamily="34" charset="-122"/>
+                <a:cs typeface="Calibri" pitchFamily="34" charset="-120"/>
+              </a:rPr>
+              <a:t>Why does removing humans increase biodiversity?</a:t>
+            </a:r>
+            <a:endParaRPr lang="en-US" sz="1400" dirty="0"/>
+          </a:p>
+          <a:p>
+            <a:pPr marL="342900" indent="-342900">
+              <a:spcAft>
+                <a:spcPts val="600"/>
+              </a:spcAft>
+              <a:buSzPct val="100000"/>
+              <a:buChar char="•"/>
+            </a:pPr>
+            <a:r>
+              <a:rPr lang="en-US" sz="1400" dirty="0">
+                <a:solidFill>
+                  <a:srgbClr val="E5E2DC"/>
+                </a:solidFill>
+                <a:latin typeface="Calibri" pitchFamily="34" charset="0"/>
+                <a:ea typeface="Calibri" pitchFamily="34" charset="-122"/>
+                <a:cs typeface="Calibri" pitchFamily="34" charset="-120"/>
+              </a:rPr>
+              <a:t>Is high biodiversity always better? Can you think of exceptions?</a:t>
+            </a:r>
+            <a:endParaRPr lang="en-US" sz="1400" dirty="0"/>
+          </a:p>
+          <a:p>
+            <a:pPr marL="342900" indent="-342900">
+              <a:spcAft>
+                <a:spcPts val="600"/>
+              </a:spcAft>
+              <a:buSzPct val="100000"/>
+              <a:buChar char="•"/>
+            </a:pPr>
+            <a:r>
+              <a:rPr lang="en-US" sz="1400" dirty="0">
+                <a:solidFill>
+                  <a:srgbClr val="E5E2DC"/>
+                </a:solidFill>
+                <a:latin typeface="Calibri" pitchFamily="34" charset="0"/>
+                <a:ea typeface="Calibri" pitchFamily="34" charset="-122"/>
+                <a:cs typeface="Calibri" pitchFamily="34" charset="-120"/>
+              </a:rPr>
+              <a:t>How would you MEASURE biodiversity in a habitat?</a:t>
+            </a:r>
+            <a:endParaRPr lang="en-US" sz="1400" dirty="0"/>
           </a:p>
         </p:txBody>
       </p:sp>
@@ -1655,7 +2164,27 @@
         <p:spPr>
           <a:xfrm>
             <a:off x="0" y="0"/>
-            <a:ext cx="9144000" cy="54864"/>
+            <a:ext cx="9144000" cy="822960"/>
+          </a:xfrm>
+          <a:prstGeom prst="rect">
+            <a:avLst/>
+          </a:prstGeom>
+          <a:solidFill>
+            <a:srgbClr val="FFFFFF"/>
+          </a:solidFill>
+          <a:ln/>
+        </p:spPr>
+      </p:sp>
+      <p:sp>
+        <p:nvSpPr>
+          <p:cNvPr id="3" name="Shape 1"/>
+          <p:cNvSpPr/>
+          <p:nvPr/>
+        </p:nvSpPr>
+        <p:spPr>
+          <a:xfrm>
+            <a:off x="0" y="795528"/>
+            <a:ext cx="9144000" cy="27432"/>
           </a:xfrm>
           <a:prstGeom prst="rect">
             <a:avLst/>
@@ -1668,14 +2197,14 @@
       </p:sp>
       <p:sp>
         <p:nvSpPr>
-          <p:cNvPr id="3" name="Text 1"/>
-          <p:cNvSpPr/>
-          <p:nvPr/>
-        </p:nvSpPr>
-        <p:spPr>
-          <a:xfrm>
-            <a:off x="7772400" y="4709160"/>
-            <a:ext cx="1097280" cy="320040"/>
+          <p:cNvPr id="4" name="Text 2"/>
+          <p:cNvSpPr/>
+          <p:nvPr/>
+        </p:nvSpPr>
+        <p:spPr>
+          <a:xfrm>
+            <a:off x="640080" y="91440"/>
+            <a:ext cx="7863840" cy="640080"/>
           </a:xfrm>
           <a:prstGeom prst="rect">
             <a:avLst/>
@@ -1684,53 +2213,14 @@
           <a:ln/>
         </p:spPr>
         <p:txBody>
-          <a:bodyPr wrap="square" rtlCol="0" anchor="ctr"/>
-          <a:lstStyle/>
-          <a:p>
-            <a:pPr algn="r" indent="0" marL="0">
-              <a:buNone/>
-            </a:pPr>
-            <a:r>
-              <a:rPr lang="en-US" sz="900" dirty="0">
-                <a:solidFill>
-                  <a:srgbClr val="6B6660"/>
-                </a:solidFill>
-                <a:latin typeface="Calibri" pitchFamily="34" charset="0"/>
-                <a:ea typeface="Calibri" pitchFamily="34" charset="-122"/>
-                <a:cs typeface="Calibri" pitchFamily="34" charset="-120"/>
-              </a:rPr>
-              <a:t>3 / 5</a:t>
-            </a:r>
-            <a:endParaRPr lang="en-US" sz="900" dirty="0"/>
-          </a:p>
-        </p:txBody>
-      </p:sp>
-      <p:sp>
-        <p:nvSpPr>
-          <p:cNvPr id="4" name="Text 2"/>
-          <p:cNvSpPr/>
-          <p:nvPr/>
-        </p:nvSpPr>
-        <p:spPr>
-          <a:xfrm>
-            <a:off x="457200" y="274320"/>
-            <a:ext cx="8229600" cy="640080"/>
-          </a:xfrm>
-          <a:prstGeom prst="rect">
-            <a:avLst/>
-          </a:prstGeom>
-          <a:noFill/>
-          <a:ln/>
-        </p:spPr>
-        <p:txBody>
-          <a:bodyPr wrap="square" rtlCol="0" anchor="ctr"/>
+          <a:bodyPr wrap="square" lIns="0" tIns="0" rIns="0" bIns="0" rtlCol="0" anchor="ctr"/>
           <a:lstStyle/>
           <a:p>
             <a:pPr indent="0" marL="0">
               <a:buNone/>
             </a:pPr>
             <a:r>
-              <a:rPr lang="en-US" sz="2600" b="1" dirty="0">
+              <a:rPr lang="en-US" sz="2200" b="1" dirty="0">
                 <a:solidFill>
                   <a:srgbClr val="1B2A4A"/>
                 </a:solidFill>
@@ -1738,9 +2228,9 @@
                 <a:ea typeface="Georgia" pitchFamily="34" charset="-122"/>
                 <a:cs typeface="Georgia" pitchFamily="34" charset="-120"/>
               </a:rPr>
-              <a:t>Why Biodiversity Matters</a:t>
-            </a:r>
-            <a:endParaRPr lang="en-US" sz="2600" dirty="0"/>
+              <a:t>What Is Biodiversity?</a:t>
+            </a:r>
+            <a:endParaRPr lang="en-US" sz="2200" dirty="0"/>
           </a:p>
         </p:txBody>
       </p:sp>
@@ -1752,8 +2242,8 @@
         </p:nvSpPr>
         <p:spPr>
           <a:xfrm>
-            <a:off x="457200" y="1188720"/>
-            <a:ext cx="3840480" cy="3474720"/>
+            <a:off x="640080" y="1005840"/>
+            <a:ext cx="7863840" cy="2926080"/>
           </a:xfrm>
           <a:prstGeom prst="rect">
             <a:avLst/>
@@ -1762,18 +2252,18 @@
           <a:ln/>
         </p:spPr>
         <p:txBody>
-          <a:bodyPr wrap="square" rtlCol="0" anchor="t"/>
+          <a:bodyPr wrap="square" rtlCol="0" anchor="ctr"/>
           <a:lstStyle/>
           <a:p>
             <a:pPr marL="342900" indent="-342900">
               <a:spcAft>
-                <a:spcPts val="600"/>
+                <a:spcPts val="800"/>
               </a:spcAft>
               <a:buSzPct val="100000"/>
               <a:buChar char="•"/>
             </a:pPr>
             <a:r>
-              <a:rPr lang="en-US" sz="1400" dirty="0">
+              <a:rPr lang="en-US" sz="1600" dirty="0">
                 <a:solidFill>
                   <a:srgbClr val="3D3A36"/>
                 </a:solidFill>
@@ -1781,20 +2271,20 @@
                 <a:ea typeface="Calibri" pitchFamily="34" charset="-122"/>
                 <a:cs typeface="Calibri" pitchFamily="34" charset="-120"/>
               </a:rPr>
-              <a:t>Each species has a role in the ecosystem (food, pollination, decomposition)</a:t>
-            </a:r>
-            <a:endParaRPr lang="en-US" sz="1400" dirty="0"/>
+              <a:t>Biodiversity = the variety of different species in an ecosystem.</a:t>
+            </a:r>
+            <a:endParaRPr lang="en-US" sz="1600" dirty="0"/>
           </a:p>
           <a:p>
             <a:pPr marL="342900" indent="-342900">
               <a:spcAft>
-                <a:spcPts val="600"/>
+                <a:spcPts val="800"/>
               </a:spcAft>
               <a:buSzPct val="100000"/>
               <a:buChar char="•"/>
             </a:pPr>
             <a:r>
-              <a:rPr lang="en-US" sz="1400" dirty="0">
+              <a:rPr lang="en-US" sz="1600" dirty="0">
                 <a:solidFill>
                   <a:srgbClr val="3D3A36"/>
                 </a:solidFill>
@@ -1802,20 +2292,20 @@
                 <a:ea typeface="Calibri" pitchFamily="34" charset="-122"/>
                 <a:cs typeface="Calibri" pitchFamily="34" charset="-120"/>
               </a:rPr>
-              <a:t>Diverse ecosystems are more resilient to change</a:t>
-            </a:r>
-            <a:endParaRPr lang="en-US" sz="1400" dirty="0"/>
+              <a:t>Three levels: species diversity, genetic diversity, ecosystem diversity.</a:t>
+            </a:r>
+            <a:endParaRPr lang="en-US" sz="1600" dirty="0"/>
           </a:p>
           <a:p>
             <a:pPr marL="342900" indent="-342900">
               <a:spcAft>
-                <a:spcPts val="600"/>
+                <a:spcPts val="800"/>
               </a:spcAft>
               <a:buSzPct val="100000"/>
               <a:buChar char="•"/>
             </a:pPr>
             <a:r>
-              <a:rPr lang="en-US" sz="1400" dirty="0">
+              <a:rPr lang="en-US" sz="1600" dirty="0">
                 <a:solidFill>
                   <a:srgbClr val="3D3A36"/>
                 </a:solidFill>
@@ -1823,20 +2313,20 @@
                 <a:ea typeface="Calibri" pitchFamily="34" charset="-122"/>
                 <a:cs typeface="Calibri" pitchFamily="34" charset="-120"/>
               </a:rPr>
-              <a:t>Many medicines come from plants and animals</a:t>
-            </a:r>
-            <a:endParaRPr lang="en-US" sz="1400" dirty="0"/>
+              <a:t>Higher biodiversity = more stable, resilient ecosystem.</a:t>
+            </a:r>
+            <a:endParaRPr lang="en-US" sz="1600" dirty="0"/>
           </a:p>
           <a:p>
             <a:pPr marL="342900" indent="-342900">
               <a:spcAft>
-                <a:spcPts val="600"/>
+                <a:spcPts val="800"/>
               </a:spcAft>
               <a:buSzPct val="100000"/>
               <a:buChar char="•"/>
             </a:pPr>
             <a:r>
-              <a:rPr lang="en-US" sz="1400" dirty="0">
+              <a:rPr lang="en-US" sz="1600" dirty="0">
                 <a:solidFill>
                   <a:srgbClr val="3D3A36"/>
                 </a:solidFill>
@@ -1844,20 +2334,20 @@
                 <a:ea typeface="Calibri" pitchFamily="34" charset="-122"/>
                 <a:cs typeface="Calibri" pitchFamily="34" charset="-120"/>
               </a:rPr>
-              <a:t>Food security depends on crop diversity</a:t>
-            </a:r>
-            <a:endParaRPr lang="en-US" sz="1400" dirty="0"/>
+              <a:t>If one species is lost, others can fill the gap.</a:t>
+            </a:r>
+            <a:endParaRPr lang="en-US" sz="1600" dirty="0"/>
           </a:p>
           <a:p>
             <a:pPr marL="342900" indent="-342900">
               <a:spcAft>
-                <a:spcPts val="600"/>
+                <a:spcPts val="800"/>
               </a:spcAft>
               <a:buSzPct val="100000"/>
               <a:buChar char="•"/>
             </a:pPr>
             <a:r>
-              <a:rPr lang="en-US" sz="1400" dirty="0">
+              <a:rPr lang="en-US" sz="1600" dirty="0">
                 <a:solidFill>
                   <a:srgbClr val="3D3A36"/>
                 </a:solidFill>
@@ -1865,9 +2355,9 @@
                 <a:ea typeface="Calibri" pitchFamily="34" charset="-122"/>
                 <a:cs typeface="Calibri" pitchFamily="34" charset="-120"/>
               </a:rPr>
-              <a:t>Aesthetic, cultural, and recreational value</a:t>
-            </a:r>
-            <a:endParaRPr lang="en-US" sz="1400" dirty="0"/>
+              <a:t>Low biodiversity = fragile. One disease could wipe everything out.</a:t>
+            </a:r>
+            <a:endParaRPr lang="en-US" sz="1600" dirty="0"/>
           </a:p>
         </p:txBody>
       </p:sp>
@@ -1879,25 +2369,20 @@
         </p:nvSpPr>
         <p:spPr>
           <a:xfrm>
-            <a:off x="4846320" y="1188720"/>
-            <a:ext cx="3840480" cy="3474720"/>
-          </a:xfrm>
-          <a:prstGeom prst="rect">
-            <a:avLst/>
-          </a:prstGeom>
-          <a:solidFill>
-            <a:srgbClr val="FFFFFF"/>
-          </a:solidFill>
-          <a:ln w="12700">
-            <a:solidFill>
-              <a:srgbClr val="E5E2DC"/>
-            </a:solidFill>
-            <a:prstDash val="solid"/>
-          </a:ln>
+            <a:off x="640080" y="4114800"/>
+            <a:ext cx="7863840" cy="731520"/>
+          </a:xfrm>
+          <a:prstGeom prst="rect">
+            <a:avLst/>
+          </a:prstGeom>
+          <a:solidFill>
+            <a:srgbClr val="E8F5F3"/>
+          </a:solidFill>
+          <a:ln/>
           <a:effectLst>
-            <a:outerShdw sx="100000" sy="100000" kx="0" ky="0" algn="bl" rotWithShape="0" blurRad="50800" dist="25400" dir="8100000">
+            <a:outerShdw sx="100000" sy="100000" kx="0" ky="0" algn="bl" rotWithShape="0" blurRad="76200" dist="25400" dir="8100000">
               <a:srgbClr val="000000">
-                <a:alpha val="10000"/>
+                <a:alpha val="12000"/>
               </a:srgbClr>
             </a:outerShdw>
           </a:effectLst>
@@ -1911,8 +2396,8 @@
         </p:nvSpPr>
         <p:spPr>
           <a:xfrm>
-            <a:off x="4846320" y="1188720"/>
-            <a:ext cx="3840480" cy="54864"/>
+            <a:off x="640080" y="4114800"/>
+            <a:ext cx="64008" cy="731520"/>
           </a:xfrm>
           <a:prstGeom prst="rect">
             <a:avLst/>
@@ -1931,8 +2416,8 @@
         </p:nvSpPr>
         <p:spPr>
           <a:xfrm>
-            <a:off x="5120640" y="1371600"/>
-            <a:ext cx="3291840" cy="3108960"/>
+            <a:off x="914400" y="4160520"/>
+            <a:ext cx="7406640" cy="640080"/>
           </a:xfrm>
           <a:prstGeom prst="rect">
             <a:avLst/>
@@ -1941,46 +2426,14 @@
           <a:ln/>
         </p:spPr>
         <p:txBody>
-          <a:bodyPr wrap="square" rtlCol="0" anchor="t"/>
+          <a:bodyPr wrap="square" rtlCol="0" anchor="ctr"/>
           <a:lstStyle/>
           <a:p>
             <a:pPr indent="0" marL="0">
-              <a:spcAft>
-                <a:spcPts val="400"/>
-              </a:spcAft>
               <a:buNone/>
             </a:pPr>
             <a:r>
-              <a:rPr lang="en-US" sz="1600" b="1" dirty="0">
-                <a:solidFill>
-                  <a:srgbClr val="1B2A4A"/>
-                </a:solidFill>
-                <a:latin typeface="Calibri" pitchFamily="34" charset="0"/>
-                <a:ea typeface="Calibri" pitchFamily="34" charset="-122"/>
-                <a:cs typeface="Calibri" pitchFamily="34" charset="-120"/>
-              </a:rPr>
-              <a:t>Threats to Biodiversity</a:t>
-            </a:r>
-            <a:endParaRPr lang="en-US" sz="1600" dirty="0"/>
-          </a:p>
-          <a:p>
-            <a:pPr indent="0" marL="0">
-              <a:spcAft>
-                <a:spcPts val="400"/>
-              </a:spcAft>
-              <a:buNone/>
-            </a:pPr>
-            <a:endParaRPr lang="en-US" sz="1600" dirty="0"/>
-          </a:p>
-          <a:p>
-            <a:pPr indent="0" marL="0">
-              <a:spcAft>
-                <a:spcPts val="400"/>
-              </a:spcAft>
-              <a:buNone/>
-            </a:pPr>
-            <a:r>
-              <a:rPr lang="en-US" sz="1300" dirty="0">
+              <a:rPr lang="en-US" sz="1300" i="1" dirty="0">
                 <a:solidFill>
                   <a:srgbClr val="3D3A36"/>
                 </a:solidFill>
@@ -1988,89 +2441,9 @@
                 <a:ea typeface="Calibri" pitchFamily="34" charset="-122"/>
                 <a:cs typeface="Calibri" pitchFamily="34" charset="-120"/>
               </a:rPr>
-              <a:t>Habitat destruction (deforestation, urbanisation)</a:t>
-            </a:r>
-            <a:endParaRPr lang="en-US" sz="1600" dirty="0"/>
-          </a:p>
-          <a:p>
-            <a:pPr indent="0" marL="0">
-              <a:spcAft>
-                <a:spcPts val="400"/>
-              </a:spcAft>
-              <a:buNone/>
-            </a:pPr>
-            <a:r>
-              <a:rPr lang="en-US" sz="1300" dirty="0">
-                <a:solidFill>
-                  <a:srgbClr val="3D3A36"/>
-                </a:solidFill>
-                <a:latin typeface="Calibri" pitchFamily="34" charset="0"/>
-                <a:ea typeface="Calibri" pitchFamily="34" charset="-122"/>
-                <a:cs typeface="Calibri" pitchFamily="34" charset="-120"/>
-              </a:rPr>
-              <a:t>Climate change (shifting habitats, coral bleaching)</a:t>
-            </a:r>
-            <a:endParaRPr lang="en-US" sz="1600" dirty="0"/>
-          </a:p>
-          <a:p>
-            <a:pPr indent="0" marL="0">
-              <a:spcAft>
-                <a:spcPts val="400"/>
-              </a:spcAft>
-              <a:buNone/>
-            </a:pPr>
-            <a:r>
-              <a:rPr lang="en-US" sz="1300" dirty="0">
-                <a:solidFill>
-                  <a:srgbClr val="3D3A36"/>
-                </a:solidFill>
-                <a:latin typeface="Calibri" pitchFamily="34" charset="0"/>
-                <a:ea typeface="Calibri" pitchFamily="34" charset="-122"/>
-                <a:cs typeface="Calibri" pitchFamily="34" charset="-120"/>
-              </a:rPr>
-              <a:t>Overexploitation (overfishing, poaching)</a:t>
-            </a:r>
-            <a:endParaRPr lang="en-US" sz="1600" dirty="0"/>
-          </a:p>
-          <a:p>
-            <a:pPr indent="0" marL="0">
-              <a:spcAft>
-                <a:spcPts val="400"/>
-              </a:spcAft>
-              <a:buNone/>
-            </a:pPr>
-            <a:r>
-              <a:rPr lang="en-US" sz="1300" dirty="0">
-                <a:solidFill>
-                  <a:srgbClr val="3D3A36"/>
-                </a:solidFill>
-                <a:latin typeface="Calibri" pitchFamily="34" charset="0"/>
-                <a:ea typeface="Calibri" pitchFamily="34" charset="-122"/>
-                <a:cs typeface="Calibri" pitchFamily="34" charset="-120"/>
-              </a:rPr>
-              <a:t>Pollution (plastics, pesticides, oil spills)</a:t>
-            </a:r>
-            <a:endParaRPr lang="en-US" sz="1600" dirty="0"/>
-          </a:p>
-          <a:p>
-            <a:pPr indent="0" marL="0">
-              <a:spcAft>
-                <a:spcPts val="400"/>
-              </a:spcAft>
-              <a:buNone/>
-            </a:pPr>
-            <a:r>
-              <a:rPr lang="en-US" sz="1300" dirty="0">
-                <a:solidFill>
-                  <a:srgbClr val="3D3A36"/>
-                </a:solidFill>
-                <a:latin typeface="Calibri" pitchFamily="34" charset="0"/>
-                <a:ea typeface="Calibri" pitchFamily="34" charset="-122"/>
-                <a:cs typeface="Calibri" pitchFamily="34" charset="-120"/>
-              </a:rPr>
-              <a:t>Invasive species (outcompete native species)</a:t>
-            </a:r>
-            <a:endParaRPr lang="en-US" sz="1600" dirty="0"/>
+              <a:t>A wheat field has very LOW biodiversity. A rainforest has very HIGH biodiversity.</a:t>
+            </a:r>
+            <a:endParaRPr lang="en-US" sz="1300" dirty="0"/>
           </a:p>
         </p:txBody>
       </p:sp>
@@ -2115,7 +2488,27 @@
         <p:spPr>
           <a:xfrm>
             <a:off x="0" y="0"/>
-            <a:ext cx="9144000" cy="54864"/>
+            <a:ext cx="9144000" cy="822960"/>
+          </a:xfrm>
+          <a:prstGeom prst="rect">
+            <a:avLst/>
+          </a:prstGeom>
+          <a:solidFill>
+            <a:srgbClr val="FFFFFF"/>
+          </a:solidFill>
+          <a:ln/>
+        </p:spPr>
+      </p:sp>
+      <p:sp>
+        <p:nvSpPr>
+          <p:cNvPr id="3" name="Shape 1"/>
+          <p:cNvSpPr/>
+          <p:nvPr/>
+        </p:nvSpPr>
+        <p:spPr>
+          <a:xfrm>
+            <a:off x="0" y="795528"/>
+            <a:ext cx="9144000" cy="27432"/>
           </a:xfrm>
           <a:prstGeom prst="rect">
             <a:avLst/>
@@ -2128,14 +2521,14 @@
       </p:sp>
       <p:sp>
         <p:nvSpPr>
-          <p:cNvPr id="3" name="Text 1"/>
-          <p:cNvSpPr/>
-          <p:nvPr/>
-        </p:nvSpPr>
-        <p:spPr>
-          <a:xfrm>
-            <a:off x="7772400" y="4709160"/>
-            <a:ext cx="1097280" cy="320040"/>
+          <p:cNvPr id="4" name="Text 2"/>
+          <p:cNvSpPr/>
+          <p:nvPr/>
+        </p:nvSpPr>
+        <p:spPr>
+          <a:xfrm>
+            <a:off x="640080" y="91440"/>
+            <a:ext cx="7863840" cy="640080"/>
           </a:xfrm>
           <a:prstGeom prst="rect">
             <a:avLst/>
@@ -2144,53 +2537,14 @@
           <a:ln/>
         </p:spPr>
         <p:txBody>
-          <a:bodyPr wrap="square" rtlCol="0" anchor="ctr"/>
-          <a:lstStyle/>
-          <a:p>
-            <a:pPr algn="r" indent="0" marL="0">
-              <a:buNone/>
-            </a:pPr>
-            <a:r>
-              <a:rPr lang="en-US" sz="900" dirty="0">
-                <a:solidFill>
-                  <a:srgbClr val="6B6660"/>
-                </a:solidFill>
-                <a:latin typeface="Calibri" pitchFamily="34" charset="0"/>
-                <a:ea typeface="Calibri" pitchFamily="34" charset="-122"/>
-                <a:cs typeface="Calibri" pitchFamily="34" charset="-120"/>
-              </a:rPr>
-              <a:t>4 / 5</a:t>
-            </a:r>
-            <a:endParaRPr lang="en-US" sz="900" dirty="0"/>
-          </a:p>
-        </p:txBody>
-      </p:sp>
-      <p:sp>
-        <p:nvSpPr>
-          <p:cNvPr id="4" name="Text 2"/>
-          <p:cNvSpPr/>
-          <p:nvPr/>
-        </p:nvSpPr>
-        <p:spPr>
-          <a:xfrm>
-            <a:off x="457200" y="274320"/>
-            <a:ext cx="8229600" cy="640080"/>
-          </a:xfrm>
-          <a:prstGeom prst="rect">
-            <a:avLst/>
-          </a:prstGeom>
-          <a:noFill/>
-          <a:ln/>
-        </p:spPr>
-        <p:txBody>
-          <a:bodyPr wrap="square" rtlCol="0" anchor="ctr"/>
+          <a:bodyPr wrap="square" lIns="0" tIns="0" rIns="0" bIns="0" rtlCol="0" anchor="ctr"/>
           <a:lstStyle/>
           <a:p>
             <a:pPr indent="0" marL="0">
               <a:buNone/>
             </a:pPr>
             <a:r>
-              <a:rPr lang="en-US" sz="2600" b="1" dirty="0">
+              <a:rPr lang="en-US" sz="2200" b="1" dirty="0">
                 <a:solidFill>
                   <a:srgbClr val="1B2A4A"/>
                 </a:solidFill>
@@ -2198,9 +2552,9 @@
                 <a:ea typeface="Georgia" pitchFamily="34" charset="-122"/>
                 <a:cs typeface="Georgia" pitchFamily="34" charset="-120"/>
               </a:rPr>
-              <a:t>Measuring &amp; Protecting Biodiversity</a:t>
-            </a:r>
-            <a:endParaRPr lang="en-US" sz="2600" dirty="0"/>
+              <a:t>Why Does Biodiversity Matter?</a:t>
+            </a:r>
+            <a:endParaRPr lang="en-US" sz="2200" dirty="0"/>
           </a:p>
         </p:txBody>
       </p:sp>
@@ -2212,8 +2566,8 @@
         </p:nvSpPr>
         <p:spPr>
           <a:xfrm>
-            <a:off x="457200" y="1097280"/>
-            <a:ext cx="8229600" cy="3657600"/>
+            <a:off x="640080" y="1005840"/>
+            <a:ext cx="7863840" cy="2926080"/>
           </a:xfrm>
           <a:prstGeom prst="rect">
             <a:avLst/>
@@ -2222,7 +2576,7 @@
           <a:ln/>
         </p:spPr>
         <p:txBody>
-          <a:bodyPr wrap="square" rtlCol="0" anchor="t"/>
+          <a:bodyPr wrap="square" rtlCol="0" anchor="ctr"/>
           <a:lstStyle/>
           <a:p>
             <a:pPr marL="342900" indent="-342900">
@@ -2233,7 +2587,7 @@
               <a:buChar char="•"/>
             </a:pPr>
             <a:r>
-              <a:rPr lang="en-US" sz="1400" dirty="0">
+              <a:rPr lang="en-US" sz="1600" dirty="0">
                 <a:solidFill>
                   <a:srgbClr val="3D3A36"/>
                 </a:solidFill>
@@ -2241,9 +2595,9 @@
                 <a:ea typeface="Calibri" pitchFamily="34" charset="-122"/>
                 <a:cs typeface="Calibri" pitchFamily="34" charset="-120"/>
               </a:rPr>
-              <a:t>Scientists estimate biodiversity using quadrats, transects, and species counts</a:t>
-            </a:r>
-            <a:endParaRPr lang="en-US" sz="1400" dirty="0"/>
+              <a:t>Food security: wild relatives of crops provide genetic diversity for breeding.</a:t>
+            </a:r>
+            <a:endParaRPr lang="en-US" sz="1600" dirty="0"/>
           </a:p>
           <a:p>
             <a:pPr marL="342900" indent="-342900">
@@ -2254,7 +2608,7 @@
               <a:buChar char="•"/>
             </a:pPr>
             <a:r>
-              <a:rPr lang="en-US" sz="1400" dirty="0">
+              <a:rPr lang="en-US" sz="1600" dirty="0">
                 <a:solidFill>
                   <a:srgbClr val="3D3A36"/>
                 </a:solidFill>
@@ -2262,9 +2616,9 @@
                 <a:ea typeface="Calibri" pitchFamily="34" charset="-122"/>
                 <a:cs typeface="Calibri" pitchFamily="34" charset="-120"/>
               </a:rPr>
-              <a:t>A high species count AND even distribution = high biodiversity</a:t>
-            </a:r>
-            <a:endParaRPr lang="en-US" sz="1400" dirty="0"/>
+              <a:t>Medicine: 25% of modern drugs come from rainforest plants.</a:t>
+            </a:r>
+            <a:endParaRPr lang="en-US" sz="1600" dirty="0"/>
           </a:p>
           <a:p>
             <a:pPr marL="342900" indent="-342900">
@@ -2275,7 +2629,7 @@
               <a:buChar char="•"/>
             </a:pPr>
             <a:r>
-              <a:rPr lang="en-US" sz="1400" dirty="0">
+              <a:rPr lang="en-US" sz="1600" dirty="0">
                 <a:solidFill>
                   <a:srgbClr val="3D3A36"/>
                 </a:solidFill>
@@ -2283,9 +2637,9 @@
                 <a:ea typeface="Calibri" pitchFamily="34" charset="-122"/>
                 <a:cs typeface="Calibri" pitchFamily="34" charset="-120"/>
               </a:rPr>
-              <a:t>Protected areas: national parks, marine reserves, wildlife corridors</a:t>
-            </a:r>
-            <a:endParaRPr lang="en-US" sz="1400" dirty="0"/>
+              <a:t>Ecosystem services: pollination, water purification, soil fertility.</a:t>
+            </a:r>
+            <a:endParaRPr lang="en-US" sz="1600" dirty="0"/>
           </a:p>
           <a:p>
             <a:pPr marL="342900" indent="-342900">
@@ -2296,7 +2650,7 @@
               <a:buChar char="•"/>
             </a:pPr>
             <a:r>
-              <a:rPr lang="en-US" sz="1400" dirty="0">
+              <a:rPr lang="en-US" sz="1600" dirty="0">
                 <a:solidFill>
                   <a:srgbClr val="3D3A36"/>
                 </a:solidFill>
@@ -2304,9 +2658,9 @@
                 <a:ea typeface="Calibri" pitchFamily="34" charset="-122"/>
                 <a:cs typeface="Calibri" pitchFamily="34" charset="-120"/>
               </a:rPr>
-              <a:t>Seed banks store seeds of endangered plants</a:t>
-            </a:r>
-            <a:endParaRPr lang="en-US" sz="1400" dirty="0"/>
+              <a:t>Cultural value: pandas are a national symbol of China.</a:t>
+            </a:r>
+            <a:endParaRPr lang="en-US" sz="1600" dirty="0"/>
           </a:p>
           <a:p>
             <a:pPr marL="342900" indent="-342900">
@@ -2317,7 +2671,7 @@
               <a:buChar char="•"/>
             </a:pPr>
             <a:r>
-              <a:rPr lang="en-US" sz="1400" dirty="0">
+              <a:rPr lang="en-US" sz="1600" dirty="0">
                 <a:solidFill>
                   <a:srgbClr val="3D3A36"/>
                 </a:solidFill>
@@ -2325,30 +2679,9 @@
                 <a:ea typeface="Calibri" pitchFamily="34" charset="-122"/>
                 <a:cs typeface="Calibri" pitchFamily="34" charset="-120"/>
               </a:rPr>
-              <a:t>Zoos run captive breeding programmes for endangered animals</a:t>
-            </a:r>
-            <a:endParaRPr lang="en-US" sz="1400" dirty="0"/>
-          </a:p>
-          <a:p>
-            <a:pPr marL="342900" indent="-342900">
-              <a:spcAft>
-                <a:spcPts val="800"/>
-              </a:spcAft>
-              <a:buSzPct val="100000"/>
-              <a:buChar char="•"/>
-            </a:pPr>
-            <a:r>
-              <a:rPr lang="en-US" sz="1400" dirty="0">
-                <a:solidFill>
-                  <a:srgbClr val="3D3A36"/>
-                </a:solidFill>
-                <a:latin typeface="Calibri" pitchFamily="34" charset="0"/>
-                <a:ea typeface="Calibri" pitchFamily="34" charset="-122"/>
-                <a:cs typeface="Calibri" pitchFamily="34" charset="-120"/>
-              </a:rPr>
-              <a:t>International agreements: CITES bans trade of endangered species</a:t>
-            </a:r>
-            <a:endParaRPr lang="en-US" sz="1400" dirty="0"/>
+              <a:t>Economic value: ecotourism in Korea's Jeju Island generates billions of won.</a:t>
+            </a:r>
+            <a:endParaRPr lang="en-US" sz="1600" dirty="0"/>
           </a:p>
         </p:txBody>
       </p:sp>
@@ -2366,7 +2699,7 @@
     <p:bg>
       <p:bgPr>
         <a:solidFill>
-          <a:srgbClr val="1B2A4A"/>
+          <a:srgbClr val="FAF8F5"/>
         </a:solidFill>
       </p:bgPr>
     </p:bg>
@@ -2393,27 +2726,47 @@
         <p:spPr>
           <a:xfrm>
             <a:off x="0" y="0"/>
-            <a:ext cx="109728" cy="5143500"/>
-          </a:xfrm>
-          <a:prstGeom prst="rect">
-            <a:avLst/>
-          </a:prstGeom>
-          <a:solidFill>
-            <a:srgbClr val="E9C46A"/>
-          </a:solidFill>
-          <a:ln/>
-        </p:spPr>
-      </p:sp>
-      <p:sp>
-        <p:nvSpPr>
-          <p:cNvPr id="3" name="Text 1"/>
-          <p:cNvSpPr/>
-          <p:nvPr/>
-        </p:nvSpPr>
-        <p:spPr>
-          <a:xfrm>
-            <a:off x="731520" y="457200"/>
-            <a:ext cx="7772400" cy="731520"/>
+            <a:ext cx="9144000" cy="822960"/>
+          </a:xfrm>
+          <a:prstGeom prst="rect">
+            <a:avLst/>
+          </a:prstGeom>
+          <a:solidFill>
+            <a:srgbClr val="FFFFFF"/>
+          </a:solidFill>
+          <a:ln/>
+        </p:spPr>
+      </p:sp>
+      <p:sp>
+        <p:nvSpPr>
+          <p:cNvPr id="3" name="Shape 1"/>
+          <p:cNvSpPr/>
+          <p:nvPr/>
+        </p:nvSpPr>
+        <p:spPr>
+          <a:xfrm>
+            <a:off x="0" y="795528"/>
+            <a:ext cx="9144000" cy="27432"/>
+          </a:xfrm>
+          <a:prstGeom prst="rect">
+            <a:avLst/>
+          </a:prstGeom>
+          <a:solidFill>
+            <a:srgbClr val="2A9D8F"/>
+          </a:solidFill>
+          <a:ln/>
+        </p:spPr>
+      </p:sp>
+      <p:sp>
+        <p:nvSpPr>
+          <p:cNvPr id="4" name="Text 2"/>
+          <p:cNvSpPr/>
+          <p:nvPr/>
+        </p:nvSpPr>
+        <p:spPr>
+          <a:xfrm>
+            <a:off x="640080" y="91440"/>
+            <a:ext cx="7863840" cy="640080"/>
           </a:xfrm>
           <a:prstGeom prst="rect">
             <a:avLst/>
@@ -2422,37 +2775,84 @@
           <a:ln/>
         </p:spPr>
         <p:txBody>
-          <a:bodyPr wrap="square" rtlCol="0" anchor="ctr"/>
+          <a:bodyPr wrap="square" lIns="0" tIns="0" rIns="0" bIns="0" rtlCol="0" anchor="ctr"/>
           <a:lstStyle/>
           <a:p>
             <a:pPr indent="0" marL="0">
               <a:buNone/>
             </a:pPr>
             <a:r>
-              <a:rPr lang="en-US" sz="3200" b="1" dirty="0">
-                <a:solidFill>
-                  <a:srgbClr val="FFFFFF"/>
+              <a:rPr lang="en-US" sz="2200" b="1" dirty="0">
+                <a:solidFill>
+                  <a:srgbClr val="1B2A4A"/>
                 </a:solidFill>
                 <a:latin typeface="Georgia" pitchFamily="34" charset="0"/>
                 <a:ea typeface="Georgia" pitchFamily="34" charset="-122"/>
                 <a:cs typeface="Georgia" pitchFamily="34" charset="-120"/>
               </a:rPr>
-              <a:t>Key Takeaways</a:t>
-            </a:r>
-            <a:endParaRPr lang="en-US" sz="3200" dirty="0"/>
-          </a:p>
-        </p:txBody>
-      </p:sp>
-      <p:sp>
-        <p:nvSpPr>
-          <p:cNvPr id="4" name="Text 2"/>
-          <p:cNvSpPr/>
-          <p:nvPr/>
-        </p:nvSpPr>
-        <p:spPr>
-          <a:xfrm>
-            <a:off x="731520" y="1463040"/>
-            <a:ext cx="7772400" cy="3200400"/>
+              <a:t>Biodiversity Hotspots</a:t>
+            </a:r>
+            <a:endParaRPr lang="en-US" sz="2200" dirty="0"/>
+          </a:p>
+        </p:txBody>
+      </p:sp>
+      <p:sp>
+        <p:nvSpPr>
+          <p:cNvPr id="5" name="Shape 3"/>
+          <p:cNvSpPr/>
+          <p:nvPr/>
+        </p:nvSpPr>
+        <p:spPr>
+          <a:xfrm>
+            <a:off x="457200" y="1005840"/>
+            <a:ext cx="3931920" cy="3657600"/>
+          </a:xfrm>
+          <a:prstGeom prst="rect">
+            <a:avLst/>
+          </a:prstGeom>
+          <a:solidFill>
+            <a:srgbClr val="FFFFFF"/>
+          </a:solidFill>
+          <a:ln/>
+          <a:effectLst>
+            <a:outerShdw sx="100000" sy="100000" kx="0" ky="0" algn="bl" rotWithShape="0" blurRad="76200" dist="25400" dir="8100000">
+              <a:srgbClr val="000000">
+                <a:alpha val="12000"/>
+              </a:srgbClr>
+            </a:outerShdw>
+          </a:effectLst>
+        </p:spPr>
+      </p:sp>
+      <p:sp>
+        <p:nvSpPr>
+          <p:cNvPr id="6" name="Shape 4"/>
+          <p:cNvSpPr/>
+          <p:nvPr/>
+        </p:nvSpPr>
+        <p:spPr>
+          <a:xfrm>
+            <a:off x="457200" y="1005840"/>
+            <a:ext cx="3931920" cy="64008"/>
+          </a:xfrm>
+          <a:prstGeom prst="rect">
+            <a:avLst/>
+          </a:prstGeom>
+          <a:solidFill>
+            <a:srgbClr val="2A9D8F"/>
+          </a:solidFill>
+          <a:ln/>
+        </p:spPr>
+      </p:sp>
+      <p:sp>
+        <p:nvSpPr>
+          <p:cNvPr id="7" name="Text 5"/>
+          <p:cNvSpPr/>
+          <p:nvPr/>
+        </p:nvSpPr>
+        <p:spPr>
+          <a:xfrm>
+            <a:off x="640080" y="1188720"/>
+            <a:ext cx="3566160" cy="457200"/>
           </a:xfrm>
           <a:prstGeom prst="rect">
             <a:avLst/>
@@ -2461,125 +2861,407 @@
           <a:ln/>
         </p:spPr>
         <p:txBody>
-          <a:bodyPr wrap="square" rtlCol="0" anchor="t"/>
+          <a:bodyPr wrap="square" rtlCol="0" anchor="ctr"/>
+          <a:lstStyle/>
+          <a:p>
+            <a:pPr indent="0" marL="0">
+              <a:buNone/>
+            </a:pPr>
+            <a:r>
+              <a:rPr lang="en-US" sz="1600" b="1" dirty="0">
+                <a:solidFill>
+                  <a:srgbClr val="2A9D8F"/>
+                </a:solidFill>
+                <a:latin typeface="Calibri" pitchFamily="34" charset="0"/>
+                <a:ea typeface="Calibri" pitchFamily="34" charset="-122"/>
+                <a:cs typeface="Calibri" pitchFamily="34" charset="-120"/>
+              </a:rPr>
+              <a:t>Asian Hotspots</a:t>
+            </a:r>
+            <a:endParaRPr lang="en-US" sz="1600" dirty="0"/>
+          </a:p>
+        </p:txBody>
+      </p:sp>
+      <p:sp>
+        <p:nvSpPr>
+          <p:cNvPr id="8" name="Text 6"/>
+          <p:cNvSpPr/>
+          <p:nvPr/>
+        </p:nvSpPr>
+        <p:spPr>
+          <a:xfrm>
+            <a:off x="640080" y="1691640"/>
+            <a:ext cx="3566160" cy="2743200"/>
+          </a:xfrm>
+          <a:prstGeom prst="rect">
+            <a:avLst/>
+          </a:prstGeom>
+          <a:noFill/>
+          <a:ln/>
+        </p:spPr>
+        <p:txBody>
+          <a:bodyPr wrap="square" rtlCol="0" anchor="ctr"/>
           <a:lstStyle/>
           <a:p>
             <a:pPr marL="342900" indent="-342900">
               <a:spcAft>
-                <a:spcPts val="1000"/>
+                <a:spcPts val="600"/>
               </a:spcAft>
               <a:buSzPct val="100000"/>
               <a:buChar char="•"/>
             </a:pPr>
             <a:r>
-              <a:rPr lang="en-US" sz="1500" dirty="0">
-                <a:solidFill>
-                  <a:srgbClr val="CADCFC"/>
-                </a:solidFill>
-                <a:latin typeface="Calibri" pitchFamily="34" charset="0"/>
-                <a:ea typeface="Calibri" pitchFamily="34" charset="-122"/>
-                <a:cs typeface="Calibri" pitchFamily="34" charset="-120"/>
-              </a:rPr>
-              <a:t>Biodiversity = variety of species in an ecosystem</a:t>
-            </a:r>
-            <a:endParaRPr lang="en-US" sz="1500" dirty="0"/>
+              <a:rPr lang="en-US" sz="1400" dirty="0">
+                <a:solidFill>
+                  <a:srgbClr val="3D3A36"/>
+                </a:solidFill>
+                <a:latin typeface="Calibri" pitchFamily="34" charset="0"/>
+                <a:ea typeface="Calibri" pitchFamily="34" charset="-122"/>
+                <a:cs typeface="Calibri" pitchFamily="34" charset="-120"/>
+              </a:rPr>
+              <a:t>Mountains of Southwest China: 12,000+ plant species.</a:t>
+            </a:r>
+            <a:endParaRPr lang="en-US" sz="1400" dirty="0"/>
           </a:p>
           <a:p>
             <a:pPr marL="342900" indent="-342900">
               <a:spcAft>
-                <a:spcPts val="1000"/>
+                <a:spcPts val="600"/>
               </a:spcAft>
               <a:buSzPct val="100000"/>
               <a:buChar char="•"/>
             </a:pPr>
             <a:r>
-              <a:rPr lang="en-US" sz="1500" dirty="0">
-                <a:solidFill>
-                  <a:srgbClr val="CADCFC"/>
-                </a:solidFill>
-                <a:latin typeface="Calibri" pitchFamily="34" charset="0"/>
-                <a:ea typeface="Calibri" pitchFamily="34" charset="-122"/>
-                <a:cs typeface="Calibri" pitchFamily="34" charset="-120"/>
-              </a:rPr>
-              <a:t>High biodiversity = healthy, stable; low biodiversity = fragile</a:t>
-            </a:r>
-            <a:endParaRPr lang="en-US" sz="1500" dirty="0"/>
+              <a:rPr lang="en-US" sz="1400" dirty="0">
+                <a:solidFill>
+                  <a:srgbClr val="3D3A36"/>
+                </a:solidFill>
+                <a:latin typeface="Calibri" pitchFamily="34" charset="0"/>
+                <a:ea typeface="Calibri" pitchFamily="34" charset="-122"/>
+                <a:cs typeface="Calibri" pitchFamily="34" charset="-120"/>
+              </a:rPr>
+              <a:t>Korean Peninsula: temperate forests with unique species.</a:t>
+            </a:r>
+            <a:endParaRPr lang="en-US" sz="1400" dirty="0"/>
           </a:p>
           <a:p>
             <a:pPr marL="342900" indent="-342900">
               <a:spcAft>
-                <a:spcPts val="1000"/>
+                <a:spcPts val="600"/>
               </a:spcAft>
               <a:buSzPct val="100000"/>
               <a:buChar char="•"/>
             </a:pPr>
             <a:r>
-              <a:rPr lang="en-US" sz="1500" dirty="0">
-                <a:solidFill>
-                  <a:srgbClr val="CADCFC"/>
-                </a:solidFill>
-                <a:latin typeface="Calibri" pitchFamily="34" charset="0"/>
-                <a:ea typeface="Calibri" pitchFamily="34" charset="-122"/>
-                <a:cs typeface="Calibri" pitchFamily="34" charset="-120"/>
-              </a:rPr>
-              <a:t>Threats: habitat loss, climate change, overexploitation, pollution, invasive species</a:t>
-            </a:r>
-            <a:endParaRPr lang="en-US" sz="1500" dirty="0"/>
+              <a:rPr lang="en-US" sz="1400" dirty="0">
+                <a:solidFill>
+                  <a:srgbClr val="3D3A36"/>
+                </a:solidFill>
+                <a:latin typeface="Calibri" pitchFamily="34" charset="0"/>
+                <a:ea typeface="Calibri" pitchFamily="34" charset="-122"/>
+                <a:cs typeface="Calibri" pitchFamily="34" charset="-120"/>
+              </a:rPr>
+              <a:t>Yangtze River basin: was home to paddlefish, baiji dolphin.</a:t>
+            </a:r>
+            <a:endParaRPr lang="en-US" sz="1400" dirty="0"/>
           </a:p>
           <a:p>
             <a:pPr marL="342900" indent="-342900">
               <a:spcAft>
-                <a:spcPts val="1000"/>
+                <a:spcPts val="600"/>
               </a:spcAft>
               <a:buSzPct val="100000"/>
               <a:buChar char="•"/>
             </a:pPr>
             <a:r>
-              <a:rPr lang="en-US" sz="1500" dirty="0">
-                <a:solidFill>
-                  <a:srgbClr val="CADCFC"/>
-                </a:solidFill>
-                <a:latin typeface="Calibri" pitchFamily="34" charset="0"/>
-                <a:ea typeface="Calibri" pitchFamily="34" charset="-122"/>
-                <a:cs typeface="Calibri" pitchFamily="34" charset="-120"/>
-              </a:rPr>
-              <a:t>Protection: parks, reserves, seed banks, breeding programmes, laws</a:t>
-            </a:r>
-            <a:endParaRPr lang="en-US" sz="1500" dirty="0"/>
-          </a:p>
+              <a:rPr lang="en-US" sz="1400" dirty="0">
+                <a:solidFill>
+                  <a:srgbClr val="3D3A36"/>
+                </a:solidFill>
+                <a:latin typeface="Calibri" pitchFamily="34" charset="0"/>
+                <a:ea typeface="Calibri" pitchFamily="34" charset="-122"/>
+                <a:cs typeface="Calibri" pitchFamily="34" charset="-120"/>
+              </a:rPr>
+              <a:t>Jeju Island volcanic ecosystem.</a:t>
+            </a:r>
+            <a:endParaRPr lang="en-US" sz="1400" dirty="0"/>
+          </a:p>
+        </p:txBody>
+      </p:sp>
+      <p:sp>
+        <p:nvSpPr>
+          <p:cNvPr id="9" name="Shape 7"/>
+          <p:cNvSpPr/>
+          <p:nvPr/>
+        </p:nvSpPr>
+        <p:spPr>
+          <a:xfrm>
+            <a:off x="4754880" y="1005840"/>
+            <a:ext cx="3931920" cy="3657600"/>
+          </a:xfrm>
+          <a:prstGeom prst="rect">
+            <a:avLst/>
+          </a:prstGeom>
+          <a:solidFill>
+            <a:srgbClr val="FFFFFF"/>
+          </a:solidFill>
+          <a:ln/>
+          <a:effectLst>
+            <a:outerShdw sx="100000" sy="100000" kx="0" ky="0" algn="bl" rotWithShape="0" blurRad="76200" dist="25400" dir="8100000">
+              <a:srgbClr val="000000">
+                <a:alpha val="12000"/>
+              </a:srgbClr>
+            </a:outerShdw>
+          </a:effectLst>
+        </p:spPr>
+      </p:sp>
+      <p:sp>
+        <p:nvSpPr>
+          <p:cNvPr id="10" name="Shape 8"/>
+          <p:cNvSpPr/>
+          <p:nvPr/>
+        </p:nvSpPr>
+        <p:spPr>
+          <a:xfrm>
+            <a:off x="4754880" y="1005840"/>
+            <a:ext cx="3931920" cy="64008"/>
+          </a:xfrm>
+          <a:prstGeom prst="rect">
+            <a:avLst/>
+          </a:prstGeom>
+          <a:solidFill>
+            <a:srgbClr val="E9C46A"/>
+          </a:solidFill>
+          <a:ln/>
+        </p:spPr>
+      </p:sp>
+      <p:sp>
+        <p:nvSpPr>
+          <p:cNvPr id="11" name="Text 9"/>
+          <p:cNvSpPr/>
+          <p:nvPr/>
+        </p:nvSpPr>
+        <p:spPr>
+          <a:xfrm>
+            <a:off x="4937760" y="1188720"/>
+            <a:ext cx="3566160" cy="457200"/>
+          </a:xfrm>
+          <a:prstGeom prst="rect">
+            <a:avLst/>
+          </a:prstGeom>
+          <a:noFill/>
+          <a:ln/>
+        </p:spPr>
+        <p:txBody>
+          <a:bodyPr wrap="square" rtlCol="0" anchor="ctr"/>
+          <a:lstStyle/>
+          <a:p>
+            <a:pPr indent="0" marL="0">
+              <a:buNone/>
+            </a:pPr>
+            <a:r>
+              <a:rPr lang="en-US" sz="1600" b="1" dirty="0">
+                <a:solidFill>
+                  <a:srgbClr val="E9C46A"/>
+                </a:solidFill>
+                <a:latin typeface="Calibri" pitchFamily="34" charset="0"/>
+                <a:ea typeface="Calibri" pitchFamily="34" charset="-122"/>
+                <a:cs typeface="Calibri" pitchFamily="34" charset="-120"/>
+              </a:rPr>
+              <a:t>European Hotspots</a:t>
+            </a:r>
+            <a:endParaRPr lang="en-US" sz="1600" dirty="0"/>
+          </a:p>
+        </p:txBody>
+      </p:sp>
+      <p:sp>
+        <p:nvSpPr>
+          <p:cNvPr id="12" name="Text 10"/>
+          <p:cNvSpPr/>
+          <p:nvPr/>
+        </p:nvSpPr>
+        <p:spPr>
+          <a:xfrm>
+            <a:off x="4937760" y="1691640"/>
+            <a:ext cx="3566160" cy="2743200"/>
+          </a:xfrm>
+          <a:prstGeom prst="rect">
+            <a:avLst/>
+          </a:prstGeom>
+          <a:noFill/>
+          <a:ln/>
+        </p:spPr>
+        <p:txBody>
+          <a:bodyPr wrap="square" rtlCol="0" anchor="ctr"/>
+          <a:lstStyle/>
           <a:p>
             <a:pPr marL="342900" indent="-342900">
               <a:spcAft>
-                <a:spcPts val="1000"/>
+                <a:spcPts val="600"/>
               </a:spcAft>
               <a:buSzPct val="100000"/>
               <a:buChar char="•"/>
             </a:pPr>
             <a:r>
-              <a:rPr lang="en-US" sz="1500" dirty="0">
-                <a:solidFill>
-                  <a:srgbClr val="CADCFC"/>
-                </a:solidFill>
-                <a:latin typeface="Calibri" pitchFamily="34" charset="0"/>
-                <a:ea typeface="Calibri" pitchFamily="34" charset="-122"/>
-                <a:cs typeface="Calibri" pitchFamily="34" charset="-120"/>
-              </a:rPr>
-              <a:t>~8.7 million species on Earth; only ~1.5 million identified</a:t>
-            </a:r>
-            <a:endParaRPr lang="en-US" sz="1500" dirty="0"/>
-          </a:p>
-        </p:txBody>
-      </p:sp>
-      <p:sp>
-        <p:nvSpPr>
-          <p:cNvPr id="5" name="Text 3"/>
-          <p:cNvSpPr/>
-          <p:nvPr/>
-        </p:nvSpPr>
-        <p:spPr>
-          <a:xfrm>
-            <a:off x="731520" y="4572000"/>
-            <a:ext cx="7772400" cy="365760"/>
+              <a:rPr lang="en-US" sz="1400" dirty="0">
+                <a:solidFill>
+                  <a:srgbClr val="3D3A36"/>
+                </a:solidFill>
+                <a:latin typeface="Calibri" pitchFamily="34" charset="0"/>
+                <a:ea typeface="Calibri" pitchFamily="34" charset="-122"/>
+                <a:cs typeface="Calibri" pitchFamily="34" charset="-120"/>
+              </a:rPr>
+              <a:t>Mediterranean Basin: olives, cork oak, endemic species.</a:t>
+            </a:r>
+            <a:endParaRPr lang="en-US" sz="1400" dirty="0"/>
+          </a:p>
+          <a:p>
+            <a:pPr marL="342900" indent="-342900">
+              <a:spcAft>
+                <a:spcPts val="600"/>
+              </a:spcAft>
+              <a:buSzPct val="100000"/>
+              <a:buChar char="•"/>
+            </a:pPr>
+            <a:r>
+              <a:rPr lang="en-US" sz="1400" dirty="0">
+                <a:solidFill>
+                  <a:srgbClr val="3D3A36"/>
+                </a:solidFill>
+                <a:latin typeface="Calibri" pitchFamily="34" charset="0"/>
+                <a:ea typeface="Calibri" pitchFamily="34" charset="-122"/>
+                <a:cs typeface="Calibri" pitchFamily="34" charset="-120"/>
+              </a:rPr>
+              <a:t>Bavarian Alps: alpine meadows.</a:t>
+            </a:r>
+            <a:endParaRPr lang="en-US" sz="1400" dirty="0"/>
+          </a:p>
+          <a:p>
+            <a:pPr marL="342900" indent="-342900">
+              <a:spcAft>
+                <a:spcPts val="600"/>
+              </a:spcAft>
+              <a:buSzPct val="100000"/>
+              <a:buChar char="•"/>
+            </a:pPr>
+            <a:r>
+              <a:rPr lang="en-US" sz="1400" dirty="0">
+                <a:solidFill>
+                  <a:srgbClr val="3D3A36"/>
+                </a:solidFill>
+                <a:latin typeface="Calibri" pitchFamily="34" charset="0"/>
+                <a:ea typeface="Calibri" pitchFamily="34" charset="-122"/>
+                <a:cs typeface="Calibri" pitchFamily="34" charset="-120"/>
+              </a:rPr>
+              <a:t>Wadden Sea (Germany/Netherlands): UNESCO site.</a:t>
+            </a:r>
+            <a:endParaRPr lang="en-US" sz="1400" dirty="0"/>
+          </a:p>
+          <a:p>
+            <a:pPr marL="342900" indent="-342900">
+              <a:spcAft>
+                <a:spcPts val="600"/>
+              </a:spcAft>
+              <a:buSzPct val="100000"/>
+              <a:buChar char="•"/>
+            </a:pPr>
+            <a:r>
+              <a:rPr lang="en-US" sz="1400" dirty="0">
+                <a:solidFill>
+                  <a:srgbClr val="3D3A36"/>
+                </a:solidFill>
+                <a:latin typeface="Calibri" pitchFamily="34" charset="0"/>
+                <a:ea typeface="Calibri" pitchFamily="34" charset="-122"/>
+                <a:cs typeface="Calibri" pitchFamily="34" charset="-120"/>
+              </a:rPr>
+              <a:t>Black Forest: recovering from acid rain.</a:t>
+            </a:r>
+            <a:endParaRPr lang="en-US" sz="1400" dirty="0"/>
+          </a:p>
+        </p:txBody>
+      </p:sp>
+    </p:spTree>
+  </p:cSld>
+  <p:clrMapOvr>
+    <a:masterClrMapping/>
+  </p:clrMapOvr>
+</p:sld>
+</file>
+
+<file path=ppt/slides/slide6.xml><?xml version="1.0" encoding="utf-8"?>
+<p:sld xmlns:a="http://schemas.openxmlformats.org/drawingml/2006/main" xmlns:r="http://schemas.openxmlformats.org/officeDocument/2006/relationships" xmlns:p="http://schemas.openxmlformats.org/presentationml/2006/main">
+  <p:cSld name="Slide 6">
+    <p:bg>
+      <p:bgPr>
+        <a:solidFill>
+          <a:srgbClr val="FAF8F5"/>
+        </a:solidFill>
+      </p:bgPr>
+    </p:bg>
+    <p:spTree>
+      <p:nvGrpSpPr>
+        <p:cNvPr id="1" name=""/>
+        <p:cNvGrpSpPr/>
+        <p:nvPr/>
+      </p:nvGrpSpPr>
+      <p:grpSpPr>
+        <a:xfrm>
+          <a:off x="0" y="0"/>
+          <a:ext cx="0" cy="0"/>
+          <a:chOff x="0" y="0"/>
+          <a:chExt cx="0" cy="0"/>
+        </a:xfrm>
+      </p:grpSpPr>
+      <p:sp>
+        <p:nvSpPr>
+          <p:cNvPr id="2" name="Shape 0"/>
+          <p:cNvSpPr/>
+          <p:nvPr/>
+        </p:nvSpPr>
+        <p:spPr>
+          <a:xfrm>
+            <a:off x="0" y="0"/>
+            <a:ext cx="9144000" cy="822960"/>
+          </a:xfrm>
+          <a:prstGeom prst="rect">
+            <a:avLst/>
+          </a:prstGeom>
+          <a:solidFill>
+            <a:srgbClr val="FFFFFF"/>
+          </a:solidFill>
+          <a:ln/>
+        </p:spPr>
+      </p:sp>
+      <p:sp>
+        <p:nvSpPr>
+          <p:cNvPr id="3" name="Shape 1"/>
+          <p:cNvSpPr/>
+          <p:nvPr/>
+        </p:nvSpPr>
+        <p:spPr>
+          <a:xfrm>
+            <a:off x="0" y="795528"/>
+            <a:ext cx="9144000" cy="27432"/>
+          </a:xfrm>
+          <a:prstGeom prst="rect">
+            <a:avLst/>
+          </a:prstGeom>
+          <a:solidFill>
+            <a:srgbClr val="2A9D8F"/>
+          </a:solidFill>
+          <a:ln/>
+        </p:spPr>
+      </p:sp>
+      <p:sp>
+        <p:nvSpPr>
+          <p:cNvPr id="4" name="Text 2"/>
+          <p:cNvSpPr/>
+          <p:nvPr/>
+        </p:nvSpPr>
+        <p:spPr>
+          <a:xfrm>
+            <a:off x="640080" y="91440"/>
+            <a:ext cx="7863840" cy="640080"/>
           </a:xfrm>
           <a:prstGeom prst="rect">
             <a:avLst/>
@@ -2588,16 +3270,1166 @@
           <a:ln/>
         </p:spPr>
         <p:txBody>
-          <a:bodyPr wrap="square" rtlCol="0" anchor="ctr"/>
+          <a:bodyPr wrap="square" lIns="0" tIns="0" rIns="0" bIns="0" rtlCol="0" anchor="ctr"/>
           <a:lstStyle/>
           <a:p>
             <a:pPr indent="0" marL="0">
               <a:buNone/>
             </a:pPr>
             <a:r>
+              <a:rPr lang="en-US" sz="2200" b="1" dirty="0">
+                <a:solidFill>
+                  <a:srgbClr val="1B2A4A"/>
+                </a:solidFill>
+                <a:latin typeface="Georgia" pitchFamily="34" charset="0"/>
+                <a:ea typeface="Georgia" pitchFamily="34" charset="-122"/>
+                <a:cs typeface="Georgia" pitchFamily="34" charset="-120"/>
+              </a:rPr>
+              <a:t>Measuring Biodiversity</a:t>
+            </a:r>
+            <a:endParaRPr lang="en-US" sz="2200" dirty="0"/>
+          </a:p>
+        </p:txBody>
+      </p:sp>
+      <p:sp>
+        <p:nvSpPr>
+          <p:cNvPr id="5" name="Text 3"/>
+          <p:cNvSpPr/>
+          <p:nvPr/>
+        </p:nvSpPr>
+        <p:spPr>
+          <a:xfrm>
+            <a:off x="640080" y="1005840"/>
+            <a:ext cx="7863840" cy="2926080"/>
+          </a:xfrm>
+          <a:prstGeom prst="rect">
+            <a:avLst/>
+          </a:prstGeom>
+          <a:noFill/>
+          <a:ln/>
+        </p:spPr>
+        <p:txBody>
+          <a:bodyPr wrap="square" rtlCol="0" anchor="ctr"/>
+          <a:lstStyle/>
+          <a:p>
+            <a:pPr marL="342900" indent="-342900">
+              <a:spcAft>
+                <a:spcPts val="800"/>
+              </a:spcAft>
+              <a:buSzPct val="100000"/>
+              <a:buChar char="•"/>
+            </a:pPr>
+            <a:r>
+              <a:rPr lang="en-US" sz="1600" dirty="0">
+                <a:solidFill>
+                  <a:srgbClr val="3D3A36"/>
+                </a:solidFill>
+                <a:latin typeface="Calibri" pitchFamily="34" charset="0"/>
+                <a:ea typeface="Calibri" pitchFamily="34" charset="-122"/>
+                <a:cs typeface="Calibri" pitchFamily="34" charset="-120"/>
+              </a:rPr>
+              <a:t>Count the number of different species in an area.</a:t>
+            </a:r>
+            <a:endParaRPr lang="en-US" sz="1600" dirty="0"/>
+          </a:p>
+          <a:p>
+            <a:pPr marL="342900" indent="-342900">
+              <a:spcAft>
+                <a:spcPts val="800"/>
+              </a:spcAft>
+              <a:buSzPct val="100000"/>
+              <a:buChar char="•"/>
+            </a:pPr>
+            <a:r>
+              <a:rPr lang="en-US" sz="1600" dirty="0">
+                <a:solidFill>
+                  <a:srgbClr val="3D3A36"/>
+                </a:solidFill>
+                <a:latin typeface="Calibri" pitchFamily="34" charset="0"/>
+                <a:ea typeface="Calibri" pitchFamily="34" charset="-122"/>
+                <a:cs typeface="Calibri" pitchFamily="34" charset="-120"/>
+              </a:rPr>
+              <a:t>Use a quadrat (a square frame) to sample small areas.</a:t>
+            </a:r>
+            <a:endParaRPr lang="en-US" sz="1600" dirty="0"/>
+          </a:p>
+          <a:p>
+            <a:pPr marL="342900" indent="-342900">
+              <a:spcAft>
+                <a:spcPts val="800"/>
+              </a:spcAft>
+              <a:buSzPct val="100000"/>
+              <a:buChar char="•"/>
+            </a:pPr>
+            <a:r>
+              <a:rPr lang="en-US" sz="1600" dirty="0">
+                <a:solidFill>
+                  <a:srgbClr val="3D3A36"/>
+                </a:solidFill>
+                <a:latin typeface="Calibri" pitchFamily="34" charset="0"/>
+                <a:ea typeface="Calibri" pitchFamily="34" charset="-122"/>
+                <a:cs typeface="Calibri" pitchFamily="34" charset="-120"/>
+              </a:rPr>
+              <a:t>Calculate species richness (how many species) and abundance (how many of each).</a:t>
+            </a:r>
+            <a:endParaRPr lang="en-US" sz="1600" dirty="0"/>
+          </a:p>
+          <a:p>
+            <a:pPr marL="342900" indent="-342900">
+              <a:spcAft>
+                <a:spcPts val="800"/>
+              </a:spcAft>
+              <a:buSzPct val="100000"/>
+              <a:buChar char="•"/>
+            </a:pPr>
+            <a:r>
+              <a:rPr lang="en-US" sz="1600" dirty="0">
+                <a:solidFill>
+                  <a:srgbClr val="3D3A36"/>
+                </a:solidFill>
+                <a:latin typeface="Calibri" pitchFamily="34" charset="0"/>
+                <a:ea typeface="Calibri" pitchFamily="34" charset="-122"/>
+                <a:cs typeface="Calibri" pitchFamily="34" charset="-120"/>
+              </a:rPr>
+              <a:t>Compare samples from different habitats.</a:t>
+            </a:r>
+            <a:endParaRPr lang="en-US" sz="1600" dirty="0"/>
+          </a:p>
+          <a:p>
+            <a:pPr marL="342900" indent="-342900">
+              <a:spcAft>
+                <a:spcPts val="800"/>
+              </a:spcAft>
+              <a:buSzPct val="100000"/>
+              <a:buChar char="•"/>
+            </a:pPr>
+            <a:r>
+              <a:rPr lang="en-US" sz="1600" dirty="0">
+                <a:solidFill>
+                  <a:srgbClr val="3D3A36"/>
+                </a:solidFill>
+                <a:latin typeface="Calibri" pitchFamily="34" charset="0"/>
+                <a:ea typeface="Calibri" pitchFamily="34" charset="-122"/>
+                <a:cs typeface="Calibri" pitchFamily="34" charset="-120"/>
+              </a:rPr>
+              <a:t>The Korean DMZ: researchers found 5,000+ species in surveys.</a:t>
+            </a:r>
+            <a:endParaRPr lang="en-US" sz="1600" dirty="0"/>
+          </a:p>
+        </p:txBody>
+      </p:sp>
+    </p:spTree>
+  </p:cSld>
+  <p:clrMapOvr>
+    <a:masterClrMapping/>
+  </p:clrMapOvr>
+</p:sld>
+</file>
+
+<file path=ppt/slides/slide7.xml><?xml version="1.0" encoding="utf-8"?>
+<p:sld xmlns:a="http://schemas.openxmlformats.org/drawingml/2006/main" xmlns:r="http://schemas.openxmlformats.org/officeDocument/2006/relationships" xmlns:p="http://schemas.openxmlformats.org/presentationml/2006/main">
+  <p:cSld name="Slide 7">
+    <p:bg>
+      <p:bgPr>
+        <a:solidFill>
+          <a:srgbClr val="FAF8F5"/>
+        </a:solidFill>
+      </p:bgPr>
+    </p:bg>
+    <p:spTree>
+      <p:nvGrpSpPr>
+        <p:cNvPr id="1" name=""/>
+        <p:cNvGrpSpPr/>
+        <p:nvPr/>
+      </p:nvGrpSpPr>
+      <p:grpSpPr>
+        <a:xfrm>
+          <a:off x="0" y="0"/>
+          <a:ext cx="0" cy="0"/>
+          <a:chOff x="0" y="0"/>
+          <a:chExt cx="0" cy="0"/>
+        </a:xfrm>
+      </p:grpSpPr>
+      <p:sp>
+        <p:nvSpPr>
+          <p:cNvPr id="2" name="Shape 0"/>
+          <p:cNvSpPr/>
+          <p:nvPr/>
+        </p:nvSpPr>
+        <p:spPr>
+          <a:xfrm>
+            <a:off x="0" y="0"/>
+            <a:ext cx="9144000" cy="822960"/>
+          </a:xfrm>
+          <a:prstGeom prst="rect">
+            <a:avLst/>
+          </a:prstGeom>
+          <a:solidFill>
+            <a:srgbClr val="FFFFFF"/>
+          </a:solidFill>
+          <a:ln/>
+        </p:spPr>
+      </p:sp>
+      <p:sp>
+        <p:nvSpPr>
+          <p:cNvPr id="3" name="Shape 1"/>
+          <p:cNvSpPr/>
+          <p:nvPr/>
+        </p:nvSpPr>
+        <p:spPr>
+          <a:xfrm>
+            <a:off x="0" y="795528"/>
+            <a:ext cx="9144000" cy="27432"/>
+          </a:xfrm>
+          <a:prstGeom prst="rect">
+            <a:avLst/>
+          </a:prstGeom>
+          <a:solidFill>
+            <a:srgbClr val="2A9D8F"/>
+          </a:solidFill>
+          <a:ln/>
+        </p:spPr>
+      </p:sp>
+      <p:sp>
+        <p:nvSpPr>
+          <p:cNvPr id="4" name="Text 2"/>
+          <p:cNvSpPr/>
+          <p:nvPr/>
+        </p:nvSpPr>
+        <p:spPr>
+          <a:xfrm>
+            <a:off x="640080" y="91440"/>
+            <a:ext cx="7863840" cy="640080"/>
+          </a:xfrm>
+          <a:prstGeom prst="rect">
+            <a:avLst/>
+          </a:prstGeom>
+          <a:noFill/>
+          <a:ln/>
+        </p:spPr>
+        <p:txBody>
+          <a:bodyPr wrap="square" lIns="0" tIns="0" rIns="0" bIns="0" rtlCol="0" anchor="ctr"/>
+          <a:lstStyle/>
+          <a:p>
+            <a:pPr indent="0" marL="0">
+              <a:buNone/>
+            </a:pPr>
+            <a:r>
+              <a:rPr lang="en-US" sz="2200" b="1" dirty="0">
+                <a:solidFill>
+                  <a:srgbClr val="1B2A4A"/>
+                </a:solidFill>
+                <a:latin typeface="Georgia" pitchFamily="34" charset="0"/>
+                <a:ea typeface="Georgia" pitchFamily="34" charset="-122"/>
+                <a:cs typeface="Georgia" pitchFamily="34" charset="-120"/>
+              </a:rPr>
+              <a:t>Protecting Biodiversity</a:t>
+            </a:r>
+            <a:endParaRPr lang="en-US" sz="2200" dirty="0"/>
+          </a:p>
+        </p:txBody>
+      </p:sp>
+      <p:sp>
+        <p:nvSpPr>
+          <p:cNvPr id="5" name="Text 3"/>
+          <p:cNvSpPr/>
+          <p:nvPr/>
+        </p:nvSpPr>
+        <p:spPr>
+          <a:xfrm>
+            <a:off x="640080" y="1005840"/>
+            <a:ext cx="7863840" cy="2926080"/>
+          </a:xfrm>
+          <a:prstGeom prst="rect">
+            <a:avLst/>
+          </a:prstGeom>
+          <a:noFill/>
+          <a:ln/>
+        </p:spPr>
+        <p:txBody>
+          <a:bodyPr wrap="square" rtlCol="0" anchor="ctr"/>
+          <a:lstStyle/>
+          <a:p>
+            <a:pPr marL="342900" indent="-342900">
+              <a:spcAft>
+                <a:spcPts val="800"/>
+              </a:spcAft>
+              <a:buSzPct val="100000"/>
+              <a:buChar char="•"/>
+            </a:pPr>
+            <a:r>
+              <a:rPr lang="en-US" sz="1600" dirty="0">
+                <a:solidFill>
+                  <a:srgbClr val="3D3A36"/>
+                </a:solidFill>
+                <a:latin typeface="Calibri" pitchFamily="34" charset="0"/>
+                <a:ea typeface="Calibri" pitchFamily="34" charset="-122"/>
+                <a:cs typeface="Calibri" pitchFamily="34" charset="-120"/>
+              </a:rPr>
+              <a:t>National parks and protected areas.</a:t>
+            </a:r>
+            <a:endParaRPr lang="en-US" sz="1600" dirty="0"/>
+          </a:p>
+          <a:p>
+            <a:pPr marL="342900" indent="-342900">
+              <a:spcAft>
+                <a:spcPts val="800"/>
+              </a:spcAft>
+              <a:buSzPct val="100000"/>
+              <a:buChar char="•"/>
+            </a:pPr>
+            <a:r>
+              <a:rPr lang="en-US" sz="1600" dirty="0">
+                <a:solidFill>
+                  <a:srgbClr val="3D3A36"/>
+                </a:solidFill>
+                <a:latin typeface="Calibri" pitchFamily="34" charset="0"/>
+                <a:ea typeface="Calibri" pitchFamily="34" charset="-122"/>
+                <a:cs typeface="Calibri" pitchFamily="34" charset="-120"/>
+              </a:rPr>
+              <a:t>Breeding programmes for endangered species (panda, Amur leopard).</a:t>
+            </a:r>
+            <a:endParaRPr lang="en-US" sz="1600" dirty="0"/>
+          </a:p>
+          <a:p>
+            <a:pPr marL="342900" indent="-342900">
+              <a:spcAft>
+                <a:spcPts val="800"/>
+              </a:spcAft>
+              <a:buSzPct val="100000"/>
+              <a:buChar char="•"/>
+            </a:pPr>
+            <a:r>
+              <a:rPr lang="en-US" sz="1600" dirty="0">
+                <a:solidFill>
+                  <a:srgbClr val="3D3A36"/>
+                </a:solidFill>
+                <a:latin typeface="Calibri" pitchFamily="34" charset="0"/>
+                <a:ea typeface="Calibri" pitchFamily="34" charset="-122"/>
+                <a:cs typeface="Calibri" pitchFamily="34" charset="-120"/>
+              </a:rPr>
+              <a:t>Seed banks: China's Kunming seed bank stores 85,000+ species.</a:t>
+            </a:r>
+            <a:endParaRPr lang="en-US" sz="1600" dirty="0"/>
+          </a:p>
+          <a:p>
+            <a:pPr marL="342900" indent="-342900">
+              <a:spcAft>
+                <a:spcPts val="800"/>
+              </a:spcAft>
+              <a:buSzPct val="100000"/>
+              <a:buChar char="•"/>
+            </a:pPr>
+            <a:r>
+              <a:rPr lang="en-US" sz="1600" dirty="0">
+                <a:solidFill>
+                  <a:srgbClr val="3D3A36"/>
+                </a:solidFill>
+                <a:latin typeface="Calibri" pitchFamily="34" charset="0"/>
+                <a:ea typeface="Calibri" pitchFamily="34" charset="-122"/>
+                <a:cs typeface="Calibri" pitchFamily="34" charset="-120"/>
+              </a:rPr>
+              <a:t>International agreements: Convention on Biological Diversity.</a:t>
+            </a:r>
+            <a:endParaRPr lang="en-US" sz="1600" dirty="0"/>
+          </a:p>
+          <a:p>
+            <a:pPr marL="342900" indent="-342900">
+              <a:spcAft>
+                <a:spcPts val="800"/>
+              </a:spcAft>
+              <a:buSzPct val="100000"/>
+              <a:buChar char="•"/>
+            </a:pPr>
+            <a:r>
+              <a:rPr lang="en-US" sz="1600" dirty="0">
+                <a:solidFill>
+                  <a:srgbClr val="3D3A36"/>
+                </a:solidFill>
+                <a:latin typeface="Calibri" pitchFamily="34" charset="0"/>
+                <a:ea typeface="Calibri" pitchFamily="34" charset="-122"/>
+                <a:cs typeface="Calibri" pitchFamily="34" charset="-120"/>
+              </a:rPr>
+              <a:t>YOUR role: reduce waste, support local ecosystems, learn and share.</a:t>
+            </a:r>
+            <a:endParaRPr lang="en-US" sz="1600" dirty="0"/>
+          </a:p>
+        </p:txBody>
+      </p:sp>
+    </p:spTree>
+  </p:cSld>
+  <p:clrMapOvr>
+    <a:masterClrMapping/>
+  </p:clrMapOvr>
+</p:sld>
+</file>
+
+<file path=ppt/slides/slide8.xml><?xml version="1.0" encoding="utf-8"?>
+<p:sld xmlns:a="http://schemas.openxmlformats.org/drawingml/2006/main" xmlns:r="http://schemas.openxmlformats.org/officeDocument/2006/relationships" xmlns:p="http://schemas.openxmlformats.org/presentationml/2006/main">
+  <p:cSld name="Slide 8">
+    <p:bg>
+      <p:bgPr>
+        <a:solidFill>
+          <a:srgbClr val="FAF8F5"/>
+        </a:solidFill>
+      </p:bgPr>
+    </p:bg>
+    <p:spTree>
+      <p:nvGrpSpPr>
+        <p:cNvPr id="1" name=""/>
+        <p:cNvGrpSpPr/>
+        <p:nvPr/>
+      </p:nvGrpSpPr>
+      <p:grpSpPr>
+        <a:xfrm>
+          <a:off x="0" y="0"/>
+          <a:ext cx="0" cy="0"/>
+          <a:chOff x="0" y="0"/>
+          <a:chExt cx="0" cy="0"/>
+        </a:xfrm>
+      </p:grpSpPr>
+      <p:sp>
+        <p:nvSpPr>
+          <p:cNvPr id="2" name="Shape 0"/>
+          <p:cNvSpPr/>
+          <p:nvPr/>
+        </p:nvSpPr>
+        <p:spPr>
+          <a:xfrm>
+            <a:off x="0" y="0"/>
+            <a:ext cx="9144000" cy="822960"/>
+          </a:xfrm>
+          <a:prstGeom prst="rect">
+            <a:avLst/>
+          </a:prstGeom>
+          <a:solidFill>
+            <a:srgbClr val="FFFFFF"/>
+          </a:solidFill>
+          <a:ln/>
+        </p:spPr>
+      </p:sp>
+      <p:sp>
+        <p:nvSpPr>
+          <p:cNvPr id="3" name="Shape 1"/>
+          <p:cNvSpPr/>
+          <p:nvPr/>
+        </p:nvSpPr>
+        <p:spPr>
+          <a:xfrm>
+            <a:off x="0" y="795528"/>
+            <a:ext cx="9144000" cy="27432"/>
+          </a:xfrm>
+          <a:prstGeom prst="rect">
+            <a:avLst/>
+          </a:prstGeom>
+          <a:solidFill>
+            <a:srgbClr val="2A9D8F"/>
+          </a:solidFill>
+          <a:ln/>
+        </p:spPr>
+      </p:sp>
+      <p:sp>
+        <p:nvSpPr>
+          <p:cNvPr id="4" name="Text 2"/>
+          <p:cNvSpPr/>
+          <p:nvPr/>
+        </p:nvSpPr>
+        <p:spPr>
+          <a:xfrm>
+            <a:off x="640080" y="91440"/>
+            <a:ext cx="7863840" cy="640080"/>
+          </a:xfrm>
+          <a:prstGeom prst="rect">
+            <a:avLst/>
+          </a:prstGeom>
+          <a:noFill/>
+          <a:ln/>
+        </p:spPr>
+        <p:txBody>
+          <a:bodyPr wrap="square" lIns="0" tIns="0" rIns="0" bIns="0" rtlCol="0" anchor="ctr"/>
+          <a:lstStyle/>
+          <a:p>
+            <a:pPr indent="0" marL="0">
+              <a:buNone/>
+            </a:pPr>
+            <a:r>
+              <a:rPr lang="en-US" sz="2200" b="1" dirty="0">
+                <a:solidFill>
+                  <a:srgbClr val="1B2A4A"/>
+                </a:solidFill>
+                <a:latin typeface="Georgia" pitchFamily="34" charset="0"/>
+                <a:ea typeface="Georgia" pitchFamily="34" charset="-122"/>
+                <a:cs typeface="Georgia" pitchFamily="34" charset="-120"/>
+              </a:rPr>
+              <a:t>Recommended Videos</a:t>
+            </a:r>
+            <a:endParaRPr lang="en-US" sz="2200" dirty="0"/>
+          </a:p>
+        </p:txBody>
+      </p:sp>
+      <p:sp>
+        <p:nvSpPr>
+          <p:cNvPr id="5" name="Text 3"/>
+          <p:cNvSpPr/>
+          <p:nvPr/>
+        </p:nvSpPr>
+        <p:spPr>
+          <a:xfrm>
+            <a:off x="640080" y="868680"/>
+            <a:ext cx="7863840" cy="274320"/>
+          </a:xfrm>
+          <a:prstGeom prst="rect">
+            <a:avLst/>
+          </a:prstGeom>
+          <a:noFill/>
+          <a:ln/>
+        </p:spPr>
+        <p:txBody>
+          <a:bodyPr wrap="square" rtlCol="0" anchor="ctr"/>
+          <a:lstStyle/>
+          <a:p>
+            <a:pPr indent="0" marL="0">
+              <a:buNone/>
+            </a:pPr>
+            <a:r>
+              <a:rPr lang="en-US" sz="1200" i="1" dirty="0">
+                <a:solidFill>
+                  <a:srgbClr val="6B6660"/>
+                </a:solidFill>
+                <a:latin typeface="Calibri" pitchFamily="34" charset="0"/>
+                <a:ea typeface="Calibri" pitchFamily="34" charset="-122"/>
+                <a:cs typeface="Calibri" pitchFamily="34" charset="-120"/>
+              </a:rPr>
+              <a:t>Search these on YouTube to learn more.</a:t>
+            </a:r>
+            <a:endParaRPr lang="en-US" sz="1200" dirty="0"/>
+          </a:p>
+        </p:txBody>
+      </p:sp>
+      <p:sp>
+        <p:nvSpPr>
+          <p:cNvPr id="6" name="Shape 4"/>
+          <p:cNvSpPr/>
+          <p:nvPr/>
+        </p:nvSpPr>
+        <p:spPr>
+          <a:xfrm>
+            <a:off x="457200" y="1234440"/>
+            <a:ext cx="8229600" cy="1051560"/>
+          </a:xfrm>
+          <a:prstGeom prst="rect">
+            <a:avLst/>
+          </a:prstGeom>
+          <a:solidFill>
+            <a:srgbClr val="FFFFFF"/>
+          </a:solidFill>
+          <a:ln/>
+          <a:effectLst>
+            <a:outerShdw sx="100000" sy="100000" kx="0" ky="0" algn="bl" rotWithShape="0" blurRad="76200" dist="25400" dir="8100000">
+              <a:srgbClr val="000000">
+                <a:alpha val="12000"/>
+              </a:srgbClr>
+            </a:outerShdw>
+          </a:effectLst>
+        </p:spPr>
+      </p:sp>
+      <p:sp>
+        <p:nvSpPr>
+          <p:cNvPr id="7" name="Shape 5"/>
+          <p:cNvSpPr/>
+          <p:nvPr/>
+        </p:nvSpPr>
+        <p:spPr>
+          <a:xfrm>
+            <a:off x="457200" y="1234440"/>
+            <a:ext cx="64008" cy="1051560"/>
+          </a:xfrm>
+          <a:prstGeom prst="rect">
+            <a:avLst/>
+          </a:prstGeom>
+          <a:solidFill>
+            <a:srgbClr val="2A9D8F"/>
+          </a:solidFill>
+          <a:ln/>
+        </p:spPr>
+      </p:sp>
+      <p:sp>
+        <p:nvSpPr>
+          <p:cNvPr id="8" name="Text 6"/>
+          <p:cNvSpPr/>
+          <p:nvPr/>
+        </p:nvSpPr>
+        <p:spPr>
+          <a:xfrm>
+            <a:off x="640080" y="1325880"/>
+            <a:ext cx="457200" cy="457200"/>
+          </a:xfrm>
+          <a:prstGeom prst="rect">
+            <a:avLst/>
+          </a:prstGeom>
+          <a:noFill/>
+          <a:ln/>
+        </p:spPr>
+        <p:txBody>
+          <a:bodyPr wrap="square" rtlCol="0" anchor="ctr"/>
+          <a:lstStyle/>
+          <a:p>
+            <a:pPr algn="ctr" indent="0" marL="0">
+              <a:buNone/>
+            </a:pPr>
+            <a:r>
+              <a:rPr lang="en-US" sz="2000" dirty="0">
+                <a:solidFill>
+                  <a:srgbClr val="2A9D8F"/>
+                </a:solidFill>
+                <a:latin typeface="Calibri" pitchFamily="34" charset="0"/>
+                <a:ea typeface="Calibri" pitchFamily="34" charset="-122"/>
+                <a:cs typeface="Calibri" pitchFamily="34" charset="-120"/>
+              </a:rPr>
+              <a:t>▶</a:t>
+            </a:r>
+            <a:endParaRPr lang="en-US" sz="2000" dirty="0"/>
+          </a:p>
+        </p:txBody>
+      </p:sp>
+      <p:sp>
+        <p:nvSpPr>
+          <p:cNvPr id="9" name="Text 7"/>
+          <p:cNvSpPr/>
+          <p:nvPr/>
+        </p:nvSpPr>
+        <p:spPr>
+          <a:xfrm>
+            <a:off x="1188720" y="1307592"/>
+            <a:ext cx="7132320" cy="411480"/>
+          </a:xfrm>
+          <a:prstGeom prst="rect">
+            <a:avLst/>
+          </a:prstGeom>
+          <a:noFill/>
+          <a:ln/>
+        </p:spPr>
+        <p:txBody>
+          <a:bodyPr wrap="square" rtlCol="0" anchor="ctr"/>
+          <a:lstStyle/>
+          <a:p>
+            <a:pPr indent="0" marL="0">
+              <a:buNone/>
+            </a:pPr>
+            <a:r>
+              <a:rPr lang="en-US" sz="1400" b="1" dirty="0">
+                <a:solidFill>
+                  <a:srgbClr val="1B2A4A"/>
+                </a:solidFill>
+                <a:latin typeface="Calibri" pitchFamily="34" charset="0"/>
+                <a:ea typeface="Calibri" pitchFamily="34" charset="-122"/>
+                <a:cs typeface="Calibri" pitchFamily="34" charset="-120"/>
+              </a:rPr>
+              <a:t>What is Biodiversity?</a:t>
+            </a:r>
+            <a:endParaRPr lang="en-US" sz="1400" dirty="0"/>
+          </a:p>
+        </p:txBody>
+      </p:sp>
+      <p:sp>
+        <p:nvSpPr>
+          <p:cNvPr id="10" name="Text 8"/>
+          <p:cNvSpPr/>
+          <p:nvPr/>
+        </p:nvSpPr>
+        <p:spPr>
+          <a:xfrm>
+            <a:off x="1188720" y="1691640"/>
+            <a:ext cx="7132320" cy="320040"/>
+          </a:xfrm>
+          <a:prstGeom prst="rect">
+            <a:avLst/>
+          </a:prstGeom>
+          <a:noFill/>
+          <a:ln/>
+        </p:spPr>
+        <p:txBody>
+          <a:bodyPr wrap="square" rtlCol="0" anchor="ctr"/>
+          <a:lstStyle/>
+          <a:p>
+            <a:pPr indent="0" marL="0">
+              <a:buNone/>
+            </a:pPr>
+            <a:r>
               <a:rPr lang="en-US" sz="1100" dirty="0">
                 <a:solidFill>
-                  <a:srgbClr val="E9C46A"/>
+                  <a:srgbClr val="6B6660"/>
+                </a:solidFill>
+                <a:latin typeface="Calibri" pitchFamily="34" charset="0"/>
+                <a:ea typeface="Calibri" pitchFamily="34" charset="-122"/>
+                <a:cs typeface="Calibri" pitchFamily="34" charset="-120"/>
+              </a:rPr>
+              <a:t>FuseSchool  •  4 min</a:t>
+            </a:r>
+            <a:endParaRPr lang="en-US" sz="1100" dirty="0"/>
+          </a:p>
+        </p:txBody>
+      </p:sp>
+      <p:sp>
+        <p:nvSpPr>
+          <p:cNvPr id="11" name="Shape 9"/>
+          <p:cNvSpPr/>
+          <p:nvPr/>
+        </p:nvSpPr>
+        <p:spPr>
+          <a:xfrm>
+            <a:off x="457200" y="2423160"/>
+            <a:ext cx="8229600" cy="1051560"/>
+          </a:xfrm>
+          <a:prstGeom prst="rect">
+            <a:avLst/>
+          </a:prstGeom>
+          <a:solidFill>
+            <a:srgbClr val="FFFFFF"/>
+          </a:solidFill>
+          <a:ln/>
+          <a:effectLst>
+            <a:outerShdw sx="100000" sy="100000" kx="0" ky="0" algn="bl" rotWithShape="0" blurRad="76200" dist="25400" dir="8100000">
+              <a:srgbClr val="000000">
+                <a:alpha val="12000"/>
+              </a:srgbClr>
+            </a:outerShdw>
+          </a:effectLst>
+        </p:spPr>
+      </p:sp>
+      <p:sp>
+        <p:nvSpPr>
+          <p:cNvPr id="12" name="Shape 10"/>
+          <p:cNvSpPr/>
+          <p:nvPr/>
+        </p:nvSpPr>
+        <p:spPr>
+          <a:xfrm>
+            <a:off x="457200" y="2423160"/>
+            <a:ext cx="64008" cy="1051560"/>
+          </a:xfrm>
+          <a:prstGeom prst="rect">
+            <a:avLst/>
+          </a:prstGeom>
+          <a:solidFill>
+            <a:srgbClr val="2A9D8F"/>
+          </a:solidFill>
+          <a:ln/>
+        </p:spPr>
+      </p:sp>
+      <p:sp>
+        <p:nvSpPr>
+          <p:cNvPr id="13" name="Text 11"/>
+          <p:cNvSpPr/>
+          <p:nvPr/>
+        </p:nvSpPr>
+        <p:spPr>
+          <a:xfrm>
+            <a:off x="640080" y="2514600"/>
+            <a:ext cx="457200" cy="457200"/>
+          </a:xfrm>
+          <a:prstGeom prst="rect">
+            <a:avLst/>
+          </a:prstGeom>
+          <a:noFill/>
+          <a:ln/>
+        </p:spPr>
+        <p:txBody>
+          <a:bodyPr wrap="square" rtlCol="0" anchor="ctr"/>
+          <a:lstStyle/>
+          <a:p>
+            <a:pPr algn="ctr" indent="0" marL="0">
+              <a:buNone/>
+            </a:pPr>
+            <a:r>
+              <a:rPr lang="en-US" sz="2000" dirty="0">
+                <a:solidFill>
+                  <a:srgbClr val="2A9D8F"/>
+                </a:solidFill>
+                <a:latin typeface="Calibri" pitchFamily="34" charset="0"/>
+                <a:ea typeface="Calibri" pitchFamily="34" charset="-122"/>
+                <a:cs typeface="Calibri" pitchFamily="34" charset="-120"/>
+              </a:rPr>
+              <a:t>▶</a:t>
+            </a:r>
+            <a:endParaRPr lang="en-US" sz="2000" dirty="0"/>
+          </a:p>
+        </p:txBody>
+      </p:sp>
+      <p:sp>
+        <p:nvSpPr>
+          <p:cNvPr id="14" name="Text 12"/>
+          <p:cNvSpPr/>
+          <p:nvPr/>
+        </p:nvSpPr>
+        <p:spPr>
+          <a:xfrm>
+            <a:off x="1188720" y="2496312"/>
+            <a:ext cx="7132320" cy="411480"/>
+          </a:xfrm>
+          <a:prstGeom prst="rect">
+            <a:avLst/>
+          </a:prstGeom>
+          <a:noFill/>
+          <a:ln/>
+        </p:spPr>
+        <p:txBody>
+          <a:bodyPr wrap="square" rtlCol="0" anchor="ctr"/>
+          <a:lstStyle/>
+          <a:p>
+            <a:pPr indent="0" marL="0">
+              <a:buNone/>
+            </a:pPr>
+            <a:r>
+              <a:rPr lang="en-US" sz="1400" b="1" dirty="0">
+                <a:solidFill>
+                  <a:srgbClr val="1B2A4A"/>
+                </a:solidFill>
+                <a:latin typeface="Calibri" pitchFamily="34" charset="0"/>
+                <a:ea typeface="Calibri" pitchFamily="34" charset="-122"/>
+                <a:cs typeface="Calibri" pitchFamily="34" charset="-120"/>
+              </a:rPr>
+              <a:t>Why is Biodiversity Important?</a:t>
+            </a:r>
+            <a:endParaRPr lang="en-US" sz="1400" dirty="0"/>
+          </a:p>
+        </p:txBody>
+      </p:sp>
+      <p:sp>
+        <p:nvSpPr>
+          <p:cNvPr id="15" name="Text 13"/>
+          <p:cNvSpPr/>
+          <p:nvPr/>
+        </p:nvSpPr>
+        <p:spPr>
+          <a:xfrm>
+            <a:off x="1188720" y="2880360"/>
+            <a:ext cx="7132320" cy="320040"/>
+          </a:xfrm>
+          <a:prstGeom prst="rect">
+            <a:avLst/>
+          </a:prstGeom>
+          <a:noFill/>
+          <a:ln/>
+        </p:spPr>
+        <p:txBody>
+          <a:bodyPr wrap="square" rtlCol="0" anchor="ctr"/>
+          <a:lstStyle/>
+          <a:p>
+            <a:pPr indent="0" marL="0">
+              <a:buNone/>
+            </a:pPr>
+            <a:r>
+              <a:rPr lang="en-US" sz="1100" dirty="0">
+                <a:solidFill>
+                  <a:srgbClr val="6B6660"/>
+                </a:solidFill>
+                <a:latin typeface="Calibri" pitchFamily="34" charset="0"/>
+                <a:ea typeface="Calibri" pitchFamily="34" charset="-122"/>
+                <a:cs typeface="Calibri" pitchFamily="34" charset="-120"/>
+              </a:rPr>
+              <a:t>TED-Ed  •  5 min</a:t>
+            </a:r>
+            <a:endParaRPr lang="en-US" sz="1100" dirty="0"/>
+          </a:p>
+        </p:txBody>
+      </p:sp>
+      <p:sp>
+        <p:nvSpPr>
+          <p:cNvPr id="16" name="Shape 14"/>
+          <p:cNvSpPr/>
+          <p:nvPr/>
+        </p:nvSpPr>
+        <p:spPr>
+          <a:xfrm>
+            <a:off x="457200" y="3611880"/>
+            <a:ext cx="8229600" cy="1051560"/>
+          </a:xfrm>
+          <a:prstGeom prst="rect">
+            <a:avLst/>
+          </a:prstGeom>
+          <a:solidFill>
+            <a:srgbClr val="FFFFFF"/>
+          </a:solidFill>
+          <a:ln/>
+          <a:effectLst>
+            <a:outerShdw sx="100000" sy="100000" kx="0" ky="0" algn="bl" rotWithShape="0" blurRad="76200" dist="25400" dir="8100000">
+              <a:srgbClr val="000000">
+                <a:alpha val="12000"/>
+              </a:srgbClr>
+            </a:outerShdw>
+          </a:effectLst>
+        </p:spPr>
+      </p:sp>
+      <p:sp>
+        <p:nvSpPr>
+          <p:cNvPr id="17" name="Shape 15"/>
+          <p:cNvSpPr/>
+          <p:nvPr/>
+        </p:nvSpPr>
+        <p:spPr>
+          <a:xfrm>
+            <a:off x="457200" y="3611880"/>
+            <a:ext cx="64008" cy="1051560"/>
+          </a:xfrm>
+          <a:prstGeom prst="rect">
+            <a:avLst/>
+          </a:prstGeom>
+          <a:solidFill>
+            <a:srgbClr val="2A9D8F"/>
+          </a:solidFill>
+          <a:ln/>
+        </p:spPr>
+      </p:sp>
+      <p:sp>
+        <p:nvSpPr>
+          <p:cNvPr id="18" name="Text 16"/>
+          <p:cNvSpPr/>
+          <p:nvPr/>
+        </p:nvSpPr>
+        <p:spPr>
+          <a:xfrm>
+            <a:off x="640080" y="3703320"/>
+            <a:ext cx="457200" cy="457200"/>
+          </a:xfrm>
+          <a:prstGeom prst="rect">
+            <a:avLst/>
+          </a:prstGeom>
+          <a:noFill/>
+          <a:ln/>
+        </p:spPr>
+        <p:txBody>
+          <a:bodyPr wrap="square" rtlCol="0" anchor="ctr"/>
+          <a:lstStyle/>
+          <a:p>
+            <a:pPr algn="ctr" indent="0" marL="0">
+              <a:buNone/>
+            </a:pPr>
+            <a:r>
+              <a:rPr lang="en-US" sz="2000" dirty="0">
+                <a:solidFill>
+                  <a:srgbClr val="2A9D8F"/>
+                </a:solidFill>
+                <a:latin typeface="Calibri" pitchFamily="34" charset="0"/>
+                <a:ea typeface="Calibri" pitchFamily="34" charset="-122"/>
+                <a:cs typeface="Calibri" pitchFamily="34" charset="-120"/>
+              </a:rPr>
+              <a:t>▶</a:t>
+            </a:r>
+            <a:endParaRPr lang="en-US" sz="2000" dirty="0"/>
+          </a:p>
+        </p:txBody>
+      </p:sp>
+      <p:sp>
+        <p:nvSpPr>
+          <p:cNvPr id="19" name="Text 17"/>
+          <p:cNvSpPr/>
+          <p:nvPr/>
+        </p:nvSpPr>
+        <p:spPr>
+          <a:xfrm>
+            <a:off x="1188720" y="3685032"/>
+            <a:ext cx="7132320" cy="411480"/>
+          </a:xfrm>
+          <a:prstGeom prst="rect">
+            <a:avLst/>
+          </a:prstGeom>
+          <a:noFill/>
+          <a:ln/>
+        </p:spPr>
+        <p:txBody>
+          <a:bodyPr wrap="square" rtlCol="0" anchor="ctr"/>
+          <a:lstStyle/>
+          <a:p>
+            <a:pPr indent="0" marL="0">
+              <a:buNone/>
+            </a:pPr>
+            <a:r>
+              <a:rPr lang="en-US" sz="1400" b="1" dirty="0">
+                <a:solidFill>
+                  <a:srgbClr val="1B2A4A"/>
+                </a:solidFill>
+                <a:latin typeface="Calibri" pitchFamily="34" charset="0"/>
+                <a:ea typeface="Calibri" pitchFamily="34" charset="-122"/>
+                <a:cs typeface="Calibri" pitchFamily="34" charset="-120"/>
+              </a:rPr>
+              <a:t>Can We Fix Climate Change?</a:t>
+            </a:r>
+            <a:endParaRPr lang="en-US" sz="1400" dirty="0"/>
+          </a:p>
+        </p:txBody>
+      </p:sp>
+      <p:sp>
+        <p:nvSpPr>
+          <p:cNvPr id="20" name="Text 18"/>
+          <p:cNvSpPr/>
+          <p:nvPr/>
+        </p:nvSpPr>
+        <p:spPr>
+          <a:xfrm>
+            <a:off x="1188720" y="4069080"/>
+            <a:ext cx="7132320" cy="320040"/>
+          </a:xfrm>
+          <a:prstGeom prst="rect">
+            <a:avLst/>
+          </a:prstGeom>
+          <a:noFill/>
+          <a:ln/>
+        </p:spPr>
+        <p:txBody>
+          <a:bodyPr wrap="square" rtlCol="0" anchor="ctr"/>
+          <a:lstStyle/>
+          <a:p>
+            <a:pPr indent="0" marL="0">
+              <a:buNone/>
+            </a:pPr>
+            <a:r>
+              <a:rPr lang="en-US" sz="1100" dirty="0">
+                <a:solidFill>
+                  <a:srgbClr val="6B6660"/>
+                </a:solidFill>
+                <a:latin typeface="Calibri" pitchFamily="34" charset="0"/>
+                <a:ea typeface="Calibri" pitchFamily="34" charset="-122"/>
+                <a:cs typeface="Calibri" pitchFamily="34" charset="-120"/>
+              </a:rPr>
+              <a:t>Kurzgesagt  •  10 min</a:t>
+            </a:r>
+            <a:endParaRPr lang="en-US" sz="1100" dirty="0"/>
+          </a:p>
+        </p:txBody>
+      </p:sp>
+    </p:spTree>
+  </p:cSld>
+  <p:clrMapOvr>
+    <a:masterClrMapping/>
+  </p:clrMapOvr>
+</p:sld>
+</file>
+
+<file path=ppt/slides/slide9.xml><?xml version="1.0" encoding="utf-8"?>
+<p:sld xmlns:a="http://schemas.openxmlformats.org/drawingml/2006/main" xmlns:r="http://schemas.openxmlformats.org/officeDocument/2006/relationships" xmlns:p="http://schemas.openxmlformats.org/presentationml/2006/main">
+  <p:cSld name="Slide 9">
+    <p:spTree>
+      <p:nvGrpSpPr>
+        <p:cNvPr id="1" name=""/>
+        <p:cNvGrpSpPr/>
+        <p:nvPr/>
+      </p:nvGrpSpPr>
+      <p:grpSpPr>
+        <a:xfrm>
+          <a:off x="0" y="0"/>
+          <a:ext cx="0" cy="0"/>
+          <a:chOff x="0" y="0"/>
+          <a:chExt cx="0" cy="0"/>
+        </a:xfrm>
+      </p:grpSpPr>
+      <p:sp>
+        <p:nvSpPr>
+          <p:cNvPr id="2" name="Shape 0"/>
+          <p:cNvSpPr/>
+          <p:nvPr/>
+        </p:nvSpPr>
+        <p:spPr>
+          <a:xfrm>
+            <a:off x="0" y="0"/>
+            <a:ext cx="9144000" cy="5143500"/>
+          </a:xfrm>
+          <a:prstGeom prst="rect">
+            <a:avLst/>
+          </a:prstGeom>
+          <a:solidFill>
+            <a:srgbClr val="1B2A4A"/>
+          </a:solidFill>
+          <a:ln/>
+        </p:spPr>
+      </p:sp>
+      <p:sp>
+        <p:nvSpPr>
+          <p:cNvPr id="3" name="Shape 1"/>
+          <p:cNvSpPr/>
+          <p:nvPr/>
+        </p:nvSpPr>
+        <p:spPr>
+          <a:xfrm>
+            <a:off x="0" y="4777740"/>
+            <a:ext cx="9144000" cy="365760"/>
+          </a:xfrm>
+          <a:prstGeom prst="rect">
+            <a:avLst/>
+          </a:prstGeom>
+          <a:solidFill>
+            <a:srgbClr val="2A9D8F"/>
+          </a:solidFill>
+          <a:ln/>
+        </p:spPr>
+      </p:sp>
+      <p:sp>
+        <p:nvSpPr>
+          <p:cNvPr id="4" name="Text 2"/>
+          <p:cNvSpPr/>
+          <p:nvPr/>
+        </p:nvSpPr>
+        <p:spPr>
+          <a:xfrm>
+            <a:off x="731520" y="1371600"/>
+            <a:ext cx="7680960" cy="914400"/>
+          </a:xfrm>
+          <a:prstGeom prst="rect">
+            <a:avLst/>
+          </a:prstGeom>
+          <a:noFill/>
+          <a:ln/>
+        </p:spPr>
+        <p:txBody>
+          <a:bodyPr wrap="square" rtlCol="0" anchor="ctr"/>
+          <a:lstStyle/>
+          <a:p>
+            <a:pPr algn="ctr" indent="0" marL="0">
+              <a:buNone/>
+            </a:pPr>
+            <a:r>
+              <a:rPr lang="en-US" sz="3600" b="1" dirty="0">
+                <a:solidFill>
+                  <a:srgbClr val="FFFFFF"/>
+                </a:solidFill>
+                <a:latin typeface="Georgia" pitchFamily="34" charset="0"/>
+                <a:ea typeface="Georgia" pitchFamily="34" charset="-122"/>
+                <a:cs typeface="Georgia" pitchFamily="34" charset="-120"/>
+              </a:rPr>
+              <a:t>Review &amp; Practise</a:t>
+            </a:r>
+            <a:endParaRPr lang="en-US" sz="3600" dirty="0"/>
+          </a:p>
+        </p:txBody>
+      </p:sp>
+      <p:sp>
+        <p:nvSpPr>
+          <p:cNvPr id="5" name="Text 3"/>
+          <p:cNvSpPr/>
+          <p:nvPr/>
+        </p:nvSpPr>
+        <p:spPr>
+          <a:xfrm>
+            <a:off x="731520" y="2560320"/>
+            <a:ext cx="7680960" cy="548640"/>
+          </a:xfrm>
+          <a:prstGeom prst="rect">
+            <a:avLst/>
+          </a:prstGeom>
+          <a:noFill/>
+          <a:ln/>
+        </p:spPr>
+        <p:txBody>
+          <a:bodyPr wrap="square" rtlCol="0" anchor="ctr"/>
+          <a:lstStyle/>
+          <a:p>
+            <a:pPr algn="ctr" indent="0" marL="0">
+              <a:buNone/>
+            </a:pPr>
+            <a:r>
+              <a:rPr lang="en-US" sz="2000" dirty="0">
+                <a:solidFill>
+                  <a:srgbClr val="2A9D8F"/>
                 </a:solidFill>
                 <a:latin typeface="Calibri" pitchFamily="34" charset="0"/>
                 <a:ea typeface="Calibri" pitchFamily="34" charset="-122"/>
@@ -2605,7 +4437,7 @@
               </a:rPr>
               <a:t>mrzocchi.com</a:t>
             </a:r>
-            <a:endParaRPr lang="en-US" sz="1100" dirty="0"/>
+            <a:endParaRPr lang="en-US" sz="2000" dirty="0"/>
           </a:p>
         </p:txBody>
       </p:sp>
